--- a/Weekly_Report_Dashboard_Presentation.pptx
+++ b/Weekly_Report_Dashboard_Presentation.pptx
@@ -4,6 +4,9 @@
   <p:sldMasterIdLst>
     <p:sldMasterId id="2147483648" r:id="rId1"/>
   </p:sldMasterIdLst>
+  <p:notesMasterIdLst>
+    <p:notesMasterId r:id="rId12"/>
+  </p:notesMasterIdLst>
   <p:sldIdLst>
     <p:sldId id="256" r:id="rId2"/>
     <p:sldId id="257" r:id="rId3"/>
@@ -12,14 +15,10 @@
     <p:sldId id="260" r:id="rId6"/>
     <p:sldId id="261" r:id="rId7"/>
     <p:sldId id="262" r:id="rId8"/>
-    <p:sldId id="263" r:id="rId9"/>
-    <p:sldId id="264" r:id="rId10"/>
-    <p:sldId id="265" r:id="rId11"/>
-    <p:sldId id="266" r:id="rId12"/>
+    <p:sldId id="264" r:id="rId9"/>
+    <p:sldId id="265" r:id="rId10"/>
+    <p:sldId id="266" r:id="rId11"/>
   </p:sldIdLst>
-  <p:notesMasterIdLst>
-    <p:notesMasterId r:id="rId13"/>
-  </p:notesMasterIdLst>
   <p:sldSz cx="12192000" cy="6858000"/>
   <p:notesSz cx="6858000" cy="12192000"/>
   <p:defaultTextStyle>
@@ -114,13 +113,20 @@
       </a:defRPr>
     </a:lvl9pPr>
   </p:defaultTextStyle>
+  <p:extLst>
+    <p:ext uri="{EFAFB233-063F-42B5-8137-9DF3F51BA10A}">
+      <p15:sldGuideLst xmlns:p15="http://schemas.microsoft.com/office/powerpoint/2012/main"/>
+    </p:ext>
+  </p:extLst>
 </p:presentation>
 </file>
 
 <file path=ppt/charts/chart1.xml><?xml version="1.0" encoding="utf-8"?>
 <c:chartSpace xmlns:c="http://schemas.openxmlformats.org/drawingml/2006/chart" xmlns:a="http://schemas.openxmlformats.org/drawingml/2006/main" xmlns:r="http://schemas.openxmlformats.org/officeDocument/2006/relationships">
   <c:date1904 val="0"/>
+  <c:lang val="en-US"/>
   <c:roundedCorners val="1"/>
+  <c:style val="2"/>
   <c:chart>
     <c:title>
       <c:tx>
@@ -137,7 +143,7 @@
               </a:defRPr>
             </a:pPr>
             <a:r>
-              <a:rPr sz="1100" b="0" i="0" u="none" strike="noStrike">
+              <a:rPr lang="en-US" sz="1100" b="0" i="0" u="none" strike="noStrike">
                 <a:solidFill>
                   <a:srgbClr val="000000"/>
                 </a:solidFill>
@@ -155,6 +161,7 @@
     <c:plotArea>
       <c:layout/>
       <c:lineChart>
+        <c:grouping val="standard"/>
         <c:varyColors val="0"/>
         <c:ser>
           <c:idx val="0"/>
@@ -171,9 +178,6 @@
             </c:strRef>
           </c:tx>
           <c:spPr>
-            <a:solidFill>
-              <a:srgbClr val="3763F2"/>
-            </a:solidFill>
             <a:ln w="38100" cap="flat">
               <a:solidFill>
                 <a:srgbClr val="3763F2"/>
@@ -183,31 +187,6 @@
             </a:ln>
             <a:effectLst/>
           </c:spPr>
-          <c:invertIfNegative val="0"/>
-          <c:dLbls>
-            <c:numFmt formatCode="#,##0" sourceLinked="0"/>
-            <c:txPr>
-              <a:bodyPr/>
-              <a:lstStyle/>
-              <a:p>
-                <a:pPr>
-                  <a:defRPr b="0" i="0" strike="noStrike" sz="1200" u="none">
-                    <a:solidFill>
-                      <a:srgbClr val="111827"/>
-                    </a:solidFill>
-                    <a:latin typeface="Arial"/>
-                  </a:defRPr>
-                </a:pPr>
-              </a:p>
-            </c:txPr>
-            <c:showLegendKey val="0"/>
-            <c:showVal val="0"/>
-            <c:showCatName val="0"/>
-            <c:showSerName val="0"/>
-            <c:showPercent val="0"/>
-            <c:showBubbleSize val="0"/>
-            <c:showLeaderLines val="0"/>
-          </c:dLbls>
           <c:marker>
             <c:symbol val="circle"/>
             <c:size val="6"/>
@@ -226,26 +205,24 @@
             </c:spPr>
           </c:marker>
           <c:cat>
-            <c:multiLvlStrRef>
+            <c:strRef>
               <c:f>Sheet1!$A$2:$A$5</c:f>
-              <c:multiLvlStrCache>
+              <c:strCache>
                 <c:ptCount val="4"/>
-                <c:lvl>
-                  <c:pt idx="0">
-                    <c:v>Wk 1</c:v>
-                  </c:pt>
-                  <c:pt idx="1">
-                    <c:v>Wk 2</c:v>
-                  </c:pt>
-                  <c:pt idx="2">
-                    <c:v>Wk 3</c:v>
-                  </c:pt>
-                  <c:pt idx="3">
-                    <c:v>Wk 4</c:v>
-                  </c:pt>
-                </c:lvl>
-              </c:multiLvlStrCache>
-            </c:multiLvlStrRef>
+                <c:pt idx="0">
+                  <c:v>Wk 1</c:v>
+                </c:pt>
+                <c:pt idx="1">
+                  <c:v>Wk 2</c:v>
+                </c:pt>
+                <c:pt idx="2">
+                  <c:v>Wk 3</c:v>
+                </c:pt>
+                <c:pt idx="3">
+                  <c:v>Wk 4</c:v>
+                </c:pt>
+              </c:strCache>
+            </c:strRef>
           </c:cat>
           <c:val>
             <c:numRef>
@@ -271,36 +248,20 @@
           <c:smooth val="1"/>
         </c:ser>
         <c:dLbls>
-          <c:numFmt formatCode="#,##0" sourceLinked="0"/>
-          <c:txPr>
-            <a:bodyPr/>
-            <a:lstStyle/>
-            <a:p>
-              <a:pPr>
-                <a:defRPr b="0" i="0" strike="noStrike" sz="1200" u="none">
-                  <a:solidFill>
-                    <a:srgbClr val="111827"/>
-                  </a:solidFill>
-                  <a:latin typeface="Arial"/>
-                </a:defRPr>
-              </a:pPr>
-            </a:p>
-          </c:txPr>
           <c:showLegendKey val="0"/>
           <c:showVal val="0"/>
           <c:showCatName val="0"/>
           <c:showSerName val="0"/>
           <c:showPercent val="0"/>
           <c:showBubbleSize val="0"/>
-          <c:showLeaderLines val="0"/>
         </c:dLbls>
         <c:marker val="1"/>
-        <c:axId val="2094734554"/>
-        <c:axId val="2094734552"/>
-        <c:axId val="2094734556"/>
+        <c:smooth val="0"/>
+        <c:axId val="703362272"/>
+        <c:axId val="703362816"/>
       </c:lineChart>
       <c:catAx>
-        <c:axId val="2094734554"/>
+        <c:axId val="703362272"/>
         <c:scaling>
           <c:orientation val="minMax"/>
         </c:scaling>
@@ -334,14 +295,15 @@
             <a:endParaRPr lang="en-US"/>
           </a:p>
         </c:txPr>
-        <c:crossAx val="2094734552"/>
+        <c:crossAx val="703362816"/>
         <c:crosses val="autoZero"/>
         <c:auto val="1"/>
         <c:lblAlgn val="ctr"/>
+        <c:lblOffset val="100"/>
         <c:noMultiLvlLbl val="1"/>
       </c:catAx>
       <c:valAx>
-        <c:axId val="2094734552"/>
+        <c:axId val="703362816"/>
         <c:scaling>
           <c:orientation val="minMax"/>
         </c:scaling>
@@ -386,7 +348,7 @@
             <a:endParaRPr lang="en-US"/>
           </a:p>
         </c:txPr>
-        <c:crossAx val="2094734554"/>
+        <c:crossAx val="703362272"/>
         <c:crosses val="autoZero"/>
         <c:crossBetween val="between"/>
       </c:valAx>
@@ -400,6 +362,7 @@
     </c:plotArea>
     <c:plotVisOnly val="1"/>
     <c:dispBlanksAs val="span"/>
+    <c:showDLblsOverMax val="1"/>
   </c:chart>
   <c:spPr>
     <a:solidFill>
@@ -419,7 +382,9 @@
 <file path=ppt/charts/chart2.xml><?xml version="1.0" encoding="utf-8"?>
 <c:chartSpace xmlns:c="http://schemas.openxmlformats.org/drawingml/2006/chart" xmlns:a="http://schemas.openxmlformats.org/drawingml/2006/main" xmlns:r="http://schemas.openxmlformats.org/officeDocument/2006/relationships">
   <c:date1904 val="0"/>
+  <c:lang val="en-US"/>
   <c:roundedCorners val="1"/>
+  <c:style val="2"/>
   <c:chart>
     <c:title>
       <c:tx>
@@ -436,7 +401,7 @@
               </a:defRPr>
             </a:pPr>
             <a:r>
-              <a:rPr sz="1100" b="0" i="0" u="none" strike="noStrike">
+              <a:rPr lang="en-US" sz="1100" b="0" i="0" u="none" strike="noStrike">
                 <a:solidFill>
                   <a:srgbClr val="000000"/>
                 </a:solidFill>
@@ -480,18 +445,26 @@
           <c:invertIfNegative val="0"/>
           <c:dLbls>
             <c:numFmt formatCode="#,##0" sourceLinked="0"/>
+            <c:spPr>
+              <a:noFill/>
+              <a:ln>
+                <a:noFill/>
+              </a:ln>
+              <a:effectLst/>
+            </c:spPr>
             <c:txPr>
               <a:bodyPr/>
               <a:lstStyle/>
               <a:p>
                 <a:pPr>
-                  <a:defRPr b="0" i="0" strike="noStrike" sz="1200" u="none">
+                  <a:defRPr sz="1200" b="0" i="0" u="none" strike="noStrike">
                     <a:solidFill>
                       <a:srgbClr val="111827"/>
                     </a:solidFill>
                     <a:latin typeface="Arial"/>
                   </a:defRPr>
                 </a:pPr>
+                <a:endParaRPr lang="en-US"/>
               </a:p>
             </c:txPr>
             <c:showLegendKey val="0"/>
@@ -501,25 +474,29 @@
             <c:showPercent val="0"/>
             <c:showBubbleSize val="0"/>
             <c:showLeaderLines val="0"/>
+            <c:extLst>
+              <c:ext xmlns:c15="http://schemas.microsoft.com/office/drawing/2012/chart" uri="{CE6537A1-D6FC-4f65-9D91-7224C49458BB}">
+                <c15:layout/>
+                <c15:showLeaderLines val="0"/>
+              </c:ext>
+            </c:extLst>
           </c:dLbls>
           <c:cat>
-            <c:multiLvlStrRef>
+            <c:strRef>
               <c:f>Sheet1!$A$2:$A$4</c:f>
-              <c:multiLvlStrCache>
+              <c:strCache>
                 <c:ptCount val="3"/>
-                <c:lvl>
-                  <c:pt idx="0">
-                    <c:v>Submitted</c:v>
-                  </c:pt>
-                  <c:pt idx="1">
-                    <c:v>Pending</c:v>
-                  </c:pt>
-                  <c:pt idx="2">
-                    <c:v>Late</c:v>
-                  </c:pt>
-                </c:lvl>
-              </c:multiLvlStrCache>
-            </c:multiLvlStrRef>
+                <c:pt idx="0">
+                  <c:v>Submitted</c:v>
+                </c:pt>
+                <c:pt idx="1">
+                  <c:v>Pending</c:v>
+                </c:pt>
+                <c:pt idx="2">
+                  <c:v>Late</c:v>
+                </c:pt>
+              </c:strCache>
+            </c:strRef>
           </c:cat>
           <c:val>
             <c:numRef>
@@ -541,37 +518,19 @@
           </c:val>
         </c:ser>
         <c:dLbls>
-          <c:numFmt formatCode="#,##0" sourceLinked="0"/>
-          <c:txPr>
-            <a:bodyPr/>
-            <a:lstStyle/>
-            <a:p>
-              <a:pPr>
-                <a:defRPr b="0" i="0" strike="noStrike" sz="1200" u="none">
-                  <a:solidFill>
-                    <a:srgbClr val="111827"/>
-                  </a:solidFill>
-                  <a:latin typeface="Arial"/>
-                </a:defRPr>
-              </a:pPr>
-            </a:p>
-          </c:txPr>
           <c:showLegendKey val="0"/>
           <c:showVal val="1"/>
           <c:showCatName val="0"/>
           <c:showSerName val="0"/>
           <c:showPercent val="0"/>
           <c:showBubbleSize val="0"/>
-          <c:showLeaderLines val="0"/>
         </c:dLbls>
         <c:gapWidth val="150"/>
-        <c:overlap val="0"/>
-        <c:axId val="2094734554"/>
-        <c:axId val="2094734552"/>
-        <c:axId val="2094734556"/>
+        <c:axId val="804759344"/>
+        <c:axId val="804760976"/>
       </c:barChart>
       <c:catAx>
-        <c:axId val="2094734554"/>
+        <c:axId val="804759344"/>
         <c:scaling>
           <c:orientation val="minMax"/>
         </c:scaling>
@@ -605,14 +564,15 @@
             <a:endParaRPr lang="en-US"/>
           </a:p>
         </c:txPr>
-        <c:crossAx val="2094734552"/>
+        <c:crossAx val="804760976"/>
         <c:crosses val="autoZero"/>
         <c:auto val="1"/>
         <c:lblAlgn val="ctr"/>
+        <c:lblOffset val="100"/>
         <c:noMultiLvlLbl val="1"/>
       </c:catAx>
       <c:valAx>
-        <c:axId val="2094734552"/>
+        <c:axId val="804760976"/>
         <c:scaling>
           <c:orientation val="minMax"/>
         </c:scaling>
@@ -657,7 +617,7 @@
             <a:endParaRPr lang="en-US"/>
           </a:p>
         </c:txPr>
-        <c:crossAx val="2094734554"/>
+        <c:crossAx val="804759344"/>
         <c:crosses val="autoZero"/>
         <c:crossBetween val="between"/>
       </c:valAx>
@@ -671,6 +631,7 @@
     </c:plotArea>
     <c:plotVisOnly val="1"/>
     <c:dispBlanksAs val="span"/>
+    <c:showDLblsOverMax val="1"/>
   </c:chart>
   <c:spPr>
     <a:solidFill>
@@ -690,7 +651,9 @@
 <file path=ppt/charts/chart3.xml><?xml version="1.0" encoding="utf-8"?>
 <c:chartSpace xmlns:c="http://schemas.openxmlformats.org/drawingml/2006/chart" xmlns:a="http://schemas.openxmlformats.org/drawingml/2006/main" xmlns:r="http://schemas.openxmlformats.org/officeDocument/2006/relationships">
   <c:date1904 val="0"/>
+  <c:lang val="en-US"/>
   <c:roundedCorners val="1"/>
+  <c:style val="2"/>
   <c:chart>
     <c:title>
       <c:tx>
@@ -707,7 +670,7 @@
               </a:defRPr>
             </a:pPr>
             <a:r>
-              <a:rPr sz="1100" b="0" i="0" u="none" strike="noStrike">
+              <a:rPr lang="en-US" sz="1100" b="0" i="0" u="none" strike="noStrike">
                 <a:solidFill>
                   <a:srgbClr val="000000"/>
                 </a:solidFill>
@@ -796,6 +759,7 @@
           <c:dLbls>
             <c:dLbl>
               <c:idx val="0"/>
+              <c:layout/>
               <c:numFmt formatCode="0%" sourceLinked="0"/>
               <c:spPr/>
               <c:txPr>
@@ -810,6 +774,7 @@
                       <a:latin typeface="Arial"/>
                     </a:defRPr>
                   </a:pPr>
+                  <a:endParaRPr lang="en-US"/>
                 </a:p>
               </c:txPr>
               <c:showLegendKey val="0"/>
@@ -818,9 +783,15 @@
               <c:showSerName val="0"/>
               <c:showPercent val="1"/>
               <c:showBubbleSize val="0"/>
+              <c:extLst>
+                <c:ext xmlns:c15="http://schemas.microsoft.com/office/drawing/2012/chart" uri="{CE6537A1-D6FC-4f65-9D91-7224C49458BB}">
+                  <c15:layout/>
+                </c:ext>
+              </c:extLst>
             </c:dLbl>
             <c:dLbl>
               <c:idx val="1"/>
+              <c:layout/>
               <c:numFmt formatCode="0%" sourceLinked="0"/>
               <c:spPr/>
               <c:txPr>
@@ -835,6 +806,7 @@
                       <a:latin typeface="Arial"/>
                     </a:defRPr>
                   </a:pPr>
+                  <a:endParaRPr lang="en-US"/>
                 </a:p>
               </c:txPr>
               <c:showLegendKey val="0"/>
@@ -843,9 +815,15 @@
               <c:showSerName val="0"/>
               <c:showPercent val="1"/>
               <c:showBubbleSize val="0"/>
+              <c:extLst>
+                <c:ext xmlns:c15="http://schemas.microsoft.com/office/drawing/2012/chart" uri="{CE6537A1-D6FC-4f65-9D91-7224C49458BB}">
+                  <c15:layout/>
+                </c:ext>
+              </c:extLst>
             </c:dLbl>
             <c:dLbl>
               <c:idx val="2"/>
+              <c:layout/>
               <c:numFmt formatCode="0%" sourceLinked="0"/>
               <c:spPr/>
               <c:txPr>
@@ -860,6 +838,7 @@
                       <a:latin typeface="Arial"/>
                     </a:defRPr>
                   </a:pPr>
+                  <a:endParaRPr lang="en-US"/>
                 </a:p>
               </c:txPr>
               <c:showLegendKey val="0"/>
@@ -868,9 +847,15 @@
               <c:showSerName val="0"/>
               <c:showPercent val="1"/>
               <c:showBubbleSize val="0"/>
+              <c:extLst>
+                <c:ext xmlns:c15="http://schemas.microsoft.com/office/drawing/2012/chart" uri="{CE6537A1-D6FC-4f65-9D91-7224C49458BB}">
+                  <c15:layout/>
+                </c:ext>
+              </c:extLst>
             </c:dLbl>
             <c:dLbl>
               <c:idx val="3"/>
+              <c:layout/>
               <c:numFmt formatCode="0%" sourceLinked="0"/>
               <c:spPr/>
               <c:txPr>
@@ -885,6 +870,7 @@
                       <a:latin typeface="Arial"/>
                     </a:defRPr>
                   </a:pPr>
+                  <a:endParaRPr lang="en-US"/>
                 </a:p>
               </c:txPr>
               <c:showLegendKey val="0"/>
@@ -893,8 +879,20 @@
               <c:showSerName val="0"/>
               <c:showPercent val="1"/>
               <c:showBubbleSize val="0"/>
+              <c:extLst>
+                <c:ext xmlns:c15="http://schemas.microsoft.com/office/drawing/2012/chart" uri="{CE6537A1-D6FC-4f65-9D91-7224C49458BB}">
+                  <c15:layout/>
+                </c:ext>
+              </c:extLst>
             </c:dLbl>
             <c:numFmt formatCode="0%" sourceLinked="0"/>
+            <c:spPr>
+              <a:noFill/>
+              <a:ln>
+                <a:noFill/>
+              </a:ln>
+              <a:effectLst/>
+            </c:spPr>
             <c:txPr>
               <a:bodyPr/>
               <a:lstStyle/>
@@ -907,6 +905,7 @@
                     <a:latin typeface="Arial"/>
                   </a:defRPr>
                 </a:pPr>
+                <a:endParaRPr lang="en-US"/>
               </a:p>
             </c:txPr>
             <c:dLblPos val="ctr"/>
@@ -917,6 +916,9 @@
             <c:showPercent val="1"/>
             <c:showBubbleSize val="0"/>
             <c:showLeaderLines val="0"/>
+            <c:extLst>
+              <c:ext xmlns:c15="http://schemas.microsoft.com/office/drawing/2012/chart" uri="{CE6537A1-D6FC-4f65-9D91-7224C49458BB}"/>
+            </c:extLst>
           </c:dLbls>
           <c:cat>
             <c:strRef>
@@ -942,6 +944,7 @@
             <c:numRef>
               <c:f>Sheet1!$B$2:$B$5</c:f>
               <c:numCache>
+                <c:formatCode>General</c:formatCode>
                 <c:ptCount val="4"/>
                 <c:pt idx="0">
                   <c:v>72</c:v>
@@ -959,6 +962,15 @@
             </c:numRef>
           </c:val>
         </c:ser>
+        <c:dLbls>
+          <c:showLegendKey val="0"/>
+          <c:showVal val="0"/>
+          <c:showCatName val="0"/>
+          <c:showSerName val="0"/>
+          <c:showPercent val="0"/>
+          <c:showBubbleSize val="0"/>
+          <c:showLeaderLines val="0"/>
+        </c:dLbls>
         <c:firstSliceAng val="0"/>
       </c:pieChart>
       <c:spPr>
@@ -971,13 +983,14 @@
     </c:plotArea>
     <c:legend>
       <c:legendPos val="b"/>
+      <c:layout/>
       <c:overlay val="0"/>
       <c:txPr>
         <a:bodyPr/>
         <a:lstStyle/>
         <a:p>
           <a:pPr>
-            <a:defRPr sz="800">      </a:defRPr>
+            <a:defRPr sz="800"/>
           </a:pPr>
           <a:endParaRPr lang="en-US"/>
         </a:p>
@@ -985,6 +998,7 @@
     </c:legend>
     <c:plotVisOnly val="1"/>
     <c:dispBlanksAs val="span"/>
+    <c:showDLblsOverMax val="1"/>
   </c:chart>
   <c:spPr>
     <a:noFill/>
@@ -1021,234 +1035,10 @@
           <a:chExt cx="0" cy="0"/>
         </a:xfrm>
       </p:grpSpPr>
-      <p:sp>
-        <p:nvSpPr>
-          <p:cNvPr id="2" name="Header Placeholder 1"/>
-          <p:cNvSpPr>
-            <a:spLocks noGrp="1"/>
-          </p:cNvSpPr>
-          <p:nvPr>
-            <p:ph type="hdr" sz="quarter"/>
-          </p:nvPr>
-        </p:nvSpPr>
-        <p:spPr>
-          <a:xfrm>
-            <a:off x="0" y="0"/>
-            <a:ext cx="2971800" cy="458788"/>
-          </a:xfrm>
-          <a:prstGeom prst="rect">
-            <a:avLst/>
-          </a:prstGeom>
-        </p:spPr>
-        <p:txBody>
-          <a:bodyPr vert="horz" lIns="91440" tIns="45720" rIns="91440" bIns="45720" rtlCol="0"/>
-          <a:lstStyle>
-            <a:lvl1pPr algn="l">
-              <a:defRPr sz="1200"/>
-            </a:lvl1pPr>
-          </a:lstStyle>
-          <a:p>
-            <a:endParaRPr lang="en-US"/>
-          </a:p>
-        </p:txBody>
-      </p:sp>
-      <p:sp>
-        <p:nvSpPr>
-          <p:cNvPr id="3" name="Date Placeholder 2"/>
-          <p:cNvSpPr>
-            <a:spLocks noGrp="1"/>
-          </p:cNvSpPr>
-          <p:nvPr>
-            <p:ph type="dt" idx="1"/>
-          </p:nvPr>
-        </p:nvSpPr>
-        <p:spPr>
-          <a:xfrm>
-            <a:off x="3884613" y="0"/>
-            <a:ext cx="2971800" cy="458788"/>
-          </a:xfrm>
-          <a:prstGeom prst="rect">
-            <a:avLst/>
-          </a:prstGeom>
-        </p:spPr>
-        <p:txBody>
-          <a:bodyPr vert="horz" lIns="91440" tIns="45720" rIns="91440" bIns="45720" rtlCol="0"/>
-          <a:lstStyle>
-            <a:lvl1pPr algn="r">
-              <a:defRPr sz="1200"/>
-            </a:lvl1pPr>
-          </a:lstStyle>
-          <a:p>
-            <a:fld id="{5282F153-3F37-0F45-9E97-73ACFA13230C}" type="datetimeFigureOut">
-              <a:rPr lang="en-US"/>
-              <a:t>7/23/19</a:t>
-            </a:fld>
-            <a:endParaRPr lang="en-US"/>
-          </a:p>
-        </p:txBody>
-      </p:sp>
-      <p:sp>
-        <p:nvSpPr>
-          <p:cNvPr id="4" name="Slide Image Placeholder 3"/>
-          <p:cNvSpPr>
-            <a:spLocks noGrp="1" noRot="1" noChangeAspect="1"/>
-          </p:cNvSpPr>
-          <p:nvPr>
-            <p:ph type="sldImg" idx="2"/>
-          </p:nvPr>
-        </p:nvSpPr>
-        <p:spPr>
-          <a:xfrm>
-            <a:off x="685800" y="1143000"/>
-            <a:ext cx="5486400" cy="3086100"/>
-          </a:xfrm>
-          <a:prstGeom prst="rect">
-            <a:avLst/>
-          </a:prstGeom>
-          <a:noFill/>
-          <a:ln w="12700">
-            <a:solidFill>
-              <a:prstClr val="black"/>
-            </a:solidFill>
-          </a:ln>
-        </p:spPr>
-        <p:txBody>
-          <a:bodyPr vert="horz" lIns="91440" tIns="45720" rIns="91440" bIns="45720" rtlCol="0" anchor="ctr"/>
-          <a:lstStyle/>
-          <a:p>
-            <a:endParaRPr lang="en-US"/>
-          </a:p>
-        </p:txBody>
-      </p:sp>
-      <p:sp>
-        <p:nvSpPr>
-          <p:cNvPr id="5" name="Notes Placeholder 4"/>
-          <p:cNvSpPr>
-            <a:spLocks noGrp="1"/>
-          </p:cNvSpPr>
-          <p:nvPr>
-            <p:ph type="body" sz="quarter" idx="3"/>
-          </p:nvPr>
-        </p:nvSpPr>
-        <p:spPr>
-          <a:xfrm>
-            <a:off x="685800" y="4400550"/>
-            <a:ext cx="5486400" cy="3600450"/>
-          </a:xfrm>
-          <a:prstGeom prst="rect">
-            <a:avLst/>
-          </a:prstGeom>
-        </p:spPr>
-        <p:txBody>
-          <a:bodyPr vert="horz" lIns="91440" tIns="45720" rIns="91440" bIns="45720" rtlCol="0"/>
-          <a:lstStyle/>
-          <a:p>
-            <a:pPr lvl="0"/>
-            <a:r>
-              <a:rPr lang="en-US"/>
-              <a:t>Click to edit Master text styles</a:t>
-            </a:r>
-          </a:p>
-          <a:p>
-            <a:pPr lvl="1"/>
-            <a:r>
-              <a:rPr lang="en-US"/>
-              <a:t>Second level</a:t>
-            </a:r>
-          </a:p>
-          <a:p>
-            <a:pPr lvl="2"/>
-            <a:r>
-              <a:rPr lang="en-US"/>
-              <a:t>Third level</a:t>
-            </a:r>
-          </a:p>
-          <a:p>
-            <a:pPr lvl="3"/>
-            <a:r>
-              <a:rPr lang="en-US"/>
-              <a:t>Fourth level</a:t>
-            </a:r>
-          </a:p>
-          <a:p>
-            <a:pPr lvl="4"/>
-            <a:r>
-              <a:rPr lang="en-US"/>
-              <a:t>Fifth level</a:t>
-            </a:r>
-          </a:p>
-        </p:txBody>
-      </p:sp>
-      <p:sp>
-        <p:nvSpPr>
-          <p:cNvPr id="6" name="Footer Placeholder 5"/>
-          <p:cNvSpPr>
-            <a:spLocks noGrp="1"/>
-          </p:cNvSpPr>
-          <p:nvPr>
-            <p:ph type="ftr" sz="quarter" idx="4"/>
-          </p:nvPr>
-        </p:nvSpPr>
-        <p:spPr>
-          <a:xfrm>
-            <a:off x="0" y="8685213"/>
-            <a:ext cx="2971800" cy="458787"/>
-          </a:xfrm>
-          <a:prstGeom prst="rect">
-            <a:avLst/>
-          </a:prstGeom>
-        </p:spPr>
-        <p:txBody>
-          <a:bodyPr vert="horz" lIns="91440" tIns="45720" rIns="91440" bIns="45720" rtlCol="0" anchor="b"/>
-          <a:lstStyle>
-            <a:lvl1pPr algn="l">
-              <a:defRPr sz="1200"/>
-            </a:lvl1pPr>
-          </a:lstStyle>
-          <a:p>
-            <a:endParaRPr lang="en-US"/>
-          </a:p>
-        </p:txBody>
-      </p:sp>
-      <p:sp>
-        <p:nvSpPr>
-          <p:cNvPr id="7" name="Slide Number Placeholder 6"/>
-          <p:cNvSpPr>
-            <a:spLocks noGrp="1"/>
-          </p:cNvSpPr>
-          <p:nvPr>
-            <p:ph type="sldNum" sz="quarter" idx="5"/>
-          </p:nvPr>
-        </p:nvSpPr>
-        <p:spPr>
-          <a:xfrm>
-            <a:off x="3884613" y="8685213"/>
-            <a:ext cx="2971800" cy="458787"/>
-          </a:xfrm>
-          <a:prstGeom prst="rect">
-            <a:avLst/>
-          </a:prstGeom>
-        </p:spPr>
-        <p:txBody>
-          <a:bodyPr vert="horz" lIns="91440" tIns="45720" rIns="91440" bIns="45720" rtlCol="0" anchor="b"/>
-          <a:lstStyle>
-            <a:lvl1pPr algn="r">
-              <a:defRPr sz="1200"/>
-            </a:lvl1pPr>
-          </a:lstStyle>
-          <a:p>
-            <a:fld id="{CE5E9CC1-C706-0F49-92D6-E571CC5EEA8F}" type="slidenum">
-              <a:rPr lang="en-US"/>
-              <a:t>‹#›</a:t>
-            </a:fld>
-            <a:endParaRPr lang="en-US"/>
-          </a:p>
-        </p:txBody>
-      </p:sp>
     </p:spTree>
     <p:extLst>
       <p:ext uri="{BB962C8B-B14F-4D97-AF65-F5344CB8AC3E}">
-        <p14:creationId xmlns:p14="http://schemas.microsoft.com/office/powerpoint/2010/main" val="1024086991"/>
+        <p14:creationId xmlns:p14="http://schemas.microsoft.com/office/powerpoint/2010/main" val="2258306625"/>
       </p:ext>
     </p:extLst>
   </p:cSld>
@@ -1392,10 +1182,6 @@
           <a:bodyPr/>
           <a:lstStyle/>
           <a:p>
-            <a:r>
-              <a:rPr lang="en-US" dirty="0"/>
-              <a:t/>
-            </a:r>
             <a:endParaRPr lang="en-US" dirty="0"/>
           </a:p>
         </p:txBody>
@@ -1480,10 +1266,6 @@
           <a:bodyPr/>
           <a:lstStyle/>
           <a:p>
-            <a:r>
-              <a:rPr lang="en-US" dirty="0"/>
-              <a:t/>
-            </a:r>
             <a:endParaRPr lang="en-US" dirty="0"/>
           </a:p>
         </p:txBody>
@@ -1506,94 +1288,6 @@
             <a:fld id="{F7021451-1387-4CA6-816F-3879F97B5CBC}" type="slidenum">
               <a:rPr lang="en-US"/>
               <a:t>10</a:t>
-            </a:fld>
-            <a:endParaRPr lang="en-US"/>
-          </a:p>
-        </p:txBody>
-      </p:sp>
-    </p:spTree>
-    <p:extLst>
-      <p:ext uri="{BB962C8B-B14F-4D97-AF65-F5344CB8AC3E}">
-        <p14:creationId xmlns:p14="http://schemas.microsoft.com/office/powerpoint/2010/main" val="1024086991"/>
-      </p:ext>
-    </p:extLst>
-  </p:cSld>
-  <p:clrMapOvr>
-    <a:masterClrMapping/>
-  </p:clrMapOvr>
-</p:notes>
-</file>
-
-<file path=ppt/notesSlides/notesSlide11.xml><?xml version="1.0" encoding="utf-8"?>
-<p:notes xmlns:a="http://schemas.openxmlformats.org/drawingml/2006/main" xmlns:r="http://schemas.openxmlformats.org/officeDocument/2006/relationships" xmlns:p="http://schemas.openxmlformats.org/presentationml/2006/main">
-  <p:cSld>
-    <p:spTree>
-      <p:nvGrpSpPr>
-        <p:cNvPr id="1" name=""/>
-        <p:cNvGrpSpPr/>
-        <p:nvPr/>
-      </p:nvGrpSpPr>
-      <p:grpSpPr>
-        <a:xfrm>
-          <a:off x="0" y="0"/>
-          <a:ext cx="0" cy="0"/>
-          <a:chOff x="0" y="0"/>
-          <a:chExt cx="0" cy="0"/>
-        </a:xfrm>
-      </p:grpSpPr>
-      <p:sp>
-        <p:nvSpPr>
-          <p:cNvPr id="2" name="Slide Image Placeholder 1"/>
-          <p:cNvSpPr>
-            <a:spLocks noGrp="1" noRot="1" noChangeAspect="1"/>
-          </p:cNvSpPr>
-          <p:nvPr>
-            <p:ph type="sldImg"/>
-          </p:nvPr>
-        </p:nvSpPr>
-        <p:spPr/>
-      </p:sp>
-      <p:sp>
-        <p:nvSpPr>
-          <p:cNvPr id="3" name="Notes Placeholder 2"/>
-          <p:cNvSpPr>
-            <a:spLocks noGrp="1"/>
-          </p:cNvSpPr>
-          <p:nvPr>
-            <p:ph type="body" idx="1"/>
-          </p:nvPr>
-        </p:nvSpPr>
-        <p:spPr/>
-        <p:txBody>
-          <a:bodyPr/>
-          <a:lstStyle/>
-          <a:p>
-            <a:r>
-              <a:rPr lang="en-US" dirty="0"/>
-              <a:t/>
-            </a:r>
-            <a:endParaRPr lang="en-US" dirty="0"/>
-          </a:p>
-        </p:txBody>
-      </p:sp>
-      <p:sp>
-        <p:nvSpPr>
-          <p:cNvPr id="4" name="Slide Number Placeholder 3"/>
-          <p:cNvSpPr>
-            <a:spLocks noGrp="1"/>
-          </p:cNvSpPr>
-          <p:nvPr>
-            <p:ph type="sldNum" sz="quarter" idx="10"/>
-          </p:nvPr>
-        </p:nvSpPr>
-        <p:spPr/>
-        <p:txBody>
-          <a:bodyPr/>
-          <a:lstStyle/>
-          <a:p>
-            <a:fld id="{F7021451-1387-4CA6-816F-3879F97B5CBC}" type="slidenum">
-              <a:rPr lang="en-US"/>
-              <a:t>11</a:t>
             </a:fld>
             <a:endParaRPr lang="en-US"/>
           </a:p>
@@ -1656,10 +1350,6 @@
           <a:bodyPr/>
           <a:lstStyle/>
           <a:p>
-            <a:r>
-              <a:rPr lang="en-US" dirty="0"/>
-              <a:t/>
-            </a:r>
             <a:endParaRPr lang="en-US" dirty="0"/>
           </a:p>
         </p:txBody>
@@ -1744,10 +1434,6 @@
           <a:bodyPr/>
           <a:lstStyle/>
           <a:p>
-            <a:r>
-              <a:rPr lang="en-US" dirty="0"/>
-              <a:t/>
-            </a:r>
             <a:endParaRPr lang="en-US" dirty="0"/>
           </a:p>
         </p:txBody>
@@ -1832,10 +1518,6 @@
           <a:bodyPr/>
           <a:lstStyle/>
           <a:p>
-            <a:r>
-              <a:rPr lang="en-US" dirty="0"/>
-              <a:t/>
-            </a:r>
             <a:endParaRPr lang="en-US" dirty="0"/>
           </a:p>
         </p:txBody>
@@ -1920,10 +1602,6 @@
           <a:bodyPr/>
           <a:lstStyle/>
           <a:p>
-            <a:r>
-              <a:rPr lang="en-US" dirty="0"/>
-              <a:t/>
-            </a:r>
             <a:endParaRPr lang="en-US" dirty="0"/>
           </a:p>
         </p:txBody>
@@ -2008,10 +1686,6 @@
           <a:bodyPr/>
           <a:lstStyle/>
           <a:p>
-            <a:r>
-              <a:rPr lang="en-US" dirty="0"/>
-              <a:t/>
-            </a:r>
             <a:endParaRPr lang="en-US" dirty="0"/>
           </a:p>
         </p:txBody>
@@ -2096,10 +1770,6 @@
           <a:bodyPr/>
           <a:lstStyle/>
           <a:p>
-            <a:r>
-              <a:rPr lang="en-US" dirty="0"/>
-              <a:t/>
-            </a:r>
             <a:endParaRPr lang="en-US" dirty="0"/>
           </a:p>
         </p:txBody>
@@ -2184,10 +1854,6 @@
           <a:bodyPr/>
           <a:lstStyle/>
           <a:p>
-            <a:r>
-              <a:rPr lang="en-US" dirty="0"/>
-              <a:t/>
-            </a:r>
             <a:endParaRPr lang="en-US" dirty="0"/>
           </a:p>
         </p:txBody>
@@ -2272,10 +1938,6 @@
           <a:bodyPr/>
           <a:lstStyle/>
           <a:p>
-            <a:r>
-              <a:rPr lang="en-US" dirty="0"/>
-              <a:t/>
-            </a:r>
             <a:endParaRPr lang="en-US" dirty="0"/>
           </a:p>
         </p:txBody>
@@ -2349,6 +2011,11 @@
 <file path=ppt/slideMasters/slideMaster1.xml><?xml version="1.0" encoding="utf-8"?>
 <p:sldMaster xmlns:a="http://schemas.openxmlformats.org/drawingml/2006/main" xmlns:r="http://schemas.openxmlformats.org/officeDocument/2006/relationships" xmlns:p="http://schemas.openxmlformats.org/presentationml/2006/main">
   <p:cSld>
+    <p:bg>
+      <p:bgRef idx="1001">
+        <a:schemeClr val="bg1"/>
+      </p:bgRef>
+    </p:bg>
     <p:spTree>
       <p:nvGrpSpPr>
         <p:cNvPr id="1" name=""/>
@@ -2631,6 +2298,7 @@
         <a:solidFill>
           <a:srgbClr val="111827"/>
         </a:solidFill>
+        <a:effectLst/>
       </p:bgPr>
     </p:bg>
     <p:spTree>
@@ -2708,11 +2376,11 @@
           <a:bodyPr wrap="square" rtlCol="0" anchor="ctr"/>
           <a:lstStyle/>
           <a:p>
-            <a:pPr indent="0" marL="0">
+            <a:pPr marL="0" indent="0">
               <a:buNone/>
             </a:pPr>
             <a:r>
-              <a:rPr lang="en-US" sz="1300" b="1" spc="200" kern="0" dirty="0">
+              <a:rPr lang="en-US" sz="1300" b="1" kern="0" spc="200" dirty="0">
                 <a:solidFill>
                   <a:srgbClr val="8AB0FF"/>
                 </a:solidFill>
@@ -2747,7 +2415,7 @@
           <a:bodyPr wrap="square" rtlCol="0" anchor="ctr"/>
           <a:lstStyle/>
           <a:p>
-            <a:pPr indent="0" marL="0">
+            <a:pPr marL="0" indent="0">
               <a:buNone/>
             </a:pPr>
             <a:r>
@@ -2764,7 +2432,7 @@
             <a:endParaRPr lang="en-US" sz="4000" dirty="0"/>
           </a:p>
           <a:p>
-            <a:pPr indent="0" marL="0">
+            <a:pPr marL="0" indent="0">
               <a:buNone/>
             </a:pPr>
             <a:r>
@@ -2803,7 +2471,7 @@
           <a:bodyPr wrap="square" rtlCol="0" anchor="ctr"/>
           <a:lstStyle/>
           <a:p>
-            <a:pPr indent="0" marL="0">
+            <a:pPr marL="0" indent="0">
               <a:buNone/>
             </a:pPr>
             <a:r>
@@ -2850,14 +2518,14 @@
       </p:sp>
       <p:pic>
         <p:nvPicPr>
-          <p:cNvPr id="8" name="Image 0" descr="preencoded.png">    </p:cNvPr>
+          <p:cNvPr id="8" name="Image 0" descr="preencoded.png"/>
           <p:cNvPicPr>
             <a:picLocks noChangeAspect="1"/>
           </p:cNvPicPr>
           <p:nvPr/>
         </p:nvPicPr>
         <p:blipFill>
-          <a:blip r:embed="rId1"/>
+          <a:blip r:embed="rId3"/>
           <a:stretch>
             <a:fillRect/>
           </a:stretch>
@@ -2893,7 +2561,7 @@
           <a:bodyPr wrap="square" rtlCol="0" anchor="ctr"/>
           <a:lstStyle/>
           <a:p>
-            <a:pPr indent="0" marL="0">
+            <a:pPr marL="0" indent="0">
               <a:buNone/>
             </a:pPr>
             <a:r>
@@ -2940,14 +2608,14 @@
       </p:sp>
       <p:pic>
         <p:nvPicPr>
-          <p:cNvPr id="11" name="Image 1" descr="preencoded.png">    </p:cNvPr>
+          <p:cNvPr id="11" name="Image 1" descr="preencoded.png"/>
           <p:cNvPicPr>
             <a:picLocks noChangeAspect="1"/>
           </p:cNvPicPr>
           <p:nvPr/>
         </p:nvPicPr>
         <p:blipFill>
-          <a:blip r:embed="rId2"/>
+          <a:blip r:embed="rId4"/>
           <a:stretch>
             <a:fillRect/>
           </a:stretch>
@@ -2983,7 +2651,7 @@
           <a:bodyPr wrap="square" rtlCol="0" anchor="ctr"/>
           <a:lstStyle/>
           <a:p>
-            <a:pPr indent="0" marL="0">
+            <a:pPr marL="0" indent="0">
               <a:buNone/>
             </a:pPr>
             <a:r>
@@ -3030,14 +2698,14 @@
       </p:sp>
       <p:pic>
         <p:nvPicPr>
-          <p:cNvPr id="14" name="Image 2" descr="preencoded.png">    </p:cNvPr>
+          <p:cNvPr id="14" name="Image 2" descr="preencoded.png"/>
           <p:cNvPicPr>
             <a:picLocks noChangeAspect="1"/>
           </p:cNvPicPr>
           <p:nvPr/>
         </p:nvPicPr>
         <p:blipFill>
-          <a:blip r:embed="rId3"/>
+          <a:blip r:embed="rId5"/>
           <a:stretch>
             <a:fillRect/>
           </a:stretch>
@@ -3073,7 +2741,7 @@
           <a:bodyPr wrap="square" rtlCol="0" anchor="ctr"/>
           <a:lstStyle/>
           <a:p>
-            <a:pPr indent="0" marL="0">
+            <a:pPr marL="0" indent="0">
               <a:buNone/>
             </a:pPr>
             <a:r>
@@ -3101,12 +2769,13 @@
 
 <file path=ppt/slides/slide10.xml><?xml version="1.0" encoding="utf-8"?>
 <p:sld xmlns:a="http://schemas.openxmlformats.org/drawingml/2006/main" xmlns:r="http://schemas.openxmlformats.org/officeDocument/2006/relationships" xmlns:p="http://schemas.openxmlformats.org/presentationml/2006/main">
-  <p:cSld name="Slide 10">
+  <p:cSld name="Slide 11">
     <p:bg>
       <p:bgPr>
         <a:solidFill>
-          <a:srgbClr val="F8FAFC"/>
+          <a:srgbClr val="111827"/>
         </a:solidFill>
+        <a:effectLst/>
       </p:bgPr>
     </p:bg>
     <p:spTree>
@@ -3125,14 +2794,54 @@
       </p:grpSpPr>
       <p:sp>
         <p:nvSpPr>
-          <p:cNvPr id="2" name="Text 0"/>
-          <p:cNvSpPr/>
-          <p:nvPr/>
-        </p:nvSpPr>
-        <p:spPr>
-          <a:xfrm>
-            <a:off x="548640" y="411480"/>
-            <a:ext cx="9144000" cy="548640"/>
+          <p:cNvPr id="2" name="Shape 0"/>
+          <p:cNvSpPr/>
+          <p:nvPr/>
+        </p:nvSpPr>
+        <p:spPr>
+          <a:xfrm>
+            <a:off x="-1828800" y="-1828800"/>
+            <a:ext cx="4572000" cy="4572000"/>
+          </a:xfrm>
+          <a:prstGeom prst="ellipse">
+            <a:avLst/>
+          </a:prstGeom>
+          <a:solidFill>
+            <a:srgbClr val="1E2A45"/>
+          </a:solidFill>
+          <a:ln/>
+        </p:spPr>
+      </p:sp>
+      <p:sp>
+        <p:nvSpPr>
+          <p:cNvPr id="3" name="Shape 1"/>
+          <p:cNvSpPr/>
+          <p:nvPr/>
+        </p:nvSpPr>
+        <p:spPr>
+          <a:xfrm>
+            <a:off x="9601200" y="4114800"/>
+            <a:ext cx="4572000" cy="4572000"/>
+          </a:xfrm>
+          <a:prstGeom prst="ellipse">
+            <a:avLst/>
+          </a:prstGeom>
+          <a:solidFill>
+            <a:srgbClr val="1E2A45"/>
+          </a:solidFill>
+          <a:ln/>
+        </p:spPr>
+      </p:sp>
+      <p:sp>
+        <p:nvSpPr>
+          <p:cNvPr id="4" name="Text 2"/>
+          <p:cNvSpPr/>
+          <p:nvPr/>
+        </p:nvSpPr>
+        <p:spPr>
+          <a:xfrm>
+            <a:off x="731520" y="2103120"/>
+            <a:ext cx="7315200" cy="914400"/>
           </a:xfrm>
           <a:prstGeom prst="rect">
             <a:avLst/>
@@ -3144,34 +2853,73 @@
           <a:bodyPr wrap="square" rtlCol="0" anchor="ctr"/>
           <a:lstStyle/>
           <a:p>
-            <a:pPr indent="0" marL="0">
+            <a:pPr marL="0" indent="0">
               <a:buNone/>
             </a:pPr>
             <a:r>
-              <a:rPr lang="en-US" sz="2800" b="1" dirty="0">
-                <a:solidFill>
-                  <a:srgbClr val="111827"/>
+              <a:rPr lang="en-US" sz="4000" b="1" dirty="0">
+                <a:solidFill>
+                  <a:srgbClr val="FFFFFF"/>
                 </a:solidFill>
                 <a:latin typeface="Cambria" pitchFamily="34" charset="0"/>
                 <a:ea typeface="Cambria" pitchFamily="34" charset="-122"/>
                 <a:cs typeface="Cambria" pitchFamily="34" charset="-120"/>
               </a:rPr>
-              <a:t>Possible Future Improvements</a:t>
-            </a:r>
-            <a:endParaRPr lang="en-US" sz="2800" dirty="0"/>
-          </a:p>
-        </p:txBody>
-      </p:sp>
-      <p:sp>
-        <p:nvSpPr>
-          <p:cNvPr id="3" name="Shape 1"/>
-          <p:cNvSpPr/>
-          <p:nvPr/>
-        </p:nvSpPr>
-        <p:spPr>
-          <a:xfrm>
-            <a:off x="548640" y="1371600"/>
-            <a:ext cx="457200" cy="457200"/>
+              <a:t>Thank You</a:t>
+            </a:r>
+            <a:endParaRPr lang="en-US" sz="4000" dirty="0"/>
+          </a:p>
+        </p:txBody>
+      </p:sp>
+      <p:sp>
+        <p:nvSpPr>
+          <p:cNvPr id="5" name="Text 3"/>
+          <p:cNvSpPr/>
+          <p:nvPr/>
+        </p:nvSpPr>
+        <p:spPr>
+          <a:xfrm>
+            <a:off x="731520" y="2971800"/>
+            <a:ext cx="9144000" cy="457200"/>
+          </a:xfrm>
+          <a:prstGeom prst="rect">
+            <a:avLst/>
+          </a:prstGeom>
+          <a:noFill/>
+          <a:ln/>
+        </p:spPr>
+        <p:txBody>
+          <a:bodyPr wrap="square" rtlCol="0" anchor="ctr"/>
+          <a:lstStyle/>
+          <a:p>
+            <a:pPr marL="0" indent="0">
+              <a:buNone/>
+            </a:pPr>
+            <a:r>
+              <a:rPr lang="en-US" sz="1400" dirty="0">
+                <a:solidFill>
+                  <a:srgbClr val="CBD5E1"/>
+                </a:solidFill>
+                <a:latin typeface="Calibri" pitchFamily="34" charset="0"/>
+                <a:ea typeface="Calibri" pitchFamily="34" charset="-122"/>
+                <a:cs typeface="Calibri" pitchFamily="34" charset="-120"/>
+              </a:rPr>
+              <a:t>Submission includes: </a:t>
+            </a:r>
+            <a:endParaRPr lang="en-US" sz="1400" dirty="0"/>
+          </a:p>
+        </p:txBody>
+      </p:sp>
+      <p:sp>
+        <p:nvSpPr>
+          <p:cNvPr id="6" name="Shape 4"/>
+          <p:cNvSpPr/>
+          <p:nvPr/>
+        </p:nvSpPr>
+        <p:spPr>
+          <a:xfrm>
+            <a:off x="1078531" y="4174236"/>
+            <a:ext cx="350305" cy="365760"/>
           </a:xfrm>
           <a:prstGeom prst="roundRect">
             <a:avLst>
@@ -3179,21 +2927,21 @@
             </a:avLst>
           </a:prstGeom>
           <a:solidFill>
-            <a:srgbClr val="3763F2"/>
+            <a:srgbClr val="92D050"/>
           </a:solidFill>
           <a:ln/>
         </p:spPr>
       </p:sp>
       <p:sp>
         <p:nvSpPr>
-          <p:cNvPr id="4" name="Text 2"/>
-          <p:cNvSpPr/>
-          <p:nvPr/>
-        </p:nvSpPr>
-        <p:spPr>
-          <a:xfrm>
-            <a:off x="548640" y="1371600"/>
-            <a:ext cx="457200" cy="457200"/>
+          <p:cNvPr id="8" name="Text 5"/>
+          <p:cNvSpPr/>
+          <p:nvPr/>
+        </p:nvSpPr>
+        <p:spPr>
+          <a:xfrm>
+            <a:off x="1474631" y="4197096"/>
+            <a:ext cx="7315200" cy="502920"/>
           </a:xfrm>
           <a:prstGeom prst="rect">
             <a:avLst/>
@@ -3205,11 +2953,11 @@
           <a:bodyPr wrap="square" rtlCol="0" anchor="ctr"/>
           <a:lstStyle/>
           <a:p>
-            <a:pPr algn="ctr" indent="0" marL="0">
+            <a:pPr marL="0" indent="0">
               <a:buNone/>
             </a:pPr>
             <a:r>
-              <a:rPr lang="en-US" sz="1400" b="1" dirty="0">
+              <a:rPr lang="en-US" sz="1300" dirty="0">
                 <a:solidFill>
                   <a:srgbClr val="FFFFFF"/>
                 </a:solidFill>
@@ -3217,99 +2965,21 @@
                 <a:ea typeface="Calibri" pitchFamily="34" charset="-122"/>
                 <a:cs typeface="Calibri" pitchFamily="34" charset="-120"/>
               </a:rPr>
-              <a:t>1</a:t>
-            </a:r>
-            <a:endParaRPr lang="en-US" sz="1400" dirty="0"/>
-          </a:p>
-        </p:txBody>
-      </p:sp>
-      <p:sp>
-        <p:nvSpPr>
-          <p:cNvPr id="5" name="Text 3"/>
-          <p:cNvSpPr/>
-          <p:nvPr/>
-        </p:nvSpPr>
-        <p:spPr>
-          <a:xfrm>
-            <a:off x="1188720" y="1371600"/>
-            <a:ext cx="10332720" cy="457200"/>
-          </a:xfrm>
-          <a:prstGeom prst="rect">
-            <a:avLst/>
-          </a:prstGeom>
-          <a:noFill/>
-          <a:ln/>
-        </p:spPr>
-        <p:txBody>
-          <a:bodyPr wrap="square" rtlCol="0" anchor="ctr"/>
-          <a:lstStyle/>
-          <a:p>
-            <a:pPr indent="0" marL="0">
-              <a:buNone/>
-            </a:pPr>
-            <a:r>
-              <a:rPr lang="en-US" sz="1350" dirty="0">
-                <a:solidFill>
-                  <a:srgbClr val="111827"/>
+              <a:t>Repository link </a:t>
+            </a:r>
+            <a:r>
+              <a:rPr lang="en-US" sz="1300" dirty="0">
+                <a:solidFill>
+                  <a:srgbClr val="FFFFFF"/>
                 </a:solidFill>
                 <a:latin typeface="Calibri" pitchFamily="34" charset="0"/>
                 <a:ea typeface="Calibri" pitchFamily="34" charset="-122"/>
                 <a:cs typeface="Calibri" pitchFamily="34" charset="-120"/>
               </a:rPr>
-              <a:t>Build the AI Chat Assistant described earlier (Q&amp;A + auto-generated team summaries)</a:t>
-            </a:r>
-            <a:endParaRPr lang="en-US" sz="1350" dirty="0"/>
-          </a:p>
-        </p:txBody>
-      </p:sp>
-      <p:sp>
-        <p:nvSpPr>
-          <p:cNvPr id="6" name="Shape 4"/>
-          <p:cNvSpPr/>
-          <p:nvPr/>
-        </p:nvSpPr>
-        <p:spPr>
-          <a:xfrm>
-            <a:off x="548640" y="2029968"/>
-            <a:ext cx="457200" cy="457200"/>
-          </a:xfrm>
-          <a:prstGeom prst="roundRect">
-            <a:avLst>
-              <a:gd name="adj" fmla="val 20000"/>
-            </a:avLst>
-          </a:prstGeom>
-          <a:solidFill>
-            <a:srgbClr val="10B981"/>
-          </a:solidFill>
-          <a:ln/>
-        </p:spPr>
-      </p:sp>
-      <p:sp>
-        <p:nvSpPr>
-          <p:cNvPr id="7" name="Text 5"/>
-          <p:cNvSpPr/>
-          <p:nvPr/>
-        </p:nvSpPr>
-        <p:spPr>
-          <a:xfrm>
-            <a:off x="548640" y="2029968"/>
-            <a:ext cx="457200" cy="457200"/>
-          </a:xfrm>
-          <a:prstGeom prst="rect">
-            <a:avLst/>
-          </a:prstGeom>
-          <a:noFill/>
-          <a:ln/>
-        </p:spPr>
-        <p:txBody>
-          <a:bodyPr wrap="square" rtlCol="0" anchor="ctr"/>
-          <a:lstStyle/>
-          <a:p>
-            <a:pPr algn="ctr" indent="0" marL="0">
-              <a:buNone/>
-            </a:pPr>
-            <a:r>
-              <a:rPr lang="en-US" sz="1400" b="1" dirty="0">
+              <a:t> </a:t>
+            </a:r>
+            <a:r>
+              <a:rPr lang="en-US" sz="1300" dirty="0" smtClean="0">
                 <a:solidFill>
                   <a:srgbClr val="FFFFFF"/>
                 </a:solidFill>
@@ -3317,22 +2987,142 @@
                 <a:ea typeface="Calibri" pitchFamily="34" charset="-122"/>
                 <a:cs typeface="Calibri" pitchFamily="34" charset="-120"/>
               </a:rPr>
-              <a:t>2</a:t>
-            </a:r>
-            <a:endParaRPr lang="en-US" sz="1400" dirty="0"/>
-          </a:p>
-        </p:txBody>
-      </p:sp>
-      <p:sp>
-        <p:nvSpPr>
-          <p:cNvPr id="8" name="Text 6"/>
-          <p:cNvSpPr/>
-          <p:nvPr/>
-        </p:nvSpPr>
-        <p:spPr>
-          <a:xfrm>
-            <a:off x="1188720" y="2029968"/>
-            <a:ext cx="10332720" cy="457200"/>
+              <a:t>-  GitHub repository</a:t>
+            </a:r>
+            <a:endParaRPr lang="en-US" sz="1300" dirty="0">
+              <a:solidFill>
+                <a:schemeClr val="bg1"/>
+              </a:solidFill>
+              <a:latin typeface="Calibri" pitchFamily="34" charset="0"/>
+              <a:cs typeface="Calibri" pitchFamily="34" charset="-120"/>
+            </a:endParaRPr>
+          </a:p>
+          <a:p>
+            <a:r>
+              <a:rPr lang="en-US" sz="1300" dirty="0">
+                <a:solidFill>
+                  <a:schemeClr val="bg1"/>
+                </a:solidFill>
+                <a:hlinkClick r:id="rId3"/>
+              </a:rPr>
+              <a:t>https://</a:t>
+            </a:r>
+            <a:r>
+              <a:rPr lang="en-US" sz="1300" dirty="0" smtClean="0">
+                <a:solidFill>
+                  <a:schemeClr val="bg1"/>
+                </a:solidFill>
+                <a:hlinkClick r:id="rId3"/>
+              </a:rPr>
+              <a:t>github.com/YasinthaWanasundara/weekly-report-system</a:t>
+            </a:r>
+            <a:endParaRPr lang="en-US" sz="1300" dirty="0" smtClean="0">
+              <a:solidFill>
+                <a:schemeClr val="bg1"/>
+              </a:solidFill>
+            </a:endParaRPr>
+          </a:p>
+          <a:p>
+            <a:endParaRPr lang="en-US" sz="1300" dirty="0">
+              <a:solidFill>
+                <a:schemeClr val="bg1"/>
+              </a:solidFill>
+            </a:endParaRPr>
+          </a:p>
+          <a:p>
+            <a:r>
+              <a:rPr lang="en-US" sz="1300" dirty="0" smtClean="0">
+                <a:solidFill>
+                  <a:schemeClr val="bg1"/>
+                </a:solidFill>
+              </a:rPr>
+              <a:t>One Drive Link  -  Demo video </a:t>
+            </a:r>
+          </a:p>
+          <a:p>
+            <a:r>
+              <a:rPr lang="en-US" sz="1300" dirty="0">
+                <a:solidFill>
+                  <a:schemeClr val="bg1"/>
+                </a:solidFill>
+                <a:hlinkClick r:id="rId4"/>
+              </a:rPr>
+              <a:t>https://drive.google.com/file/d/14eOlULZIIMW2Imp8Nxtsi4Pgt9oEuQbo/view?usp=sharing</a:t>
+            </a:r>
+            <a:endParaRPr lang="en-US" sz="1300" dirty="0">
+              <a:solidFill>
+                <a:schemeClr val="bg1"/>
+              </a:solidFill>
+            </a:endParaRPr>
+          </a:p>
+          <a:p>
+            <a:endParaRPr lang="en-US" sz="1300" dirty="0" smtClean="0">
+              <a:solidFill>
+                <a:schemeClr val="bg1"/>
+              </a:solidFill>
+            </a:endParaRPr>
+          </a:p>
+          <a:p>
+            <a:endParaRPr lang="en-US" sz="1300" dirty="0" smtClean="0">
+              <a:solidFill>
+                <a:schemeClr val="bg1"/>
+              </a:solidFill>
+            </a:endParaRPr>
+          </a:p>
+          <a:p>
+            <a:r>
+              <a:rPr lang="en-US" sz="1300" dirty="0" smtClean="0">
+                <a:solidFill>
+                  <a:schemeClr val="bg1"/>
+                </a:solidFill>
+              </a:rPr>
+              <a:t>ER diagram Link </a:t>
+            </a:r>
+          </a:p>
+          <a:p>
+            <a:r>
+              <a:rPr lang="en-US" sz="1300" dirty="0">
+                <a:solidFill>
+                  <a:schemeClr val="bg1"/>
+                </a:solidFill>
+                <a:hlinkClick r:id="rId5"/>
+              </a:rPr>
+              <a:t>https://</a:t>
+            </a:r>
+            <a:r>
+              <a:rPr lang="en-US" sz="1300" dirty="0" smtClean="0">
+                <a:solidFill>
+                  <a:schemeClr val="bg1"/>
+                </a:solidFill>
+                <a:hlinkClick r:id="rId5"/>
+              </a:rPr>
+              <a:t>drive.google.com/file/d/1xogQvXjWYVdseQjRzj485qtiLWx23kTl/view?usp=sharing</a:t>
+            </a:r>
+            <a:endParaRPr lang="en-US" sz="1300" dirty="0" smtClean="0">
+              <a:solidFill>
+                <a:schemeClr val="bg1"/>
+              </a:solidFill>
+            </a:endParaRPr>
+          </a:p>
+          <a:p>
+            <a:endParaRPr lang="en-US" sz="1300" dirty="0">
+              <a:solidFill>
+                <a:schemeClr val="bg1"/>
+              </a:solidFill>
+            </a:endParaRPr>
+          </a:p>
+        </p:txBody>
+      </p:sp>
+      <p:sp>
+        <p:nvSpPr>
+          <p:cNvPr id="9" name="Text 6"/>
+          <p:cNvSpPr/>
+          <p:nvPr/>
+        </p:nvSpPr>
+        <p:spPr>
+          <a:xfrm>
+            <a:off x="457200" y="6473952"/>
+            <a:ext cx="7315200" cy="274320"/>
           </a:xfrm>
           <a:prstGeom prst="rect">
             <a:avLst/>
@@ -3344,56 +3134,34 @@
           <a:bodyPr wrap="square" rtlCol="0" anchor="ctr"/>
           <a:lstStyle/>
           <a:p>
-            <a:pPr indent="0" marL="0">
+            <a:pPr marL="0" indent="0">
               <a:buNone/>
             </a:pPr>
             <a:r>
-              <a:rPr lang="en-US" sz="1350" dirty="0">
-                <a:solidFill>
-                  <a:srgbClr val="111827"/>
+              <a:rPr lang="en-US" sz="900" dirty="0">
+                <a:solidFill>
+                  <a:srgbClr val="94A3B8"/>
                 </a:solidFill>
                 <a:latin typeface="Calibri" pitchFamily="34" charset="0"/>
                 <a:ea typeface="Calibri" pitchFamily="34" charset="-122"/>
                 <a:cs typeface="Calibri" pitchFamily="34" charset="-120"/>
               </a:rPr>
-              <a:t>Email/Slack reminders for pending or late weekly reports</a:t>
-            </a:r>
-            <a:endParaRPr lang="en-US" sz="1350" dirty="0"/>
-          </a:p>
-        </p:txBody>
-      </p:sp>
-      <p:sp>
-        <p:nvSpPr>
-          <p:cNvPr id="9" name="Shape 7"/>
-          <p:cNvSpPr/>
-          <p:nvPr/>
-        </p:nvSpPr>
-        <p:spPr>
-          <a:xfrm>
-            <a:off x="548640" y="2688336"/>
-            <a:ext cx="457200" cy="457200"/>
-          </a:xfrm>
-          <a:prstGeom prst="roundRect">
-            <a:avLst>
-              <a:gd name="adj" fmla="val 20000"/>
-            </a:avLst>
-          </a:prstGeom>
-          <a:solidFill>
-            <a:srgbClr val="3763F2"/>
-          </a:solidFill>
-          <a:ln/>
-        </p:spPr>
-      </p:sp>
-      <p:sp>
-        <p:nvSpPr>
-          <p:cNvPr id="10" name="Text 8"/>
-          <p:cNvSpPr/>
-          <p:nvPr/>
-        </p:nvSpPr>
-        <p:spPr>
-          <a:xfrm>
-            <a:off x="548640" y="2688336"/>
-            <a:ext cx="457200" cy="457200"/>
+              <a:t>Weekly Report Generator &amp; Team Dashboard</a:t>
+            </a:r>
+            <a:endParaRPr lang="en-US" sz="900" dirty="0"/>
+          </a:p>
+        </p:txBody>
+      </p:sp>
+      <p:sp>
+        <p:nvSpPr>
+          <p:cNvPr id="10" name="Text 7"/>
+          <p:cNvSpPr/>
+          <p:nvPr/>
+        </p:nvSpPr>
+        <p:spPr>
+          <a:xfrm>
+            <a:off x="11274552" y="6229251"/>
+            <a:ext cx="457200" cy="274320"/>
           </a:xfrm>
           <a:prstGeom prst="rect">
             <a:avLst/>
@@ -3405,441 +3173,72 @@
           <a:bodyPr wrap="square" rtlCol="0" anchor="ctr"/>
           <a:lstStyle/>
           <a:p>
-            <a:pPr algn="ctr" indent="0" marL="0">
+            <a:pPr marL="0" indent="0" algn="r">
               <a:buNone/>
             </a:pPr>
             <a:r>
-              <a:rPr lang="en-US" sz="1400" b="1" dirty="0">
-                <a:solidFill>
-                  <a:srgbClr val="FFFFFF"/>
+              <a:rPr lang="en-US" sz="900" dirty="0" smtClean="0">
+                <a:solidFill>
+                  <a:srgbClr val="94A3B8"/>
                 </a:solidFill>
                 <a:latin typeface="Calibri" pitchFamily="34" charset="0"/>
                 <a:ea typeface="Calibri" pitchFamily="34" charset="-122"/>
                 <a:cs typeface="Calibri" pitchFamily="34" charset="-120"/>
               </a:rPr>
-              <a:t>3</a:t>
-            </a:r>
-            <a:endParaRPr lang="en-US" sz="1400" dirty="0"/>
-          </a:p>
-        </p:txBody>
-      </p:sp>
-      <p:sp>
-        <p:nvSpPr>
-          <p:cNvPr id="11" name="Text 9"/>
-          <p:cNvSpPr/>
-          <p:nvPr/>
-        </p:nvSpPr>
-        <p:spPr>
-          <a:xfrm>
-            <a:off x="1188720" y="2688336"/>
-            <a:ext cx="10332720" cy="457200"/>
-          </a:xfrm>
-          <a:prstGeom prst="rect">
-            <a:avLst/>
-          </a:prstGeom>
-          <a:noFill/>
-          <a:ln/>
-        </p:spPr>
-        <p:txBody>
-          <a:bodyPr wrap="square" rtlCol="0" anchor="ctr"/>
-          <a:lstStyle/>
-          <a:p>
-            <a:pPr indent="0" marL="0">
-              <a:buNone/>
-            </a:pPr>
-            <a:r>
-              <a:rPr lang="en-US" sz="1350" dirty="0">
-                <a:solidFill>
-                  <a:srgbClr val="111827"/>
-                </a:solidFill>
-                <a:latin typeface="Calibri" pitchFamily="34" charset="0"/>
-                <a:ea typeface="Calibri" pitchFamily="34" charset="-122"/>
-                <a:cs typeface="Calibri" pitchFamily="34" charset="-120"/>
-              </a:rPr>
-              <a:t>Refresh-token rotation instead of long-lived JWTs, plus rate limiting on auth routes</a:t>
-            </a:r>
-            <a:endParaRPr lang="en-US" sz="1350" dirty="0"/>
-          </a:p>
-        </p:txBody>
-      </p:sp>
-      <p:sp>
-        <p:nvSpPr>
-          <p:cNvPr id="12" name="Shape 10"/>
-          <p:cNvSpPr/>
-          <p:nvPr/>
-        </p:nvSpPr>
-        <p:spPr>
-          <a:xfrm>
-            <a:off x="548640" y="3346704"/>
-            <a:ext cx="457200" cy="457200"/>
-          </a:xfrm>
-          <a:prstGeom prst="roundRect">
-            <a:avLst>
-              <a:gd name="adj" fmla="val 20000"/>
-            </a:avLst>
-          </a:prstGeom>
-          <a:solidFill>
-            <a:srgbClr val="10B981"/>
-          </a:solidFill>
-          <a:ln/>
-        </p:spPr>
-      </p:sp>
-      <p:sp>
-        <p:nvSpPr>
-          <p:cNvPr id="13" name="Text 11"/>
-          <p:cNvSpPr/>
-          <p:nvPr/>
-        </p:nvSpPr>
-        <p:spPr>
-          <a:xfrm>
-            <a:off x="548640" y="3346704"/>
-            <a:ext cx="457200" cy="457200"/>
-          </a:xfrm>
-          <a:prstGeom prst="rect">
-            <a:avLst/>
-          </a:prstGeom>
-          <a:noFill/>
-          <a:ln/>
-        </p:spPr>
-        <p:txBody>
-          <a:bodyPr wrap="square" rtlCol="0" anchor="ctr"/>
-          <a:lstStyle/>
-          <a:p>
-            <a:pPr algn="ctr" indent="0" marL="0">
-              <a:buNone/>
-            </a:pPr>
-            <a:r>
-              <a:rPr lang="en-US" sz="1400" b="1" dirty="0">
-                <a:solidFill>
-                  <a:srgbClr val="FFFFFF"/>
-                </a:solidFill>
-                <a:latin typeface="Calibri" pitchFamily="34" charset="0"/>
-                <a:ea typeface="Calibri" pitchFamily="34" charset="-122"/>
-                <a:cs typeface="Calibri" pitchFamily="34" charset="-120"/>
-              </a:rPr>
-              <a:t>4</a:t>
-            </a:r>
-            <a:endParaRPr lang="en-US" sz="1400" dirty="0"/>
-          </a:p>
-        </p:txBody>
-      </p:sp>
-      <p:sp>
-        <p:nvSpPr>
-          <p:cNvPr id="14" name="Text 12"/>
-          <p:cNvSpPr/>
-          <p:nvPr/>
-        </p:nvSpPr>
-        <p:spPr>
-          <a:xfrm>
-            <a:off x="1188720" y="3346704"/>
-            <a:ext cx="10332720" cy="457200"/>
-          </a:xfrm>
-          <a:prstGeom prst="rect">
-            <a:avLst/>
-          </a:prstGeom>
-          <a:noFill/>
-          <a:ln/>
-        </p:spPr>
-        <p:txBody>
-          <a:bodyPr wrap="square" rtlCol="0" anchor="ctr"/>
-          <a:lstStyle/>
-          <a:p>
-            <a:pPr indent="0" marL="0">
-              <a:buNone/>
-            </a:pPr>
-            <a:r>
-              <a:rPr lang="en-US" sz="1350" dirty="0">
-                <a:solidFill>
-                  <a:srgbClr val="111827"/>
-                </a:solidFill>
-                <a:latin typeface="Calibri" pitchFamily="34" charset="0"/>
-                <a:ea typeface="Calibri" pitchFamily="34" charset="-122"/>
-                <a:cs typeface="Calibri" pitchFamily="34" charset="-120"/>
-              </a:rPr>
-              <a:t>Per-project team assignment enforced at report-creation time (restrict project choices to assigned projects)</a:t>
-            </a:r>
-            <a:endParaRPr lang="en-US" sz="1350" dirty="0"/>
-          </a:p>
-        </p:txBody>
-      </p:sp>
-      <p:sp>
-        <p:nvSpPr>
-          <p:cNvPr id="15" name="Shape 13"/>
-          <p:cNvSpPr/>
-          <p:nvPr/>
-        </p:nvSpPr>
-        <p:spPr>
-          <a:xfrm>
-            <a:off x="548640" y="4005072"/>
-            <a:ext cx="457200" cy="457200"/>
-          </a:xfrm>
-          <a:prstGeom prst="roundRect">
-            <a:avLst>
-              <a:gd name="adj" fmla="val 20000"/>
-            </a:avLst>
-          </a:prstGeom>
-          <a:solidFill>
-            <a:srgbClr val="3763F2"/>
-          </a:solidFill>
-          <a:ln/>
-        </p:spPr>
-      </p:sp>
-      <p:sp>
-        <p:nvSpPr>
-          <p:cNvPr id="16" name="Text 14"/>
-          <p:cNvSpPr/>
-          <p:nvPr/>
-        </p:nvSpPr>
-        <p:spPr>
-          <a:xfrm>
-            <a:off x="548640" y="4005072"/>
-            <a:ext cx="457200" cy="457200"/>
-          </a:xfrm>
-          <a:prstGeom prst="rect">
-            <a:avLst/>
-          </a:prstGeom>
-          <a:noFill/>
-          <a:ln/>
-        </p:spPr>
-        <p:txBody>
-          <a:bodyPr wrap="square" rtlCol="0" anchor="ctr"/>
-          <a:lstStyle/>
-          <a:p>
-            <a:pPr algn="ctr" indent="0" marL="0">
-              <a:buNone/>
-            </a:pPr>
-            <a:r>
-              <a:rPr lang="en-US" sz="1400" b="1" dirty="0">
-                <a:solidFill>
-                  <a:srgbClr val="FFFFFF"/>
-                </a:solidFill>
-                <a:latin typeface="Calibri" pitchFamily="34" charset="0"/>
-                <a:ea typeface="Calibri" pitchFamily="34" charset="-122"/>
-                <a:cs typeface="Calibri" pitchFamily="34" charset="-120"/>
-              </a:rPr>
-              <a:t>5</a:t>
-            </a:r>
-            <a:endParaRPr lang="en-US" sz="1400" dirty="0"/>
-          </a:p>
-        </p:txBody>
-      </p:sp>
-      <p:sp>
-        <p:nvSpPr>
-          <p:cNvPr id="17" name="Text 15"/>
-          <p:cNvSpPr/>
-          <p:nvPr/>
-        </p:nvSpPr>
-        <p:spPr>
-          <a:xfrm>
-            <a:off x="1188720" y="4005072"/>
-            <a:ext cx="10332720" cy="457200"/>
-          </a:xfrm>
-          <a:prstGeom prst="rect">
-            <a:avLst/>
-          </a:prstGeom>
-          <a:noFill/>
-          <a:ln/>
-        </p:spPr>
-        <p:txBody>
-          <a:bodyPr wrap="square" rtlCol="0" anchor="ctr"/>
-          <a:lstStyle/>
-          <a:p>
-            <a:pPr indent="0" marL="0">
-              <a:buNone/>
-            </a:pPr>
-            <a:r>
-              <a:rPr lang="en-US" sz="1350" dirty="0">
-                <a:solidFill>
-                  <a:srgbClr val="111827"/>
-                </a:solidFill>
-                <a:latin typeface="Calibri" pitchFamily="34" charset="0"/>
-                <a:ea typeface="Calibri" pitchFamily="34" charset="-122"/>
-                <a:cs typeface="Calibri" pitchFamily="34" charset="-120"/>
-              </a:rPr>
-              <a:t>Exportable PDF/CSV weekly summaries for managers and stakeholders</a:t>
-            </a:r>
-            <a:endParaRPr lang="en-US" sz="1350" dirty="0"/>
-          </a:p>
-        </p:txBody>
-      </p:sp>
-      <p:sp>
-        <p:nvSpPr>
-          <p:cNvPr id="18" name="Shape 16"/>
-          <p:cNvSpPr/>
-          <p:nvPr/>
-        </p:nvSpPr>
-        <p:spPr>
-          <a:xfrm>
-            <a:off x="548640" y="4663440"/>
-            <a:ext cx="457200" cy="457200"/>
-          </a:xfrm>
-          <a:prstGeom prst="roundRect">
-            <a:avLst>
-              <a:gd name="adj" fmla="val 20000"/>
-            </a:avLst>
-          </a:prstGeom>
-          <a:solidFill>
-            <a:srgbClr val="10B981"/>
-          </a:solidFill>
-          <a:ln/>
-        </p:spPr>
-      </p:sp>
-      <p:sp>
-        <p:nvSpPr>
-          <p:cNvPr id="19" name="Text 17"/>
-          <p:cNvSpPr/>
-          <p:nvPr/>
-        </p:nvSpPr>
-        <p:spPr>
-          <a:xfrm>
-            <a:off x="548640" y="4663440"/>
-            <a:ext cx="457200" cy="457200"/>
-          </a:xfrm>
-          <a:prstGeom prst="rect">
-            <a:avLst/>
-          </a:prstGeom>
-          <a:noFill/>
-          <a:ln/>
-        </p:spPr>
-        <p:txBody>
-          <a:bodyPr wrap="square" rtlCol="0" anchor="ctr"/>
-          <a:lstStyle/>
-          <a:p>
-            <a:pPr algn="ctr" indent="0" marL="0">
-              <a:buNone/>
-            </a:pPr>
-            <a:r>
-              <a:rPr lang="en-US" sz="1400" b="1" dirty="0">
-                <a:solidFill>
-                  <a:srgbClr val="FFFFFF"/>
-                </a:solidFill>
-                <a:latin typeface="Calibri" pitchFamily="34" charset="0"/>
-                <a:ea typeface="Calibri" pitchFamily="34" charset="-122"/>
-                <a:cs typeface="Calibri" pitchFamily="34" charset="-120"/>
-              </a:rPr>
-              <a:t>6</a:t>
-            </a:r>
-            <a:endParaRPr lang="en-US" sz="1400" dirty="0"/>
-          </a:p>
-        </p:txBody>
-      </p:sp>
-      <p:sp>
-        <p:nvSpPr>
-          <p:cNvPr id="20" name="Text 18"/>
-          <p:cNvSpPr/>
-          <p:nvPr/>
-        </p:nvSpPr>
-        <p:spPr>
-          <a:xfrm>
-            <a:off x="1188720" y="4663440"/>
-            <a:ext cx="10332720" cy="457200"/>
-          </a:xfrm>
-          <a:prstGeom prst="rect">
-            <a:avLst/>
-          </a:prstGeom>
-          <a:noFill/>
-          <a:ln/>
-        </p:spPr>
-        <p:txBody>
-          <a:bodyPr wrap="square" rtlCol="0" anchor="ctr"/>
-          <a:lstStyle/>
-          <a:p>
-            <a:pPr indent="0" marL="0">
-              <a:buNone/>
-            </a:pPr>
-            <a:r>
-              <a:rPr lang="en-US" sz="1350" dirty="0">
-                <a:solidFill>
-                  <a:srgbClr val="111827"/>
-                </a:solidFill>
-                <a:latin typeface="Calibri" pitchFamily="34" charset="0"/>
-                <a:ea typeface="Calibri" pitchFamily="34" charset="-122"/>
-                <a:cs typeface="Calibri" pitchFamily="34" charset="-120"/>
-              </a:rPr>
-              <a:t>Automated tests (Jest/Supertest) covering role-based access boundaries</a:t>
-            </a:r>
-            <a:endParaRPr lang="en-US" sz="1350" dirty="0"/>
-          </a:p>
-        </p:txBody>
-      </p:sp>
-      <p:sp>
-        <p:nvSpPr>
-          <p:cNvPr id="21" name="Text 19"/>
-          <p:cNvSpPr/>
-          <p:nvPr/>
-        </p:nvSpPr>
-        <p:spPr>
-          <a:xfrm>
-            <a:off x="457200" y="6473952"/>
-            <a:ext cx="7315200" cy="274320"/>
-          </a:xfrm>
-          <a:prstGeom prst="rect">
-            <a:avLst/>
-          </a:prstGeom>
-          <a:noFill/>
-          <a:ln/>
-        </p:spPr>
-        <p:txBody>
-          <a:bodyPr wrap="square" rtlCol="0" anchor="ctr"/>
-          <a:lstStyle/>
-          <a:p>
-            <a:pPr indent="0" marL="0">
-              <a:buNone/>
-            </a:pPr>
-            <a:r>
-              <a:rPr lang="en-US" sz="900" dirty="0">
-                <a:solidFill>
-                  <a:srgbClr val="94A3B8"/>
-                </a:solidFill>
-                <a:latin typeface="Calibri" pitchFamily="34" charset="0"/>
-                <a:ea typeface="Calibri" pitchFamily="34" charset="-122"/>
-                <a:cs typeface="Calibri" pitchFamily="34" charset="-120"/>
-              </a:rPr>
-              <a:t>Weekly Report Generator &amp; Team Dashboard</a:t>
+              <a:t>10</a:t>
             </a:r>
             <a:endParaRPr lang="en-US" sz="900" dirty="0"/>
           </a:p>
         </p:txBody>
       </p:sp>
-      <p:sp>
-        <p:nvSpPr>
-          <p:cNvPr id="22" name="Text 20"/>
-          <p:cNvSpPr/>
-          <p:nvPr/>
-        </p:nvSpPr>
-        <p:spPr>
-          <a:xfrm>
-            <a:off x="11274552" y="6473952"/>
-            <a:ext cx="457200" cy="274320"/>
-          </a:xfrm>
-          <a:prstGeom prst="rect">
-            <a:avLst/>
-          </a:prstGeom>
-          <a:noFill/>
-          <a:ln/>
-        </p:spPr>
-        <p:txBody>
-          <a:bodyPr wrap="square" rtlCol="0" anchor="ctr"/>
-          <a:lstStyle/>
-          <a:p>
-            <a:pPr algn="r" indent="0" marL="0">
-              <a:buNone/>
-            </a:pPr>
-            <a:r>
-              <a:rPr lang="en-US" sz="900" dirty="0">
-                <a:solidFill>
-                  <a:srgbClr val="94A3B8"/>
-                </a:solidFill>
-                <a:latin typeface="Calibri" pitchFamily="34" charset="0"/>
-                <a:ea typeface="Calibri" pitchFamily="34" charset="-122"/>
-                <a:cs typeface="Calibri" pitchFamily="34" charset="-120"/>
-              </a:rPr>
-              <a:t>10</a:t>
-            </a:r>
-            <a:endParaRPr lang="en-US" sz="900" dirty="0"/>
-          </a:p>
-        </p:txBody>
-      </p:sp>
+      <p:pic>
+        <p:nvPicPr>
+          <p:cNvPr id="13" name="Picture 12"/>
+          <p:cNvPicPr>
+            <a:picLocks noChangeAspect="1"/>
+          </p:cNvPicPr>
+          <p:nvPr/>
+        </p:nvPicPr>
+        <p:blipFill>
+          <a:blip r:embed="rId6"/>
+          <a:stretch>
+            <a:fillRect/>
+          </a:stretch>
+        </p:blipFill>
+        <p:spPr>
+          <a:xfrm>
+            <a:off x="1078531" y="3520408"/>
+            <a:ext cx="353599" cy="365792"/>
+          </a:xfrm>
+          <a:prstGeom prst="rect">
+            <a:avLst/>
+          </a:prstGeom>
+        </p:spPr>
+      </p:pic>
+      <p:pic>
+        <p:nvPicPr>
+          <p:cNvPr id="14" name="Picture 13"/>
+          <p:cNvPicPr>
+            <a:picLocks noChangeAspect="1"/>
+          </p:cNvPicPr>
+          <p:nvPr/>
+        </p:nvPicPr>
+        <p:blipFill>
+          <a:blip r:embed="rId7"/>
+          <a:stretch>
+            <a:fillRect/>
+          </a:stretch>
+        </p:blipFill>
+        <p:spPr>
+          <a:xfrm>
+            <a:off x="1076883" y="4814284"/>
+            <a:ext cx="353599" cy="365792"/>
+          </a:xfrm>
+          <a:prstGeom prst="rect">
+            <a:avLst/>
+          </a:prstGeom>
+        </p:spPr>
+      </p:pic>
     </p:spTree>
   </p:cSld>
   <p:clrMapOvr>
@@ -3848,14 +3247,15 @@
 </p:sld>
 </file>
 
-<file path=ppt/slides/slide11.xml><?xml version="1.0" encoding="utf-8"?>
+<file path=ppt/slides/slide2.xml><?xml version="1.0" encoding="utf-8"?>
 <p:sld xmlns:a="http://schemas.openxmlformats.org/drawingml/2006/main" xmlns:r="http://schemas.openxmlformats.org/officeDocument/2006/relationships" xmlns:p="http://schemas.openxmlformats.org/presentationml/2006/main">
-  <p:cSld name="Slide 11">
+  <p:cSld name="Slide 2">
     <p:bg>
       <p:bgPr>
         <a:solidFill>
-          <a:srgbClr val="111827"/>
+          <a:srgbClr val="F8FAFC"/>
         </a:solidFill>
+        <a:effectLst/>
       </p:bgPr>
     </p:bg>
     <p:spTree>
@@ -3874,54 +3274,14 @@
       </p:grpSpPr>
       <p:sp>
         <p:nvSpPr>
-          <p:cNvPr id="2" name="Shape 0"/>
-          <p:cNvSpPr/>
-          <p:nvPr/>
-        </p:nvSpPr>
-        <p:spPr>
-          <a:xfrm>
-            <a:off x="-1828800" y="-1828800"/>
-            <a:ext cx="4572000" cy="4572000"/>
-          </a:xfrm>
-          <a:prstGeom prst="ellipse">
-            <a:avLst/>
-          </a:prstGeom>
-          <a:solidFill>
-            <a:srgbClr val="1E2A45"/>
-          </a:solidFill>
-          <a:ln/>
-        </p:spPr>
-      </p:sp>
-      <p:sp>
-        <p:nvSpPr>
-          <p:cNvPr id="3" name="Shape 1"/>
-          <p:cNvSpPr/>
-          <p:nvPr/>
-        </p:nvSpPr>
-        <p:spPr>
-          <a:xfrm>
-            <a:off x="9601200" y="4114800"/>
-            <a:ext cx="4572000" cy="4572000"/>
-          </a:xfrm>
-          <a:prstGeom prst="ellipse">
-            <a:avLst/>
-          </a:prstGeom>
-          <a:solidFill>
-            <a:srgbClr val="1E2A45"/>
-          </a:solidFill>
-          <a:ln/>
-        </p:spPr>
-      </p:sp>
-      <p:sp>
-        <p:nvSpPr>
-          <p:cNvPr id="4" name="Text 2"/>
-          <p:cNvSpPr/>
-          <p:nvPr/>
-        </p:nvSpPr>
-        <p:spPr>
-          <a:xfrm>
-            <a:off x="731520" y="2103120"/>
-            <a:ext cx="7315200" cy="914400"/>
+          <p:cNvPr id="2" name="Text 0"/>
+          <p:cNvSpPr/>
+          <p:nvPr/>
+        </p:nvSpPr>
+        <p:spPr>
+          <a:xfrm>
+            <a:off x="548640" y="411480"/>
+            <a:ext cx="7315200" cy="548640"/>
           </a:xfrm>
           <a:prstGeom prst="rect">
             <a:avLst/>
@@ -3933,34 +3293,34 @@
           <a:bodyPr wrap="square" rtlCol="0" anchor="ctr"/>
           <a:lstStyle/>
           <a:p>
-            <a:pPr indent="0" marL="0">
+            <a:pPr marL="0" indent="0">
               <a:buNone/>
             </a:pPr>
             <a:r>
-              <a:rPr lang="en-US" sz="4000" b="1" dirty="0">
-                <a:solidFill>
-                  <a:srgbClr val="FFFFFF"/>
+              <a:rPr lang="en-US" sz="3000" b="1" dirty="0">
+                <a:solidFill>
+                  <a:srgbClr val="111827"/>
                 </a:solidFill>
                 <a:latin typeface="Cambria" pitchFamily="34" charset="0"/>
                 <a:ea typeface="Cambria" pitchFamily="34" charset="-122"/>
                 <a:cs typeface="Cambria" pitchFamily="34" charset="-120"/>
               </a:rPr>
-              <a:t>Thank You</a:t>
-            </a:r>
-            <a:endParaRPr lang="en-US" sz="4000" dirty="0"/>
-          </a:p>
-        </p:txBody>
-      </p:sp>
-      <p:sp>
-        <p:nvSpPr>
-          <p:cNvPr id="5" name="Text 3"/>
-          <p:cNvSpPr/>
-          <p:nvPr/>
-        </p:nvSpPr>
-        <p:spPr>
-          <a:xfrm>
-            <a:off x="731520" y="2971800"/>
-            <a:ext cx="9144000" cy="457200"/>
+              <a:t>Objective &amp; Scope</a:t>
+            </a:r>
+            <a:endParaRPr lang="en-US" sz="3000" dirty="0"/>
+          </a:p>
+        </p:txBody>
+      </p:sp>
+      <p:sp>
+        <p:nvSpPr>
+          <p:cNvPr id="3" name="Text 1"/>
+          <p:cNvSpPr/>
+          <p:nvPr/>
+        </p:nvSpPr>
+        <p:spPr>
+          <a:xfrm>
+            <a:off x="548640" y="1051560"/>
+            <a:ext cx="10789920" cy="457200"/>
           </a:xfrm>
           <a:prstGeom prst="rect">
             <a:avLst/>
@@ -3972,64 +3332,71 @@
           <a:bodyPr wrap="square" rtlCol="0" anchor="ctr"/>
           <a:lstStyle/>
           <a:p>
-            <a:pPr indent="0" marL="0">
+            <a:pPr marL="0" indent="0">
               <a:buNone/>
             </a:pPr>
             <a:r>
-              <a:rPr lang="en-US" sz="1400" dirty="0">
-                <a:solidFill>
-                  <a:srgbClr val="CBD5E1"/>
+              <a:rPr lang="en-US" sz="1350" dirty="0">
+                <a:solidFill>
+                  <a:srgbClr val="64748B"/>
                 </a:solidFill>
                 <a:latin typeface="Calibri" pitchFamily="34" charset="0"/>
                 <a:ea typeface="Calibri" pitchFamily="34" charset="-122"/>
                 <a:cs typeface="Calibri" pitchFamily="34" charset="-120"/>
               </a:rPr>
-              <a:t>Submission includes: GitHub repository · ER diagram · Presentation · Demo video</a:t>
-            </a:r>
-            <a:endParaRPr lang="en-US" sz="1400" dirty="0"/>
-          </a:p>
-        </p:txBody>
-      </p:sp>
-      <p:sp>
-        <p:nvSpPr>
-          <p:cNvPr id="6" name="Shape 4"/>
-          <p:cNvSpPr/>
-          <p:nvPr/>
-        </p:nvSpPr>
-        <p:spPr>
-          <a:xfrm>
-            <a:off x="731520" y="3749040"/>
-            <a:ext cx="502920" cy="502920"/>
+              <a:t>Build a multi-user system where team members log structured weekly reports and managers analyze them across the whole team.</a:t>
+            </a:r>
+            <a:endParaRPr lang="en-US" sz="1350" dirty="0"/>
+          </a:p>
+        </p:txBody>
+      </p:sp>
+      <p:sp>
+        <p:nvSpPr>
+          <p:cNvPr id="4" name="Shape 2"/>
+          <p:cNvSpPr/>
+          <p:nvPr/>
+        </p:nvSpPr>
+        <p:spPr>
+          <a:xfrm>
+            <a:off x="548640" y="1874520"/>
+            <a:ext cx="3520440" cy="2331720"/>
           </a:xfrm>
           <a:prstGeom prst="roundRect">
             <a:avLst>
-              <a:gd name="adj" fmla="val 20000"/>
+              <a:gd name="adj" fmla="val 3137"/>
             </a:avLst>
           </a:prstGeom>
           <a:solidFill>
-            <a:srgbClr val="3763F2"/>
+            <a:srgbClr val="FFFFFF"/>
           </a:solidFill>
           <a:ln/>
+          <a:effectLst>
+            <a:outerShdw blurRad="101600" dist="38100" dir="5400000" algn="bl" rotWithShape="0">
+              <a:srgbClr val="1E293B">
+                <a:alpha val="8000"/>
+              </a:srgbClr>
+            </a:outerShdw>
+          </a:effectLst>
         </p:spPr>
       </p:sp>
       <p:pic>
         <p:nvPicPr>
-          <p:cNvPr id="7" name="Image 0" descr="preencoded.png">    </p:cNvPr>
+          <p:cNvPr id="5" name="Image 0" descr="preencoded.png"/>
           <p:cNvPicPr>
             <a:picLocks noChangeAspect="1"/>
           </p:cNvPicPr>
           <p:nvPr/>
         </p:nvPicPr>
         <p:blipFill>
-          <a:blip r:embed="rId1"/>
+          <a:blip r:embed="rId3"/>
           <a:stretch>
             <a:fillRect/>
           </a:stretch>
         </p:blipFill>
         <p:spPr>
           <a:xfrm>
-            <a:off x="859536" y="3877056"/>
-            <a:ext cx="256032" cy="256032"/>
+            <a:off x="822960" y="2148840"/>
+            <a:ext cx="502920" cy="502920"/>
           </a:xfrm>
           <a:prstGeom prst="rect">
             <a:avLst/>
@@ -4038,14 +3405,14 @@
       </p:pic>
       <p:sp>
         <p:nvSpPr>
-          <p:cNvPr id="8" name="Text 5"/>
-          <p:cNvSpPr/>
-          <p:nvPr/>
-        </p:nvSpPr>
-        <p:spPr>
-          <a:xfrm>
-            <a:off x="1371600" y="3749040"/>
-            <a:ext cx="7315200" cy="502920"/>
+          <p:cNvPr id="6" name="Text 3"/>
+          <p:cNvSpPr/>
+          <p:nvPr/>
+        </p:nvSpPr>
+        <p:spPr>
+          <a:xfrm>
+            <a:off x="822960" y="2788920"/>
+            <a:ext cx="2971800" cy="365760"/>
           </a:xfrm>
           <a:prstGeom prst="rect">
             <a:avLst/>
@@ -4057,34 +3424,34 @@
           <a:bodyPr wrap="square" rtlCol="0" anchor="ctr"/>
           <a:lstStyle/>
           <a:p>
-            <a:pPr indent="0" marL="0">
+            <a:pPr marL="0" indent="0">
               <a:buNone/>
             </a:pPr>
             <a:r>
-              <a:rPr lang="en-US" sz="1300" dirty="0">
-                <a:solidFill>
-                  <a:srgbClr val="FFFFFF"/>
+              <a:rPr lang="en-US" sz="1500" b="1" dirty="0">
+                <a:solidFill>
+                  <a:srgbClr val="111827"/>
                 </a:solidFill>
                 <a:latin typeface="Calibri" pitchFamily="34" charset="0"/>
                 <a:ea typeface="Calibri" pitchFamily="34" charset="-122"/>
                 <a:cs typeface="Calibri" pitchFamily="34" charset="-120"/>
               </a:rPr>
-              <a:t>Repository link — see submission form</a:t>
-            </a:r>
-            <a:endParaRPr lang="en-US" sz="1300" dirty="0"/>
-          </a:p>
-        </p:txBody>
-      </p:sp>
-      <p:sp>
-        <p:nvSpPr>
-          <p:cNvPr id="9" name="Text 6"/>
-          <p:cNvSpPr/>
-          <p:nvPr/>
-        </p:nvSpPr>
-        <p:spPr>
-          <a:xfrm>
-            <a:off x="457200" y="6473952"/>
-            <a:ext cx="7315200" cy="274320"/>
+              <a:t>Role-based access</a:t>
+            </a:r>
+            <a:endParaRPr lang="en-US" sz="1500" dirty="0"/>
+          </a:p>
+        </p:txBody>
+      </p:sp>
+      <p:sp>
+        <p:nvSpPr>
+          <p:cNvPr id="7" name="Text 4"/>
+          <p:cNvSpPr/>
+          <p:nvPr/>
+        </p:nvSpPr>
+        <p:spPr>
+          <a:xfrm>
+            <a:off x="822960" y="3154680"/>
+            <a:ext cx="2971800" cy="960120"/>
           </a:xfrm>
           <a:prstGeom prst="rect">
             <a:avLst/>
@@ -4096,34 +3463,87 @@
           <a:bodyPr wrap="square" rtlCol="0" anchor="ctr"/>
           <a:lstStyle/>
           <a:p>
-            <a:pPr indent="0" marL="0">
+            <a:pPr marL="0" indent="0">
               <a:buNone/>
             </a:pPr>
             <a:r>
-              <a:rPr lang="en-US" sz="900" dirty="0">
-                <a:solidFill>
-                  <a:srgbClr val="94A3B8"/>
+              <a:rPr lang="en-US" sz="1150" dirty="0">
+                <a:solidFill>
+                  <a:srgbClr val="64748B"/>
                 </a:solidFill>
                 <a:latin typeface="Calibri" pitchFamily="34" charset="0"/>
                 <a:ea typeface="Calibri" pitchFamily="34" charset="-122"/>
                 <a:cs typeface="Calibri" pitchFamily="34" charset="-120"/>
               </a:rPr>
-              <a:t>Weekly Report Generator &amp; Team Dashboard</a:t>
-            </a:r>
-            <a:endParaRPr lang="en-US" sz="900" dirty="0"/>
-          </a:p>
-        </p:txBody>
-      </p:sp>
-      <p:sp>
-        <p:nvSpPr>
-          <p:cNvPr id="10" name="Text 7"/>
-          <p:cNvSpPr/>
-          <p:nvPr/>
-        </p:nvSpPr>
-        <p:spPr>
-          <a:xfrm>
-            <a:off x="11274552" y="6473952"/>
-            <a:ext cx="457200" cy="274320"/>
+              <a:t>Team Member vs Manager/Admin, enforced server-side on every route.</a:t>
+            </a:r>
+            <a:endParaRPr lang="en-US" sz="1150" dirty="0"/>
+          </a:p>
+        </p:txBody>
+      </p:sp>
+      <p:sp>
+        <p:nvSpPr>
+          <p:cNvPr id="8" name="Shape 5"/>
+          <p:cNvSpPr/>
+          <p:nvPr/>
+        </p:nvSpPr>
+        <p:spPr>
+          <a:xfrm>
+            <a:off x="4251960" y="1874520"/>
+            <a:ext cx="3520440" cy="2331720"/>
+          </a:xfrm>
+          <a:prstGeom prst="roundRect">
+            <a:avLst>
+              <a:gd name="adj" fmla="val 3137"/>
+            </a:avLst>
+          </a:prstGeom>
+          <a:solidFill>
+            <a:srgbClr val="FFFFFF"/>
+          </a:solidFill>
+          <a:ln/>
+          <a:effectLst>
+            <a:outerShdw blurRad="101600" dist="38100" dir="5400000" algn="bl" rotWithShape="0">
+              <a:srgbClr val="1E293B">
+                <a:alpha val="8000"/>
+              </a:srgbClr>
+            </a:outerShdw>
+          </a:effectLst>
+        </p:spPr>
+      </p:sp>
+      <p:pic>
+        <p:nvPicPr>
+          <p:cNvPr id="9" name="Image 1" descr="preencoded.png"/>
+          <p:cNvPicPr>
+            <a:picLocks noChangeAspect="1"/>
+          </p:cNvPicPr>
+          <p:nvPr/>
+        </p:nvPicPr>
+        <p:blipFill>
+          <a:blip r:embed="rId4"/>
+          <a:stretch>
+            <a:fillRect/>
+          </a:stretch>
+        </p:blipFill>
+        <p:spPr>
+          <a:xfrm>
+            <a:off x="4526280" y="2148840"/>
+            <a:ext cx="502920" cy="502920"/>
+          </a:xfrm>
+          <a:prstGeom prst="rect">
+            <a:avLst/>
+          </a:prstGeom>
+        </p:spPr>
+      </p:pic>
+      <p:sp>
+        <p:nvSpPr>
+          <p:cNvPr id="10" name="Text 6"/>
+          <p:cNvSpPr/>
+          <p:nvPr/>
+        </p:nvSpPr>
+        <p:spPr>
+          <a:xfrm>
+            <a:off x="4526280" y="2788920"/>
+            <a:ext cx="2971800" cy="365760"/>
           </a:xfrm>
           <a:prstGeom prst="rect">
             <a:avLst/>
@@ -4135,19 +3555,267 @@
           <a:bodyPr wrap="square" rtlCol="0" anchor="ctr"/>
           <a:lstStyle/>
           <a:p>
-            <a:pPr algn="r" indent="0" marL="0">
+            <a:pPr marL="0" indent="0">
               <a:buNone/>
             </a:pPr>
             <a:r>
-              <a:rPr lang="en-US" sz="900" dirty="0">
-                <a:solidFill>
-                  <a:srgbClr val="94A3B8"/>
+              <a:rPr lang="en-US" sz="1500" b="1" dirty="0">
+                <a:solidFill>
+                  <a:srgbClr val="111827"/>
                 </a:solidFill>
                 <a:latin typeface="Calibri" pitchFamily="34" charset="0"/>
                 <a:ea typeface="Calibri" pitchFamily="34" charset="-122"/>
                 <a:cs typeface="Calibri" pitchFamily="34" charset="-120"/>
               </a:rPr>
-              <a:t>11</a:t>
+              <a:t>Fixed report schema</a:t>
+            </a:r>
+            <a:endParaRPr lang="en-US" sz="1500" dirty="0"/>
+          </a:p>
+        </p:txBody>
+      </p:sp>
+      <p:sp>
+        <p:nvSpPr>
+          <p:cNvPr id="11" name="Text 7"/>
+          <p:cNvSpPr/>
+          <p:nvPr/>
+        </p:nvSpPr>
+        <p:spPr>
+          <a:xfrm>
+            <a:off x="4526280" y="3154680"/>
+            <a:ext cx="2971800" cy="960120"/>
+          </a:xfrm>
+          <a:prstGeom prst="rect">
+            <a:avLst/>
+          </a:prstGeom>
+          <a:noFill/>
+          <a:ln/>
+        </p:spPr>
+        <p:txBody>
+          <a:bodyPr wrap="square" rtlCol="0" anchor="ctr"/>
+          <a:lstStyle/>
+          <a:p>
+            <a:pPr marL="0" indent="0">
+              <a:buNone/>
+            </a:pPr>
+            <a:r>
+              <a:rPr lang="en-US" sz="1150" dirty="0">
+                <a:solidFill>
+                  <a:srgbClr val="64748B"/>
+                </a:solidFill>
+                <a:latin typeface="Calibri" pitchFamily="34" charset="0"/>
+                <a:ea typeface="Calibri" pitchFamily="34" charset="-122"/>
+                <a:cs typeface="Calibri" pitchFamily="34" charset="-120"/>
+              </a:rPr>
+              <a:t>Same fields, same order, for every user — reports stay comparable.</a:t>
+            </a:r>
+            <a:endParaRPr lang="en-US" sz="1150" dirty="0"/>
+          </a:p>
+        </p:txBody>
+      </p:sp>
+      <p:sp>
+        <p:nvSpPr>
+          <p:cNvPr id="12" name="Shape 8"/>
+          <p:cNvSpPr/>
+          <p:nvPr/>
+        </p:nvSpPr>
+        <p:spPr>
+          <a:xfrm>
+            <a:off x="7955280" y="1874520"/>
+            <a:ext cx="3520440" cy="2331720"/>
+          </a:xfrm>
+          <a:prstGeom prst="roundRect">
+            <a:avLst>
+              <a:gd name="adj" fmla="val 3137"/>
+            </a:avLst>
+          </a:prstGeom>
+          <a:solidFill>
+            <a:srgbClr val="FFFFFF"/>
+          </a:solidFill>
+          <a:ln/>
+          <a:effectLst>
+            <a:outerShdw blurRad="101600" dist="38100" dir="5400000" algn="bl" rotWithShape="0">
+              <a:srgbClr val="1E293B">
+                <a:alpha val="8000"/>
+              </a:srgbClr>
+            </a:outerShdw>
+          </a:effectLst>
+        </p:spPr>
+      </p:sp>
+      <p:pic>
+        <p:nvPicPr>
+          <p:cNvPr id="13" name="Image 2" descr="preencoded.png"/>
+          <p:cNvPicPr>
+            <a:picLocks noChangeAspect="1"/>
+          </p:cNvPicPr>
+          <p:nvPr/>
+        </p:nvPicPr>
+        <p:blipFill>
+          <a:blip r:embed="rId5"/>
+          <a:stretch>
+            <a:fillRect/>
+          </a:stretch>
+        </p:blipFill>
+        <p:spPr>
+          <a:xfrm>
+            <a:off x="8229600" y="2148840"/>
+            <a:ext cx="502920" cy="502920"/>
+          </a:xfrm>
+          <a:prstGeom prst="rect">
+            <a:avLst/>
+          </a:prstGeom>
+        </p:spPr>
+      </p:pic>
+      <p:sp>
+        <p:nvSpPr>
+          <p:cNvPr id="14" name="Text 9"/>
+          <p:cNvSpPr/>
+          <p:nvPr/>
+        </p:nvSpPr>
+        <p:spPr>
+          <a:xfrm>
+            <a:off x="8229600" y="2788920"/>
+            <a:ext cx="2971800" cy="365760"/>
+          </a:xfrm>
+          <a:prstGeom prst="rect">
+            <a:avLst/>
+          </a:prstGeom>
+          <a:noFill/>
+          <a:ln/>
+        </p:spPr>
+        <p:txBody>
+          <a:bodyPr wrap="square" rtlCol="0" anchor="ctr"/>
+          <a:lstStyle/>
+          <a:p>
+            <a:pPr marL="0" indent="0">
+              <a:buNone/>
+            </a:pPr>
+            <a:r>
+              <a:rPr lang="en-US" sz="1500" b="1" dirty="0">
+                <a:solidFill>
+                  <a:srgbClr val="111827"/>
+                </a:solidFill>
+                <a:latin typeface="Calibri" pitchFamily="34" charset="0"/>
+                <a:ea typeface="Calibri" pitchFamily="34" charset="-122"/>
+                <a:cs typeface="Calibri" pitchFamily="34" charset="-120"/>
+              </a:rPr>
+              <a:t>Manager dashboard</a:t>
+            </a:r>
+            <a:endParaRPr lang="en-US" sz="1500" dirty="0"/>
+          </a:p>
+        </p:txBody>
+      </p:sp>
+      <p:sp>
+        <p:nvSpPr>
+          <p:cNvPr id="15" name="Text 10"/>
+          <p:cNvSpPr/>
+          <p:nvPr/>
+        </p:nvSpPr>
+        <p:spPr>
+          <a:xfrm>
+            <a:off x="8229600" y="3154680"/>
+            <a:ext cx="2971800" cy="960120"/>
+          </a:xfrm>
+          <a:prstGeom prst="rect">
+            <a:avLst/>
+          </a:prstGeom>
+          <a:noFill/>
+          <a:ln/>
+        </p:spPr>
+        <p:txBody>
+          <a:bodyPr wrap="square" rtlCol="0" anchor="ctr"/>
+          <a:lstStyle/>
+          <a:p>
+            <a:pPr marL="0" indent="0">
+              <a:buNone/>
+            </a:pPr>
+            <a:r>
+              <a:rPr lang="en-US" sz="1150" dirty="0">
+                <a:solidFill>
+                  <a:srgbClr val="64748B"/>
+                </a:solidFill>
+                <a:latin typeface="Calibri" pitchFamily="34" charset="0"/>
+                <a:ea typeface="Calibri" pitchFamily="34" charset="-122"/>
+                <a:cs typeface="Calibri" pitchFamily="34" charset="-120"/>
+              </a:rPr>
+              <a:t>Filters by member, project, date range; compliance &amp; workload insights.</a:t>
+            </a:r>
+            <a:endParaRPr lang="en-US" sz="1150" dirty="0"/>
+          </a:p>
+        </p:txBody>
+      </p:sp>
+      <p:sp>
+        <p:nvSpPr>
+          <p:cNvPr id="17" name="Text 12"/>
+          <p:cNvSpPr/>
+          <p:nvPr/>
+        </p:nvSpPr>
+        <p:spPr>
+          <a:xfrm>
+            <a:off x="457200" y="6473952"/>
+            <a:ext cx="7315200" cy="274320"/>
+          </a:xfrm>
+          <a:prstGeom prst="rect">
+            <a:avLst/>
+          </a:prstGeom>
+          <a:noFill/>
+          <a:ln/>
+        </p:spPr>
+        <p:txBody>
+          <a:bodyPr wrap="square" rtlCol="0" anchor="ctr"/>
+          <a:lstStyle/>
+          <a:p>
+            <a:pPr marL="0" indent="0">
+              <a:buNone/>
+            </a:pPr>
+            <a:r>
+              <a:rPr lang="en-US" sz="900" dirty="0">
+                <a:solidFill>
+                  <a:srgbClr val="94A3B8"/>
+                </a:solidFill>
+                <a:latin typeface="Calibri" pitchFamily="34" charset="0"/>
+                <a:ea typeface="Calibri" pitchFamily="34" charset="-122"/>
+                <a:cs typeface="Calibri" pitchFamily="34" charset="-120"/>
+              </a:rPr>
+              <a:t>Weekly Report Generator &amp; Team Dashboard</a:t>
+            </a:r>
+            <a:endParaRPr lang="en-US" sz="900" dirty="0"/>
+          </a:p>
+        </p:txBody>
+      </p:sp>
+      <p:sp>
+        <p:nvSpPr>
+          <p:cNvPr id="18" name="Text 13"/>
+          <p:cNvSpPr/>
+          <p:nvPr/>
+        </p:nvSpPr>
+        <p:spPr>
+          <a:xfrm>
+            <a:off x="11274552" y="6151977"/>
+            <a:ext cx="457200" cy="274320"/>
+          </a:xfrm>
+          <a:prstGeom prst="rect">
+            <a:avLst/>
+          </a:prstGeom>
+          <a:noFill/>
+          <a:ln/>
+        </p:spPr>
+        <p:txBody>
+          <a:bodyPr wrap="square" rtlCol="0" anchor="ctr"/>
+          <a:lstStyle/>
+          <a:p>
+            <a:pPr marL="0" indent="0" algn="r">
+              <a:buNone/>
+            </a:pPr>
+            <a:r>
+              <a:rPr lang="en-US" sz="900" dirty="0">
+                <a:solidFill>
+                  <a:srgbClr val="94A3B8"/>
+                </a:solidFill>
+                <a:latin typeface="Calibri" pitchFamily="34" charset="0"/>
+                <a:ea typeface="Calibri" pitchFamily="34" charset="-122"/>
+                <a:cs typeface="Calibri" pitchFamily="34" charset="-120"/>
+              </a:rPr>
+              <a:t>2</a:t>
             </a:r>
             <a:endParaRPr lang="en-US" sz="900" dirty="0"/>
           </a:p>
@@ -4161,14 +3829,15 @@
 </p:sld>
 </file>
 
-<file path=ppt/slides/slide2.xml><?xml version="1.0" encoding="utf-8"?>
+<file path=ppt/slides/slide3.xml><?xml version="1.0" encoding="utf-8"?>
 <p:sld xmlns:a="http://schemas.openxmlformats.org/drawingml/2006/main" xmlns:r="http://schemas.openxmlformats.org/officeDocument/2006/relationships" xmlns:p="http://schemas.openxmlformats.org/presentationml/2006/main">
-  <p:cSld name="Slide 2">
+  <p:cSld name="Slide 3">
     <p:bg>
       <p:bgPr>
         <a:solidFill>
           <a:srgbClr val="F8FAFC"/>
         </a:solidFill>
+        <a:effectLst/>
       </p:bgPr>
     </p:bg>
     <p:spTree>
@@ -4194,7 +3863,7 @@
         <p:spPr>
           <a:xfrm>
             <a:off x="548640" y="411480"/>
-            <a:ext cx="7315200" cy="548640"/>
+            <a:ext cx="9144000" cy="548640"/>
           </a:xfrm>
           <a:prstGeom prst="rect">
             <a:avLst/>
@@ -4206,11 +3875,11 @@
           <a:bodyPr wrap="square" rtlCol="0" anchor="ctr"/>
           <a:lstStyle/>
           <a:p>
-            <a:pPr indent="0" marL="0">
+            <a:pPr marL="0" indent="0">
               <a:buNone/>
             </a:pPr>
             <a:r>
-              <a:rPr lang="en-US" sz="3000" b="1" dirty="0">
+              <a:rPr lang="en-US" sz="2800" b="1" dirty="0">
                 <a:solidFill>
                   <a:srgbClr val="111827"/>
                 </a:solidFill>
@@ -4218,22 +3887,44 @@
                 <a:ea typeface="Cambria" pitchFamily="34" charset="-122"/>
                 <a:cs typeface="Cambria" pitchFamily="34" charset="-120"/>
               </a:rPr>
-              <a:t>Objective &amp; Scope</a:t>
-            </a:r>
-            <a:endParaRPr lang="en-US" sz="3000" dirty="0"/>
-          </a:p>
-        </p:txBody>
-      </p:sp>
-      <p:sp>
-        <p:nvSpPr>
-          <p:cNvPr id="3" name="Text 1"/>
-          <p:cNvSpPr/>
-          <p:nvPr/>
-        </p:nvSpPr>
-        <p:spPr>
-          <a:xfrm>
-            <a:off x="548640" y="1051560"/>
-            <a:ext cx="10789920" cy="457200"/>
+              <a:t>System Architecture Overview</a:t>
+            </a:r>
+            <a:endParaRPr lang="en-US" sz="2800" dirty="0"/>
+          </a:p>
+        </p:txBody>
+      </p:sp>
+      <p:sp>
+        <p:nvSpPr>
+          <p:cNvPr id="3" name="Shape 1"/>
+          <p:cNvSpPr/>
+          <p:nvPr/>
+        </p:nvSpPr>
+        <p:spPr>
+          <a:xfrm>
+            <a:off x="548640" y="1828800"/>
+            <a:ext cx="3291840" cy="1554480"/>
+          </a:xfrm>
+          <a:prstGeom prst="roundRect">
+            <a:avLst>
+              <a:gd name="adj" fmla="val 5882"/>
+            </a:avLst>
+          </a:prstGeom>
+          <a:solidFill>
+            <a:srgbClr val="3763F2"/>
+          </a:solidFill>
+          <a:ln/>
+        </p:spPr>
+      </p:sp>
+      <p:sp>
+        <p:nvSpPr>
+          <p:cNvPr id="4" name="Text 2"/>
+          <p:cNvSpPr/>
+          <p:nvPr/>
+        </p:nvSpPr>
+        <p:spPr>
+          <a:xfrm>
+            <a:off x="731520" y="1965960"/>
+            <a:ext cx="2926080" cy="731520"/>
           </a:xfrm>
           <a:prstGeom prst="rect">
             <a:avLst/>
@@ -4245,111 +3936,36 @@
           <a:bodyPr wrap="square" rtlCol="0" anchor="ctr"/>
           <a:lstStyle/>
           <a:p>
-            <a:pPr indent="0" marL="0">
+            <a:pPr marL="0" indent="0" algn="ctr">
               <a:buNone/>
             </a:pPr>
             <a:r>
-              <a:rPr lang="en-US" sz="1350" dirty="0">
-                <a:solidFill>
-                  <a:srgbClr val="64748B"/>
+              <a:rPr lang="en-US" sz="1500" b="1" dirty="0">
+                <a:solidFill>
+                  <a:srgbClr val="FFFFFF"/>
                 </a:solidFill>
                 <a:latin typeface="Calibri" pitchFamily="34" charset="0"/>
                 <a:ea typeface="Calibri" pitchFamily="34" charset="-122"/>
                 <a:cs typeface="Calibri" pitchFamily="34" charset="-120"/>
               </a:rPr>
-              <a:t>Build a multi-user system where team members log structured weekly reports and managers analyze them across the whole team.</a:t>
-            </a:r>
-            <a:endParaRPr lang="en-US" sz="1350" dirty="0"/>
-          </a:p>
-        </p:txBody>
-      </p:sp>
-      <p:sp>
-        <p:nvSpPr>
-          <p:cNvPr id="4" name="Shape 2"/>
-          <p:cNvSpPr/>
-          <p:nvPr/>
-        </p:nvSpPr>
-        <p:spPr>
-          <a:xfrm>
-            <a:off x="548640" y="1874520"/>
-            <a:ext cx="3520440" cy="2331720"/>
-          </a:xfrm>
-          <a:prstGeom prst="roundRect">
-            <a:avLst>
-              <a:gd name="adj" fmla="val 3137"/>
-            </a:avLst>
-          </a:prstGeom>
-          <a:solidFill>
-            <a:srgbClr val="FFFFFF"/>
-          </a:solidFill>
-          <a:ln/>
-          <a:effectLst>
-            <a:outerShdw sx="100000" sy="100000" kx="0" ky="0" algn="bl" rotWithShape="0" blurRad="101600" dist="38100" dir="5400000">
-              <a:srgbClr val="1E293B">
-                <a:alpha val="8000"/>
-              </a:srgbClr>
-            </a:outerShdw>
-          </a:effectLst>
-        </p:spPr>
-      </p:sp>
-      <p:pic>
-        <p:nvPicPr>
-          <p:cNvPr id="5" name="Image 0" descr="preencoded.png">    </p:cNvPr>
-          <p:cNvPicPr>
-            <a:picLocks noChangeAspect="1"/>
-          </p:cNvPicPr>
-          <p:nvPr/>
-        </p:nvPicPr>
-        <p:blipFill>
-          <a:blip r:embed="rId1"/>
-          <a:stretch>
-            <a:fillRect/>
-          </a:stretch>
-        </p:blipFill>
-        <p:spPr>
-          <a:xfrm>
-            <a:off x="822960" y="2148840"/>
-            <a:ext cx="502920" cy="502920"/>
-          </a:xfrm>
-          <a:prstGeom prst="rect">
-            <a:avLst/>
-          </a:prstGeom>
-        </p:spPr>
-      </p:pic>
-      <p:sp>
-        <p:nvSpPr>
-          <p:cNvPr id="6" name="Text 3"/>
-          <p:cNvSpPr/>
-          <p:nvPr/>
-        </p:nvSpPr>
-        <p:spPr>
-          <a:xfrm>
-            <a:off x="822960" y="2788920"/>
-            <a:ext cx="2971800" cy="365760"/>
-          </a:xfrm>
-          <a:prstGeom prst="rect">
-            <a:avLst/>
-          </a:prstGeom>
-          <a:noFill/>
-          <a:ln/>
-        </p:spPr>
-        <p:txBody>
-          <a:bodyPr wrap="square" rtlCol="0" anchor="ctr"/>
-          <a:lstStyle/>
-          <a:p>
-            <a:pPr indent="0" marL="0">
+              <a:t>React SPA</a:t>
+            </a:r>
+            <a:endParaRPr lang="en-US" sz="1500" dirty="0"/>
+          </a:p>
+          <a:p>
+            <a:pPr marL="0" indent="0" algn="ctr">
               <a:buNone/>
             </a:pPr>
             <a:r>
               <a:rPr lang="en-US" sz="1500" b="1" dirty="0">
                 <a:solidFill>
-                  <a:srgbClr val="111827"/>
+                  <a:srgbClr val="FFFFFF"/>
                 </a:solidFill>
                 <a:latin typeface="Calibri" pitchFamily="34" charset="0"/>
                 <a:ea typeface="Calibri" pitchFamily="34" charset="-122"/>
                 <a:cs typeface="Calibri" pitchFamily="34" charset="-120"/>
               </a:rPr>
-              <a:t>Role-based access</a:t>
+              <a:t>(Vite + Tailwind)</a:t>
             </a:r>
             <a:endParaRPr lang="en-US" sz="1500" dirty="0"/>
           </a:p>
@@ -4357,14 +3973,14 @@
       </p:sp>
       <p:sp>
         <p:nvSpPr>
-          <p:cNvPr id="7" name="Text 4"/>
-          <p:cNvSpPr/>
-          <p:nvPr/>
-        </p:nvSpPr>
-        <p:spPr>
-          <a:xfrm>
-            <a:off x="822960" y="3154680"/>
-            <a:ext cx="2971800" cy="960120"/>
+          <p:cNvPr id="5" name="Text 3"/>
+          <p:cNvSpPr/>
+          <p:nvPr/>
+        </p:nvSpPr>
+        <p:spPr>
+          <a:xfrm>
+            <a:off x="731520" y="2697480"/>
+            <a:ext cx="2926080" cy="548640"/>
           </a:xfrm>
           <a:prstGeom prst="rect">
             <a:avLst/>
@@ -4376,87 +3992,56 @@
           <a:bodyPr wrap="square" rtlCol="0" anchor="ctr"/>
           <a:lstStyle/>
           <a:p>
-            <a:pPr indent="0" marL="0">
+            <a:pPr marL="0" indent="0" algn="ctr">
               <a:buNone/>
             </a:pPr>
             <a:r>
-              <a:rPr lang="en-US" sz="1150" dirty="0">
-                <a:solidFill>
-                  <a:srgbClr val="64748B"/>
+              <a:rPr lang="en-US" sz="1050" dirty="0">
+                <a:solidFill>
+                  <a:srgbClr val="E2E8F0"/>
                 </a:solidFill>
                 <a:latin typeface="Calibri" pitchFamily="34" charset="0"/>
                 <a:ea typeface="Calibri" pitchFamily="34" charset="-122"/>
                 <a:cs typeface="Calibri" pitchFamily="34" charset="-120"/>
               </a:rPr>
-              <a:t>Team Member vs Manager/Admin, enforced server-side on every route.</a:t>
-            </a:r>
-            <a:endParaRPr lang="en-US" sz="1150" dirty="0"/>
-          </a:p>
-        </p:txBody>
-      </p:sp>
-      <p:sp>
-        <p:nvSpPr>
-          <p:cNvPr id="8" name="Shape 5"/>
-          <p:cNvSpPr/>
-          <p:nvPr/>
-        </p:nvSpPr>
-        <p:spPr>
-          <a:xfrm>
-            <a:off x="4251960" y="1874520"/>
-            <a:ext cx="3520440" cy="2331720"/>
+              <a:t>Personal report page · Team dashboard</a:t>
+            </a:r>
+            <a:endParaRPr lang="en-US" sz="1050" dirty="0"/>
+          </a:p>
+        </p:txBody>
+      </p:sp>
+      <p:sp>
+        <p:nvSpPr>
+          <p:cNvPr id="6" name="Shape 4"/>
+          <p:cNvSpPr/>
+          <p:nvPr/>
+        </p:nvSpPr>
+        <p:spPr>
+          <a:xfrm>
+            <a:off x="4480560" y="1828800"/>
+            <a:ext cx="3154680" cy="1554480"/>
           </a:xfrm>
           <a:prstGeom prst="roundRect">
             <a:avLst>
-              <a:gd name="adj" fmla="val 3137"/>
+              <a:gd name="adj" fmla="val 5882"/>
             </a:avLst>
           </a:prstGeom>
           <a:solidFill>
-            <a:srgbClr val="FFFFFF"/>
+            <a:srgbClr val="111827"/>
           </a:solidFill>
           <a:ln/>
-          <a:effectLst>
-            <a:outerShdw sx="100000" sy="100000" kx="0" ky="0" algn="bl" rotWithShape="0" blurRad="101600" dist="38100" dir="5400000">
-              <a:srgbClr val="1E293B">
-                <a:alpha val="8000"/>
-              </a:srgbClr>
-            </a:outerShdw>
-          </a:effectLst>
-        </p:spPr>
-      </p:sp>
-      <p:pic>
-        <p:nvPicPr>
-          <p:cNvPr id="9" name="Image 1" descr="preencoded.png">    </p:cNvPr>
-          <p:cNvPicPr>
-            <a:picLocks noChangeAspect="1"/>
-          </p:cNvPicPr>
-          <p:nvPr/>
-        </p:nvPicPr>
-        <p:blipFill>
-          <a:blip r:embed="rId2"/>
-          <a:stretch>
-            <a:fillRect/>
-          </a:stretch>
-        </p:blipFill>
-        <p:spPr>
-          <a:xfrm>
-            <a:off x="4526280" y="2148840"/>
-            <a:ext cx="502920" cy="502920"/>
-          </a:xfrm>
-          <a:prstGeom prst="rect">
-            <a:avLst/>
-          </a:prstGeom>
-        </p:spPr>
-      </p:pic>
-      <p:sp>
-        <p:nvSpPr>
-          <p:cNvPr id="10" name="Text 6"/>
-          <p:cNvSpPr/>
-          <p:nvPr/>
-        </p:nvSpPr>
-        <p:spPr>
-          <a:xfrm>
-            <a:off x="4526280" y="2788920"/>
-            <a:ext cx="2971800" cy="365760"/>
+        </p:spPr>
+      </p:sp>
+      <p:sp>
+        <p:nvSpPr>
+          <p:cNvPr id="7" name="Text 5"/>
+          <p:cNvSpPr/>
+          <p:nvPr/>
+        </p:nvSpPr>
+        <p:spPr>
+          <a:xfrm>
+            <a:off x="4526280" y="1965960"/>
+            <a:ext cx="2926080" cy="731520"/>
           </a:xfrm>
           <a:prstGeom prst="rect">
             <a:avLst/>
@@ -4468,19 +4053,19 @@
           <a:bodyPr wrap="square" rtlCol="0" anchor="ctr"/>
           <a:lstStyle/>
           <a:p>
-            <a:pPr indent="0" marL="0">
+            <a:pPr marL="0" indent="0" algn="ctr">
               <a:buNone/>
             </a:pPr>
             <a:r>
               <a:rPr lang="en-US" sz="1500" b="1" dirty="0">
                 <a:solidFill>
-                  <a:srgbClr val="111827"/>
+                  <a:srgbClr val="FFFFFF"/>
                 </a:solidFill>
                 <a:latin typeface="Calibri" pitchFamily="34" charset="0"/>
                 <a:ea typeface="Calibri" pitchFamily="34" charset="-122"/>
                 <a:cs typeface="Calibri" pitchFamily="34" charset="-120"/>
               </a:rPr>
-              <a:t>Fixed report schema</a:t>
+              <a:t>Express REST API</a:t>
             </a:r>
             <a:endParaRPr lang="en-US" sz="1500" dirty="0"/>
           </a:p>
@@ -4488,14 +4073,14 @@
       </p:sp>
       <p:sp>
         <p:nvSpPr>
-          <p:cNvPr id="11" name="Text 7"/>
-          <p:cNvSpPr/>
-          <p:nvPr/>
-        </p:nvSpPr>
-        <p:spPr>
-          <a:xfrm>
-            <a:off x="4526280" y="3154680"/>
-            <a:ext cx="2971800" cy="960120"/>
+          <p:cNvPr id="8" name="Text 6"/>
+          <p:cNvSpPr/>
+          <p:nvPr/>
+        </p:nvSpPr>
+        <p:spPr>
+          <a:xfrm>
+            <a:off x="4526280" y="2697480"/>
+            <a:ext cx="2926080" cy="548640"/>
           </a:xfrm>
           <a:prstGeom prst="rect">
             <a:avLst/>
@@ -4507,87 +4092,56 @@
           <a:bodyPr wrap="square" rtlCol="0" anchor="ctr"/>
           <a:lstStyle/>
           <a:p>
-            <a:pPr indent="0" marL="0">
+            <a:pPr marL="0" indent="0" algn="ctr">
               <a:buNone/>
             </a:pPr>
             <a:r>
-              <a:rPr lang="en-US" sz="1150" dirty="0">
-                <a:solidFill>
-                  <a:srgbClr val="64748B"/>
+              <a:rPr lang="en-US" sz="1050" dirty="0">
+                <a:solidFill>
+                  <a:srgbClr val="E2E8F0"/>
                 </a:solidFill>
                 <a:latin typeface="Calibri" pitchFamily="34" charset="0"/>
                 <a:ea typeface="Calibri" pitchFamily="34" charset="-122"/>
                 <a:cs typeface="Calibri" pitchFamily="34" charset="-120"/>
               </a:rPr>
-              <a:t>Same fields, same order, for every user — reports stay comparable.</a:t>
-            </a:r>
-            <a:endParaRPr lang="en-US" sz="1150" dirty="0"/>
-          </a:p>
-        </p:txBody>
-      </p:sp>
-      <p:sp>
-        <p:nvSpPr>
-          <p:cNvPr id="12" name="Shape 8"/>
-          <p:cNvSpPr/>
-          <p:nvPr/>
-        </p:nvSpPr>
-        <p:spPr>
-          <a:xfrm>
-            <a:off x="7955280" y="1874520"/>
-            <a:ext cx="3520440" cy="2331720"/>
+              <a:t>JWT auth · RBAC middleware · Controllers</a:t>
+            </a:r>
+            <a:endParaRPr lang="en-US" sz="1050" dirty="0"/>
+          </a:p>
+        </p:txBody>
+      </p:sp>
+      <p:sp>
+        <p:nvSpPr>
+          <p:cNvPr id="9" name="Shape 7"/>
+          <p:cNvSpPr/>
+          <p:nvPr/>
+        </p:nvSpPr>
+        <p:spPr>
+          <a:xfrm>
+            <a:off x="8422782" y="1828800"/>
+            <a:ext cx="3007217" cy="1554480"/>
           </a:xfrm>
           <a:prstGeom prst="roundRect">
             <a:avLst>
-              <a:gd name="adj" fmla="val 3137"/>
+              <a:gd name="adj" fmla="val 5882"/>
             </a:avLst>
           </a:prstGeom>
           <a:solidFill>
-            <a:srgbClr val="FFFFFF"/>
+            <a:srgbClr val="10B981"/>
           </a:solidFill>
           <a:ln/>
-          <a:effectLst>
-            <a:outerShdw sx="100000" sy="100000" kx="0" ky="0" algn="bl" rotWithShape="0" blurRad="101600" dist="38100" dir="5400000">
-              <a:srgbClr val="1E293B">
-                <a:alpha val="8000"/>
-              </a:srgbClr>
-            </a:outerShdw>
-          </a:effectLst>
-        </p:spPr>
-      </p:sp>
-      <p:pic>
-        <p:nvPicPr>
-          <p:cNvPr id="13" name="Image 2" descr="preencoded.png">    </p:cNvPr>
-          <p:cNvPicPr>
-            <a:picLocks noChangeAspect="1"/>
-          </p:cNvPicPr>
-          <p:nvPr/>
-        </p:nvPicPr>
-        <p:blipFill>
-          <a:blip r:embed="rId3"/>
-          <a:stretch>
-            <a:fillRect/>
-          </a:stretch>
-        </p:blipFill>
-        <p:spPr>
-          <a:xfrm>
-            <a:off x="8229600" y="2148840"/>
-            <a:ext cx="502920" cy="502920"/>
-          </a:xfrm>
-          <a:prstGeom prst="rect">
-            <a:avLst/>
-          </a:prstGeom>
-        </p:spPr>
-      </p:pic>
-      <p:sp>
-        <p:nvSpPr>
-          <p:cNvPr id="14" name="Text 9"/>
-          <p:cNvSpPr/>
-          <p:nvPr/>
-        </p:nvSpPr>
-        <p:spPr>
-          <a:xfrm>
-            <a:off x="8229600" y="2788920"/>
-            <a:ext cx="2971800" cy="365760"/>
+        </p:spPr>
+      </p:sp>
+      <p:sp>
+        <p:nvSpPr>
+          <p:cNvPr id="10" name="Text 8"/>
+          <p:cNvSpPr/>
+          <p:nvPr/>
+        </p:nvSpPr>
+        <p:spPr>
+          <a:xfrm>
+            <a:off x="8321040" y="1965960"/>
+            <a:ext cx="2926080" cy="731520"/>
           </a:xfrm>
           <a:prstGeom prst="rect">
             <a:avLst/>
@@ -4599,73 +4153,51 @@
           <a:bodyPr wrap="square" rtlCol="0" anchor="ctr"/>
           <a:lstStyle/>
           <a:p>
-            <a:pPr indent="0" marL="0">
+            <a:pPr marL="0" indent="0" algn="ctr">
               <a:buNone/>
             </a:pPr>
             <a:r>
               <a:rPr lang="en-US" sz="1500" b="1" dirty="0">
                 <a:solidFill>
-                  <a:srgbClr val="111827"/>
+                  <a:srgbClr val="FFFFFF"/>
                 </a:solidFill>
                 <a:latin typeface="Calibri" pitchFamily="34" charset="0"/>
                 <a:ea typeface="Calibri" pitchFamily="34" charset="-122"/>
                 <a:cs typeface="Calibri" pitchFamily="34" charset="-120"/>
               </a:rPr>
-              <a:t>Manager dashboard</a:t>
+              <a:t>PostgreSQL</a:t>
             </a:r>
             <a:endParaRPr lang="en-US" sz="1500" dirty="0"/>
           </a:p>
-        </p:txBody>
-      </p:sp>
-      <p:sp>
-        <p:nvSpPr>
-          <p:cNvPr id="15" name="Text 10"/>
-          <p:cNvSpPr/>
-          <p:nvPr/>
-        </p:nvSpPr>
-        <p:spPr>
-          <a:xfrm>
-            <a:off x="8229600" y="3154680"/>
-            <a:ext cx="2971800" cy="960120"/>
-          </a:xfrm>
-          <a:prstGeom prst="rect">
-            <a:avLst/>
-          </a:prstGeom>
-          <a:noFill/>
-          <a:ln/>
-        </p:spPr>
-        <p:txBody>
-          <a:bodyPr wrap="square" rtlCol="0" anchor="ctr"/>
-          <a:lstStyle/>
-          <a:p>
-            <a:pPr indent="0" marL="0">
+          <a:p>
+            <a:pPr marL="0" indent="0" algn="ctr">
               <a:buNone/>
             </a:pPr>
             <a:r>
-              <a:rPr lang="en-US" sz="1150" dirty="0">
-                <a:solidFill>
-                  <a:srgbClr val="64748B"/>
+              <a:rPr lang="en-US" sz="1500" b="1" dirty="0">
+                <a:solidFill>
+                  <a:srgbClr val="FFFFFF"/>
                 </a:solidFill>
                 <a:latin typeface="Calibri" pitchFamily="34" charset="0"/>
                 <a:ea typeface="Calibri" pitchFamily="34" charset="-122"/>
                 <a:cs typeface="Calibri" pitchFamily="34" charset="-120"/>
               </a:rPr>
-              <a:t>Filters by member, project, date range; compliance &amp; workload insights.</a:t>
-            </a:r>
-            <a:endParaRPr lang="en-US" sz="1150" dirty="0"/>
-          </a:p>
-        </p:txBody>
-      </p:sp>
-      <p:sp>
-        <p:nvSpPr>
-          <p:cNvPr id="16" name="Text 11"/>
-          <p:cNvSpPr/>
-          <p:nvPr/>
-        </p:nvSpPr>
-        <p:spPr>
-          <a:xfrm>
-            <a:off x="548640" y="4526280"/>
-            <a:ext cx="10789920" cy="457200"/>
+              <a:t>(Sequelize)</a:t>
+            </a:r>
+            <a:endParaRPr lang="en-US" sz="1500" dirty="0"/>
+          </a:p>
+        </p:txBody>
+      </p:sp>
+      <p:sp>
+        <p:nvSpPr>
+          <p:cNvPr id="11" name="Text 9"/>
+          <p:cNvSpPr/>
+          <p:nvPr/>
+        </p:nvSpPr>
+        <p:spPr>
+          <a:xfrm>
+            <a:off x="8321040" y="2697480"/>
+            <a:ext cx="2926080" cy="548640"/>
           </a:xfrm>
           <a:prstGeom prst="rect">
             <a:avLst/>
@@ -4677,97 +4209,340 @@
           <a:bodyPr wrap="square" rtlCol="0" anchor="ctr"/>
           <a:lstStyle/>
           <a:p>
-            <a:pPr indent="0" marL="0">
+            <a:pPr marL="0" indent="0" algn="ctr">
               <a:buNone/>
             </a:pPr>
             <a:r>
-              <a:rPr lang="en-US" sz="1250" i="1" dirty="0">
-                <a:solidFill>
-                  <a:srgbClr val="64748B"/>
+              <a:rPr lang="en-US" sz="1050" dirty="0">
+                <a:solidFill>
+                  <a:srgbClr val="E2E8F0"/>
                 </a:solidFill>
                 <a:latin typeface="Calibri" pitchFamily="34" charset="0"/>
                 <a:ea typeface="Calibri" pitchFamily="34" charset="-122"/>
                 <a:cs typeface="Calibri" pitchFamily="34" charset="-120"/>
               </a:rPr>
-              <a:t>Deliverables: GitHub repo (frontend + backend + README), ER diagram, Google Slides presentation, and a demo video.</a:t>
-            </a:r>
-            <a:endParaRPr lang="en-US" sz="1250" dirty="0"/>
-          </a:p>
-        </p:txBody>
-      </p:sp>
-      <p:sp>
-        <p:nvSpPr>
-          <p:cNvPr id="17" name="Text 12"/>
-          <p:cNvSpPr/>
-          <p:nvPr/>
-        </p:nvSpPr>
-        <p:spPr>
-          <a:xfrm>
-            <a:off x="457200" y="6473952"/>
-            <a:ext cx="7315200" cy="274320"/>
-          </a:xfrm>
-          <a:prstGeom prst="rect">
-            <a:avLst/>
-          </a:prstGeom>
-          <a:noFill/>
-          <a:ln/>
-        </p:spPr>
-        <p:txBody>
-          <a:bodyPr wrap="square" rtlCol="0" anchor="ctr"/>
-          <a:lstStyle/>
-          <a:p>
-            <a:pPr indent="0" marL="0">
-              <a:buNone/>
-            </a:pPr>
-            <a:r>
-              <a:rPr lang="en-US" sz="900" dirty="0">
-                <a:solidFill>
-                  <a:srgbClr val="94A3B8"/>
+              <a:t>users · projects · </a:t>
+            </a:r>
+            <a:r>
+              <a:rPr lang="en-US" sz="1050" dirty="0" smtClean="0">
+                <a:solidFill>
+                  <a:srgbClr val="E2E8F0"/>
                 </a:solidFill>
                 <a:latin typeface="Calibri" pitchFamily="34" charset="0"/>
                 <a:ea typeface="Calibri" pitchFamily="34" charset="-122"/>
                 <a:cs typeface="Calibri" pitchFamily="34" charset="-120"/>
               </a:rPr>
-              <a:t>Weekly Report Generator &amp; Team Dashboard</a:t>
-            </a:r>
-            <a:endParaRPr lang="en-US" sz="900" dirty="0"/>
-          </a:p>
-        </p:txBody>
-      </p:sp>
-      <p:sp>
-        <p:nvSpPr>
-          <p:cNvPr id="18" name="Text 13"/>
-          <p:cNvSpPr/>
-          <p:nvPr/>
-        </p:nvSpPr>
-        <p:spPr>
-          <a:xfrm>
-            <a:off x="11274552" y="6473952"/>
-            <a:ext cx="457200" cy="274320"/>
-          </a:xfrm>
-          <a:prstGeom prst="rect">
+              <a:t>weekly reports</a:t>
+            </a:r>
+            <a:endParaRPr lang="en-US" sz="1050" dirty="0"/>
+          </a:p>
+        </p:txBody>
+      </p:sp>
+      <p:sp>
+        <p:nvSpPr>
+          <p:cNvPr id="12" name="Shape 10"/>
+          <p:cNvSpPr/>
+          <p:nvPr/>
+        </p:nvSpPr>
+        <p:spPr>
+          <a:xfrm>
+            <a:off x="3840480" y="2606040"/>
+            <a:ext cx="640080" cy="0"/>
+          </a:xfrm>
+          <a:prstGeom prst="line">
             <a:avLst/>
           </a:prstGeom>
           <a:noFill/>
+          <a:ln w="25400">
+            <a:solidFill>
+              <a:srgbClr val="64748B"/>
+            </a:solidFill>
+            <a:prstDash val="solid"/>
+            <a:tailEnd type="triangle"/>
+          </a:ln>
+        </p:spPr>
+      </p:sp>
+      <p:sp>
+        <p:nvSpPr>
+          <p:cNvPr id="13" name="Text 11"/>
+          <p:cNvSpPr/>
+          <p:nvPr/>
+        </p:nvSpPr>
+        <p:spPr>
+          <a:xfrm>
+            <a:off x="3815045" y="2696743"/>
+            <a:ext cx="690951" cy="548640"/>
+          </a:xfrm>
+          <a:prstGeom prst="rect">
+            <a:avLst/>
+          </a:prstGeom>
+          <a:noFill/>
           <a:ln/>
         </p:spPr>
         <p:txBody>
           <a:bodyPr wrap="square" rtlCol="0" anchor="ctr"/>
           <a:lstStyle/>
           <a:p>
-            <a:pPr algn="r" indent="0" marL="0">
+            <a:pPr marL="0" indent="0" algn="ctr">
               <a:buNone/>
             </a:pPr>
             <a:r>
-              <a:rPr lang="en-US" sz="900" dirty="0">
-                <a:solidFill>
-                  <a:srgbClr val="94A3B8"/>
+              <a:rPr lang="en-US" sz="850" dirty="0">
+                <a:solidFill>
+                  <a:srgbClr val="64748B"/>
                 </a:solidFill>
                 <a:latin typeface="Calibri" pitchFamily="34" charset="0"/>
                 <a:ea typeface="Calibri" pitchFamily="34" charset="-122"/>
                 <a:cs typeface="Calibri" pitchFamily="34" charset="-120"/>
               </a:rPr>
-              <a:t>2</a:t>
+              <a:t>REST / JSON (JWT bearer)</a:t>
+            </a:r>
+            <a:endParaRPr lang="en-US" sz="850" dirty="0"/>
+          </a:p>
+        </p:txBody>
+      </p:sp>
+      <p:sp>
+        <p:nvSpPr>
+          <p:cNvPr id="14" name="Shape 12"/>
+          <p:cNvSpPr/>
+          <p:nvPr/>
+        </p:nvSpPr>
+        <p:spPr>
+          <a:xfrm>
+            <a:off x="7635240" y="2606040"/>
+            <a:ext cx="787542" cy="0"/>
+          </a:xfrm>
+          <a:prstGeom prst="line">
+            <a:avLst/>
+          </a:prstGeom>
+          <a:noFill/>
+          <a:ln w="25400">
+            <a:solidFill>
+              <a:srgbClr val="64748B"/>
+            </a:solidFill>
+            <a:prstDash val="solid"/>
+            <a:tailEnd type="triangle"/>
+          </a:ln>
+        </p:spPr>
+      </p:sp>
+      <p:sp>
+        <p:nvSpPr>
+          <p:cNvPr id="15" name="Text 13"/>
+          <p:cNvSpPr/>
+          <p:nvPr/>
+        </p:nvSpPr>
+        <p:spPr>
+          <a:xfrm>
+            <a:off x="7578895" y="2606040"/>
+            <a:ext cx="798490" cy="640080"/>
+          </a:xfrm>
+          <a:prstGeom prst="rect">
+            <a:avLst/>
+          </a:prstGeom>
+          <a:noFill/>
+          <a:ln/>
+        </p:spPr>
+        <p:txBody>
+          <a:bodyPr wrap="square" rtlCol="0" anchor="ctr"/>
+          <a:lstStyle/>
+          <a:p>
+            <a:pPr marL="0" indent="0" algn="ctr">
+              <a:buNone/>
+            </a:pPr>
+            <a:r>
+              <a:rPr lang="en-US" sz="1000" dirty="0">
+                <a:solidFill>
+                  <a:srgbClr val="64748B"/>
+                </a:solidFill>
+                <a:latin typeface="Calibri" pitchFamily="34" charset="0"/>
+                <a:ea typeface="Calibri" pitchFamily="34" charset="-122"/>
+                <a:cs typeface="Calibri" pitchFamily="34" charset="-120"/>
+              </a:rPr>
+              <a:t>Sequelize ORM</a:t>
+            </a:r>
+            <a:endParaRPr lang="en-US" sz="1000" dirty="0"/>
+          </a:p>
+        </p:txBody>
+      </p:sp>
+      <p:sp>
+        <p:nvSpPr>
+          <p:cNvPr id="16" name="Text 14"/>
+          <p:cNvSpPr/>
+          <p:nvPr/>
+        </p:nvSpPr>
+        <p:spPr>
+          <a:xfrm>
+            <a:off x="548640" y="3749040"/>
+            <a:ext cx="11064240" cy="2103120"/>
+          </a:xfrm>
+          <a:prstGeom prst="rect">
+            <a:avLst/>
+          </a:prstGeom>
+          <a:noFill/>
+          <a:ln/>
+        </p:spPr>
+        <p:txBody>
+          <a:bodyPr wrap="square" rtlCol="0" anchor="ctr"/>
+          <a:lstStyle/>
+          <a:p>
+            <a:pPr marL="342900" indent="-342900">
+              <a:spcAft>
+                <a:spcPts val="800"/>
+              </a:spcAft>
+              <a:buSzPct val="100000"/>
+              <a:buChar char="•"/>
+            </a:pPr>
+            <a:r>
+              <a:rPr lang="en-US" sz="1250" dirty="0">
+                <a:solidFill>
+                  <a:srgbClr val="111827"/>
+                </a:solidFill>
+                <a:latin typeface="Calibri" pitchFamily="34" charset="0"/>
+                <a:ea typeface="Calibri" pitchFamily="34" charset="-122"/>
+                <a:cs typeface="Calibri" pitchFamily="34" charset="-120"/>
+              </a:rPr>
+              <a:t>1. User authenticates → server issues a signed JWT containing user id + role.</a:t>
+            </a:r>
+            <a:endParaRPr lang="en-US" sz="1250" dirty="0"/>
+          </a:p>
+          <a:p>
+            <a:pPr marL="342900" indent="-342900">
+              <a:spcAft>
+                <a:spcPts val="800"/>
+              </a:spcAft>
+              <a:buSzPct val="100000"/>
+              <a:buChar char="•"/>
+            </a:pPr>
+            <a:r>
+              <a:rPr lang="en-US" sz="1250" dirty="0">
+                <a:solidFill>
+                  <a:srgbClr val="111827"/>
+                </a:solidFill>
+                <a:latin typeface="Calibri" pitchFamily="34" charset="0"/>
+                <a:ea typeface="Calibri" pitchFamily="34" charset="-122"/>
+                <a:cs typeface="Calibri" pitchFamily="34" charset="-120"/>
+              </a:rPr>
+              <a:t>2. Every request carries the JWT; "protect" middleware verifies it, "requireRole" gates manager-only routes.</a:t>
+            </a:r>
+            <a:endParaRPr lang="en-US" sz="1250" dirty="0"/>
+          </a:p>
+          <a:p>
+            <a:pPr marL="342900" indent="-342900">
+              <a:spcAft>
+                <a:spcPts val="800"/>
+              </a:spcAft>
+              <a:buSzPct val="100000"/>
+              <a:buChar char="•"/>
+            </a:pPr>
+            <a:r>
+              <a:rPr lang="en-US" sz="1250" dirty="0">
+                <a:solidFill>
+                  <a:srgbClr val="111827"/>
+                </a:solidFill>
+                <a:latin typeface="Calibri" pitchFamily="34" charset="0"/>
+                <a:ea typeface="Calibri" pitchFamily="34" charset="-122"/>
+                <a:cs typeface="Calibri" pitchFamily="34" charset="-120"/>
+              </a:rPr>
+              <a:t>3. Members' report queries are always scoped to req.user.id at the controller level — never trusted from the client.</a:t>
+            </a:r>
+            <a:endParaRPr lang="en-US" sz="1250" dirty="0"/>
+          </a:p>
+          <a:p>
+            <a:pPr marL="342900" indent="-342900">
+              <a:spcAft>
+                <a:spcPts val="800"/>
+              </a:spcAft>
+              <a:buSzPct val="100000"/>
+              <a:buChar char="•"/>
+            </a:pPr>
+            <a:r>
+              <a:rPr lang="en-US" sz="1250" dirty="0">
+                <a:solidFill>
+                  <a:srgbClr val="111827"/>
+                </a:solidFill>
+                <a:latin typeface="Calibri" pitchFamily="34" charset="0"/>
+                <a:ea typeface="Calibri" pitchFamily="34" charset="-122"/>
+                <a:cs typeface="Calibri" pitchFamily="34" charset="-120"/>
+              </a:rPr>
+              <a:t>4. Dashboard endpoints run SQL GROUP BY / SUM / COUNT queries directly over the reports table for real-time metrics.</a:t>
+            </a:r>
+            <a:endParaRPr lang="en-US" sz="1250" dirty="0"/>
+          </a:p>
+        </p:txBody>
+      </p:sp>
+      <p:sp>
+        <p:nvSpPr>
+          <p:cNvPr id="17" name="Text 15"/>
+          <p:cNvSpPr/>
+          <p:nvPr/>
+        </p:nvSpPr>
+        <p:spPr>
+          <a:xfrm>
+            <a:off x="457200" y="6473952"/>
+            <a:ext cx="7315200" cy="274320"/>
+          </a:xfrm>
+          <a:prstGeom prst="rect">
+            <a:avLst/>
+          </a:prstGeom>
+          <a:noFill/>
+          <a:ln/>
+        </p:spPr>
+        <p:txBody>
+          <a:bodyPr wrap="square" rtlCol="0" anchor="ctr"/>
+          <a:lstStyle/>
+          <a:p>
+            <a:pPr marL="0" indent="0">
+              <a:buNone/>
+            </a:pPr>
+            <a:r>
+              <a:rPr lang="en-US" sz="900" dirty="0">
+                <a:solidFill>
+                  <a:srgbClr val="94A3B8"/>
+                </a:solidFill>
+                <a:latin typeface="Calibri" pitchFamily="34" charset="0"/>
+                <a:ea typeface="Calibri" pitchFamily="34" charset="-122"/>
+                <a:cs typeface="Calibri" pitchFamily="34" charset="-120"/>
+              </a:rPr>
+              <a:t>Weekly Report Generator &amp; Team Dashboard</a:t>
+            </a:r>
+            <a:endParaRPr lang="en-US" sz="900" dirty="0"/>
+          </a:p>
+        </p:txBody>
+      </p:sp>
+      <p:sp>
+        <p:nvSpPr>
+          <p:cNvPr id="18" name="Text 16"/>
+          <p:cNvSpPr/>
+          <p:nvPr/>
+        </p:nvSpPr>
+        <p:spPr>
+          <a:xfrm>
+            <a:off x="11274552" y="6164857"/>
+            <a:ext cx="457200" cy="274320"/>
+          </a:xfrm>
+          <a:prstGeom prst="rect">
+            <a:avLst/>
+          </a:prstGeom>
+          <a:noFill/>
+          <a:ln/>
+        </p:spPr>
+        <p:txBody>
+          <a:bodyPr wrap="square" rtlCol="0" anchor="ctr"/>
+          <a:lstStyle/>
+          <a:p>
+            <a:pPr marL="0" indent="0" algn="r">
+              <a:buNone/>
+            </a:pPr>
+            <a:r>
+              <a:rPr lang="en-US" sz="900" dirty="0">
+                <a:solidFill>
+                  <a:srgbClr val="94A3B8"/>
+                </a:solidFill>
+                <a:latin typeface="Calibri" pitchFamily="34" charset="0"/>
+                <a:ea typeface="Calibri" pitchFamily="34" charset="-122"/>
+                <a:cs typeface="Calibri" pitchFamily="34" charset="-120"/>
+              </a:rPr>
+              <a:t>3</a:t>
             </a:r>
             <a:endParaRPr lang="en-US" sz="900" dirty="0"/>
           </a:p>
@@ -4781,14 +4556,15 @@
 </p:sld>
 </file>
 
-<file path=ppt/slides/slide3.xml><?xml version="1.0" encoding="utf-8"?>
+<file path=ppt/slides/slide4.xml><?xml version="1.0" encoding="utf-8"?>
 <p:sld xmlns:a="http://schemas.openxmlformats.org/drawingml/2006/main" xmlns:r="http://schemas.openxmlformats.org/officeDocument/2006/relationships" xmlns:p="http://schemas.openxmlformats.org/presentationml/2006/main">
-  <p:cSld name="Slide 3">
+  <p:cSld name="Slide 4">
     <p:bg>
       <p:bgPr>
         <a:solidFill>
-          <a:srgbClr val="F8FAFC"/>
+          <a:srgbClr val="FFFFFF"/>
         </a:solidFill>
+        <a:effectLst/>
       </p:bgPr>
     </p:bg>
     <p:spTree>
@@ -4813,8 +4589,8 @@
         </p:nvSpPr>
         <p:spPr>
           <a:xfrm>
-            <a:off x="548640" y="411480"/>
-            <a:ext cx="9144000" cy="548640"/>
+            <a:off x="548640" y="365760"/>
+            <a:ext cx="7315200" cy="502920"/>
           </a:xfrm>
           <a:prstGeom prst="rect">
             <a:avLst/>
@@ -4826,7 +4602,7 @@
           <a:bodyPr wrap="square" rtlCol="0" anchor="ctr"/>
           <a:lstStyle/>
           <a:p>
-            <a:pPr indent="0" marL="0">
+            <a:pPr marL="0" indent="0">
               <a:buNone/>
             </a:pPr>
             <a:r>
@@ -4838,7 +4614,7 @@
                 <a:ea typeface="Cambria" pitchFamily="34" charset="-122"/>
                 <a:cs typeface="Cambria" pitchFamily="34" charset="-120"/>
               </a:rPr>
-              <a:t>System Architecture Overview</a:t>
+              <a:t>Database Design</a:t>
             </a:r>
             <a:endParaRPr lang="en-US" sz="2800" dirty="0"/>
           </a:p>
@@ -4846,36 +4622,14 @@
       </p:sp>
       <p:sp>
         <p:nvSpPr>
-          <p:cNvPr id="3" name="Shape 1"/>
-          <p:cNvSpPr/>
-          <p:nvPr/>
-        </p:nvSpPr>
-        <p:spPr>
-          <a:xfrm>
-            <a:off x="548640" y="1828800"/>
-            <a:ext cx="3291840" cy="1554480"/>
-          </a:xfrm>
-          <a:prstGeom prst="roundRect">
-            <a:avLst>
-              <a:gd name="adj" fmla="val 5882"/>
-            </a:avLst>
-          </a:prstGeom>
-          <a:solidFill>
-            <a:srgbClr val="3763F2"/>
-          </a:solidFill>
-          <a:ln/>
-        </p:spPr>
-      </p:sp>
-      <p:sp>
-        <p:nvSpPr>
-          <p:cNvPr id="4" name="Text 2"/>
-          <p:cNvSpPr/>
-          <p:nvPr/>
-        </p:nvSpPr>
-        <p:spPr>
-          <a:xfrm>
-            <a:off x="731520" y="1965960"/>
-            <a:ext cx="2926080" cy="731520"/>
+          <p:cNvPr id="3" name="Text 1"/>
+          <p:cNvSpPr/>
+          <p:nvPr/>
+        </p:nvSpPr>
+        <p:spPr>
+          <a:xfrm>
+            <a:off x="548640" y="868680"/>
+            <a:ext cx="9144000" cy="365760"/>
           </a:xfrm>
           <a:prstGeom prst="rect">
             <a:avLst/>
@@ -4887,51 +4641,73 @@
           <a:bodyPr wrap="square" rtlCol="0" anchor="ctr"/>
           <a:lstStyle/>
           <a:p>
-            <a:pPr algn="ctr" indent="0" marL="0">
+            <a:pPr marL="0" indent="0">
               <a:buNone/>
             </a:pPr>
             <a:r>
-              <a:rPr lang="en-US" sz="1500" b="1" dirty="0">
-                <a:solidFill>
-                  <a:srgbClr val="FFFFFF"/>
+              <a:rPr lang="en-US" sz="1300" dirty="0">
+                <a:solidFill>
+                  <a:srgbClr val="64748B"/>
                 </a:solidFill>
                 <a:latin typeface="Calibri" pitchFamily="34" charset="0"/>
                 <a:ea typeface="Calibri" pitchFamily="34" charset="-122"/>
                 <a:cs typeface="Calibri" pitchFamily="34" charset="-120"/>
               </a:rPr>
-              <a:t>React SPA</a:t>
-            </a:r>
-            <a:endParaRPr lang="en-US" sz="1500" dirty="0"/>
-          </a:p>
-          <a:p>
-            <a:pPr algn="ctr" indent="0" marL="0">
+              <a:t>Entity-Relationship Diagram — PostgreSQL tables</a:t>
+            </a:r>
+            <a:endParaRPr lang="en-US" sz="1300" dirty="0"/>
+          </a:p>
+        </p:txBody>
+      </p:sp>
+      <p:sp>
+        <p:nvSpPr>
+          <p:cNvPr id="5" name="Text 2"/>
+          <p:cNvSpPr/>
+          <p:nvPr/>
+        </p:nvSpPr>
+        <p:spPr>
+          <a:xfrm>
+            <a:off x="457200" y="6473952"/>
+            <a:ext cx="7315200" cy="274320"/>
+          </a:xfrm>
+          <a:prstGeom prst="rect">
+            <a:avLst/>
+          </a:prstGeom>
+          <a:noFill/>
+          <a:ln/>
+        </p:spPr>
+        <p:txBody>
+          <a:bodyPr wrap="square" rtlCol="0" anchor="ctr"/>
+          <a:lstStyle/>
+          <a:p>
+            <a:pPr marL="0" indent="0">
               <a:buNone/>
             </a:pPr>
             <a:r>
-              <a:rPr lang="en-US" sz="1500" b="1" dirty="0">
-                <a:solidFill>
-                  <a:srgbClr val="FFFFFF"/>
+              <a:rPr lang="en-US" sz="900" dirty="0">
+                <a:solidFill>
+                  <a:srgbClr val="94A3B8"/>
                 </a:solidFill>
                 <a:latin typeface="Calibri" pitchFamily="34" charset="0"/>
                 <a:ea typeface="Calibri" pitchFamily="34" charset="-122"/>
                 <a:cs typeface="Calibri" pitchFamily="34" charset="-120"/>
               </a:rPr>
-              <a:t>(Vite + Tailwind)</a:t>
-            </a:r>
-            <a:endParaRPr lang="en-US" sz="1500" dirty="0"/>
-          </a:p>
-        </p:txBody>
-      </p:sp>
-      <p:sp>
-        <p:nvSpPr>
-          <p:cNvPr id="5" name="Text 3"/>
-          <p:cNvSpPr/>
-          <p:nvPr/>
-        </p:nvSpPr>
-        <p:spPr>
-          <a:xfrm>
-            <a:off x="731520" y="2697480"/>
-            <a:ext cx="2926080" cy="548640"/>
+              <a:t>Weekly Report Generator &amp; Team Dashboard</a:t>
+            </a:r>
+            <a:endParaRPr lang="en-US" sz="900" dirty="0"/>
+          </a:p>
+        </p:txBody>
+      </p:sp>
+      <p:sp>
+        <p:nvSpPr>
+          <p:cNvPr id="6" name="Text 3"/>
+          <p:cNvSpPr/>
+          <p:nvPr/>
+        </p:nvSpPr>
+        <p:spPr>
+          <a:xfrm>
+            <a:off x="11274552" y="6074706"/>
+            <a:ext cx="457200" cy="274320"/>
           </a:xfrm>
           <a:prstGeom prst="rect">
             <a:avLst/>
@@ -4943,551 +4719,48 @@
           <a:bodyPr wrap="square" rtlCol="0" anchor="ctr"/>
           <a:lstStyle/>
           <a:p>
-            <a:pPr algn="ctr" indent="0" marL="0">
+            <a:pPr marL="0" indent="0" algn="r">
               <a:buNone/>
             </a:pPr>
             <a:r>
-              <a:rPr lang="en-US" sz="1050" dirty="0">
-                <a:solidFill>
-                  <a:srgbClr val="E2E8F0"/>
+              <a:rPr lang="en-US" sz="900" dirty="0">
+                <a:solidFill>
+                  <a:srgbClr val="94A3B8"/>
                 </a:solidFill>
                 <a:latin typeface="Calibri" pitchFamily="34" charset="0"/>
                 <a:ea typeface="Calibri" pitchFamily="34" charset="-122"/>
                 <a:cs typeface="Calibri" pitchFamily="34" charset="-120"/>
               </a:rPr>
-              <a:t>Personal report page · Team dashboard</a:t>
-            </a:r>
-            <a:endParaRPr lang="en-US" sz="1050" dirty="0"/>
-          </a:p>
-        </p:txBody>
-      </p:sp>
-      <p:sp>
-        <p:nvSpPr>
-          <p:cNvPr id="6" name="Shape 4"/>
-          <p:cNvSpPr/>
-          <p:nvPr/>
-        </p:nvSpPr>
-        <p:spPr>
-          <a:xfrm>
-            <a:off x="4343400" y="1828800"/>
-            <a:ext cx="3291840" cy="1554480"/>
-          </a:xfrm>
-          <a:prstGeom prst="roundRect">
-            <a:avLst>
-              <a:gd name="adj" fmla="val 5882"/>
-            </a:avLst>
-          </a:prstGeom>
-          <a:solidFill>
-            <a:srgbClr val="111827"/>
-          </a:solidFill>
-          <a:ln/>
-        </p:spPr>
-      </p:sp>
-      <p:sp>
-        <p:nvSpPr>
-          <p:cNvPr id="7" name="Text 5"/>
-          <p:cNvSpPr/>
-          <p:nvPr/>
-        </p:nvSpPr>
-        <p:spPr>
-          <a:xfrm>
-            <a:off x="4526280" y="1965960"/>
-            <a:ext cx="2926080" cy="731520"/>
-          </a:xfrm>
-          <a:prstGeom prst="rect">
-            <a:avLst/>
-          </a:prstGeom>
-          <a:noFill/>
-          <a:ln/>
-        </p:spPr>
-        <p:txBody>
-          <a:bodyPr wrap="square" rtlCol="0" anchor="ctr"/>
-          <a:lstStyle/>
-          <a:p>
-            <a:pPr algn="ctr" indent="0" marL="0">
-              <a:buNone/>
-            </a:pPr>
-            <a:r>
-              <a:rPr lang="en-US" sz="1500" b="1" dirty="0">
-                <a:solidFill>
-                  <a:srgbClr val="FFFFFF"/>
-                </a:solidFill>
-                <a:latin typeface="Calibri" pitchFamily="34" charset="0"/>
-                <a:ea typeface="Calibri" pitchFamily="34" charset="-122"/>
-                <a:cs typeface="Calibri" pitchFamily="34" charset="-120"/>
-              </a:rPr>
-              <a:t>Express REST API</a:t>
-            </a:r>
-            <a:endParaRPr lang="en-US" sz="1500" dirty="0"/>
-          </a:p>
-        </p:txBody>
-      </p:sp>
-      <p:sp>
-        <p:nvSpPr>
-          <p:cNvPr id="8" name="Text 6"/>
-          <p:cNvSpPr/>
-          <p:nvPr/>
-        </p:nvSpPr>
-        <p:spPr>
-          <a:xfrm>
-            <a:off x="4526280" y="2697480"/>
-            <a:ext cx="2926080" cy="548640"/>
-          </a:xfrm>
-          <a:prstGeom prst="rect">
-            <a:avLst/>
-          </a:prstGeom>
-          <a:noFill/>
-          <a:ln/>
-        </p:spPr>
-        <p:txBody>
-          <a:bodyPr wrap="square" rtlCol="0" anchor="ctr"/>
-          <a:lstStyle/>
-          <a:p>
-            <a:pPr algn="ctr" indent="0" marL="0">
-              <a:buNone/>
-            </a:pPr>
-            <a:r>
-              <a:rPr lang="en-US" sz="1050" dirty="0">
-                <a:solidFill>
-                  <a:srgbClr val="E2E8F0"/>
-                </a:solidFill>
-                <a:latin typeface="Calibri" pitchFamily="34" charset="0"/>
-                <a:ea typeface="Calibri" pitchFamily="34" charset="-122"/>
-                <a:cs typeface="Calibri" pitchFamily="34" charset="-120"/>
-              </a:rPr>
-              <a:t>JWT auth · RBAC middleware · Controllers</a:t>
-            </a:r>
-            <a:endParaRPr lang="en-US" sz="1050" dirty="0"/>
-          </a:p>
-        </p:txBody>
-      </p:sp>
-      <p:sp>
-        <p:nvSpPr>
-          <p:cNvPr id="9" name="Shape 7"/>
-          <p:cNvSpPr/>
-          <p:nvPr/>
-        </p:nvSpPr>
-        <p:spPr>
-          <a:xfrm>
-            <a:off x="8138160" y="1828800"/>
-            <a:ext cx="3291840" cy="1554480"/>
-          </a:xfrm>
-          <a:prstGeom prst="roundRect">
-            <a:avLst>
-              <a:gd name="adj" fmla="val 5882"/>
-            </a:avLst>
-          </a:prstGeom>
-          <a:solidFill>
-            <a:srgbClr val="10B981"/>
-          </a:solidFill>
-          <a:ln/>
-        </p:spPr>
-      </p:sp>
-      <p:sp>
-        <p:nvSpPr>
-          <p:cNvPr id="10" name="Text 8"/>
-          <p:cNvSpPr/>
-          <p:nvPr/>
-        </p:nvSpPr>
-        <p:spPr>
-          <a:xfrm>
-            <a:off x="8321040" y="1965960"/>
-            <a:ext cx="2926080" cy="731520"/>
-          </a:xfrm>
-          <a:prstGeom prst="rect">
-            <a:avLst/>
-          </a:prstGeom>
-          <a:noFill/>
-          <a:ln/>
-        </p:spPr>
-        <p:txBody>
-          <a:bodyPr wrap="square" rtlCol="0" anchor="ctr"/>
-          <a:lstStyle/>
-          <a:p>
-            <a:pPr algn="ctr" indent="0" marL="0">
-              <a:buNone/>
-            </a:pPr>
-            <a:r>
-              <a:rPr lang="en-US" sz="1500" b="1" dirty="0">
-                <a:solidFill>
-                  <a:srgbClr val="FFFFFF"/>
-                </a:solidFill>
-                <a:latin typeface="Calibri" pitchFamily="34" charset="0"/>
-                <a:ea typeface="Calibri" pitchFamily="34" charset="-122"/>
-                <a:cs typeface="Calibri" pitchFamily="34" charset="-120"/>
-              </a:rPr>
-              <a:t>PostgreSQL</a:t>
-            </a:r>
-            <a:endParaRPr lang="en-US" sz="1500" dirty="0"/>
-          </a:p>
-          <a:p>
-            <a:pPr algn="ctr" indent="0" marL="0">
-              <a:buNone/>
-            </a:pPr>
-            <a:r>
-              <a:rPr lang="en-US" sz="1500" b="1" dirty="0">
-                <a:solidFill>
-                  <a:srgbClr val="FFFFFF"/>
-                </a:solidFill>
-                <a:latin typeface="Calibri" pitchFamily="34" charset="0"/>
-                <a:ea typeface="Calibri" pitchFamily="34" charset="-122"/>
-                <a:cs typeface="Calibri" pitchFamily="34" charset="-120"/>
-              </a:rPr>
-              <a:t>(Sequelize)</a:t>
-            </a:r>
-            <a:endParaRPr lang="en-US" sz="1500" dirty="0"/>
-          </a:p>
-        </p:txBody>
-      </p:sp>
-      <p:sp>
-        <p:nvSpPr>
-          <p:cNvPr id="11" name="Text 9"/>
-          <p:cNvSpPr/>
-          <p:nvPr/>
-        </p:nvSpPr>
-        <p:spPr>
-          <a:xfrm>
-            <a:off x="8321040" y="2697480"/>
-            <a:ext cx="2926080" cy="548640"/>
-          </a:xfrm>
-          <a:prstGeom prst="rect">
-            <a:avLst/>
-          </a:prstGeom>
-          <a:noFill/>
-          <a:ln/>
-        </p:spPr>
-        <p:txBody>
-          <a:bodyPr wrap="square" rtlCol="0" anchor="ctr"/>
-          <a:lstStyle/>
-          <a:p>
-            <a:pPr algn="ctr" indent="0" marL="0">
-              <a:buNone/>
-            </a:pPr>
-            <a:r>
-              <a:rPr lang="en-US" sz="1050" dirty="0">
-                <a:solidFill>
-                  <a:srgbClr val="E2E8F0"/>
-                </a:solidFill>
-                <a:latin typeface="Calibri" pitchFamily="34" charset="0"/>
-                <a:ea typeface="Calibri" pitchFamily="34" charset="-122"/>
-                <a:cs typeface="Calibri" pitchFamily="34" charset="-120"/>
-              </a:rPr>
-              <a:t>users · projects · reports</a:t>
-            </a:r>
-            <a:endParaRPr lang="en-US" sz="1050" dirty="0"/>
-          </a:p>
-        </p:txBody>
-      </p:sp>
-      <p:sp>
-        <p:nvSpPr>
-          <p:cNvPr id="12" name="Shape 10"/>
-          <p:cNvSpPr/>
-          <p:nvPr/>
-        </p:nvSpPr>
-        <p:spPr>
-          <a:xfrm>
-            <a:off x="3840480" y="2606040"/>
-            <a:ext cx="502920" cy="0"/>
-          </a:xfrm>
-          <a:prstGeom prst="line">
-            <a:avLst/>
-          </a:prstGeom>
-          <a:noFill/>
-          <a:ln w="25400">
-            <a:solidFill>
-              <a:srgbClr val="64748B"/>
-            </a:solidFill>
-            <a:prstDash val="solid"/>
-            <a:tailEnd type="triangle"/>
-          </a:ln>
-        </p:spPr>
-      </p:sp>
-      <p:sp>
-        <p:nvSpPr>
-          <p:cNvPr id="13" name="Text 11"/>
-          <p:cNvSpPr/>
-          <p:nvPr/>
-        </p:nvSpPr>
-        <p:spPr>
-          <a:xfrm>
-            <a:off x="3520440" y="2788920"/>
-            <a:ext cx="1188720" cy="548640"/>
-          </a:xfrm>
-          <a:prstGeom prst="rect">
-            <a:avLst/>
-          </a:prstGeom>
-          <a:noFill/>
-          <a:ln/>
-        </p:spPr>
-        <p:txBody>
-          <a:bodyPr wrap="square" rtlCol="0" anchor="ctr"/>
-          <a:lstStyle/>
-          <a:p>
-            <a:pPr algn="ctr" indent="0" marL="0">
-              <a:buNone/>
-            </a:pPr>
-            <a:r>
-              <a:rPr lang="en-US" sz="850" dirty="0">
-                <a:solidFill>
-                  <a:srgbClr val="64748B"/>
-                </a:solidFill>
-                <a:latin typeface="Calibri" pitchFamily="34" charset="0"/>
-                <a:ea typeface="Calibri" pitchFamily="34" charset="-122"/>
-                <a:cs typeface="Calibri" pitchFamily="34" charset="-120"/>
-              </a:rPr>
-              <a:t>REST / JSON (JWT bearer)</a:t>
-            </a:r>
-            <a:endParaRPr lang="en-US" sz="850" dirty="0"/>
-          </a:p>
-        </p:txBody>
-      </p:sp>
-      <p:sp>
-        <p:nvSpPr>
-          <p:cNvPr id="14" name="Shape 12"/>
-          <p:cNvSpPr/>
-          <p:nvPr/>
-        </p:nvSpPr>
-        <p:spPr>
-          <a:xfrm>
-            <a:off x="7635240" y="2606040"/>
-            <a:ext cx="502920" cy="0"/>
-          </a:xfrm>
-          <a:prstGeom prst="line">
-            <a:avLst/>
-          </a:prstGeom>
-          <a:noFill/>
-          <a:ln w="25400">
-            <a:solidFill>
-              <a:srgbClr val="64748B"/>
-            </a:solidFill>
-            <a:prstDash val="solid"/>
-            <a:tailEnd type="triangle"/>
-          </a:ln>
-        </p:spPr>
-      </p:sp>
-      <p:sp>
-        <p:nvSpPr>
-          <p:cNvPr id="15" name="Text 13"/>
-          <p:cNvSpPr/>
-          <p:nvPr/>
-        </p:nvSpPr>
-        <p:spPr>
-          <a:xfrm>
-            <a:off x="7360920" y="2788920"/>
-            <a:ext cx="1188720" cy="548640"/>
-          </a:xfrm>
-          <a:prstGeom prst="rect">
-            <a:avLst/>
-          </a:prstGeom>
-          <a:noFill/>
-          <a:ln/>
-        </p:spPr>
-        <p:txBody>
-          <a:bodyPr wrap="square" rtlCol="0" anchor="ctr"/>
-          <a:lstStyle/>
-          <a:p>
-            <a:pPr algn="ctr" indent="0" marL="0">
-              <a:buNone/>
-            </a:pPr>
-            <a:r>
-              <a:rPr lang="en-US" sz="850" dirty="0">
-                <a:solidFill>
-                  <a:srgbClr val="64748B"/>
-                </a:solidFill>
-                <a:latin typeface="Calibri" pitchFamily="34" charset="0"/>
-                <a:ea typeface="Calibri" pitchFamily="34" charset="-122"/>
-                <a:cs typeface="Calibri" pitchFamily="34" charset="-120"/>
-              </a:rPr>
-              <a:t>Sequelize ORM</a:t>
-            </a:r>
-            <a:endParaRPr lang="en-US" sz="850" dirty="0"/>
-          </a:p>
-        </p:txBody>
-      </p:sp>
-      <p:sp>
-        <p:nvSpPr>
-          <p:cNvPr id="16" name="Text 14"/>
-          <p:cNvSpPr/>
-          <p:nvPr/>
-        </p:nvSpPr>
-        <p:spPr>
-          <a:xfrm>
-            <a:off x="548640" y="3749040"/>
-            <a:ext cx="11064240" cy="2103120"/>
-          </a:xfrm>
-          <a:prstGeom prst="rect">
-            <a:avLst/>
-          </a:prstGeom>
-          <a:noFill/>
-          <a:ln/>
-        </p:spPr>
-        <p:txBody>
-          <a:bodyPr wrap="square" rtlCol="0" anchor="ctr"/>
-          <a:lstStyle/>
-          <a:p>
-            <a:pPr marL="342900" indent="-342900">
-              <a:spcAft>
-                <a:spcPts val="800"/>
-              </a:spcAft>
-              <a:buSzPct val="100000"/>
-              <a:buChar char="•"/>
-            </a:pPr>
-            <a:r>
-              <a:rPr lang="en-US" sz="1250" dirty="0">
-                <a:solidFill>
-                  <a:srgbClr val="111827"/>
-                </a:solidFill>
-                <a:latin typeface="Calibri" pitchFamily="34" charset="0"/>
-                <a:ea typeface="Calibri" pitchFamily="34" charset="-122"/>
-                <a:cs typeface="Calibri" pitchFamily="34" charset="-120"/>
-              </a:rPr>
-              <a:t>1. User authenticates → server issues a signed JWT containing user id + role.</a:t>
-            </a:r>
-            <a:endParaRPr lang="en-US" sz="1250" dirty="0"/>
-          </a:p>
-          <a:p>
-            <a:pPr marL="342900" indent="-342900">
-              <a:spcAft>
-                <a:spcPts val="800"/>
-              </a:spcAft>
-              <a:buSzPct val="100000"/>
-              <a:buChar char="•"/>
-            </a:pPr>
-            <a:r>
-              <a:rPr lang="en-US" sz="1250" dirty="0">
-                <a:solidFill>
-                  <a:srgbClr val="111827"/>
-                </a:solidFill>
-                <a:latin typeface="Calibri" pitchFamily="34" charset="0"/>
-                <a:ea typeface="Calibri" pitchFamily="34" charset="-122"/>
-                <a:cs typeface="Calibri" pitchFamily="34" charset="-120"/>
-              </a:rPr>
-              <a:t>2. Every request carries the JWT; "protect" middleware verifies it, "requireRole" gates manager-only routes.</a:t>
-            </a:r>
-            <a:endParaRPr lang="en-US" sz="1250" dirty="0"/>
-          </a:p>
-          <a:p>
-            <a:pPr marL="342900" indent="-342900">
-              <a:spcAft>
-                <a:spcPts val="800"/>
-              </a:spcAft>
-              <a:buSzPct val="100000"/>
-              <a:buChar char="•"/>
-            </a:pPr>
-            <a:r>
-              <a:rPr lang="en-US" sz="1250" dirty="0">
-                <a:solidFill>
-                  <a:srgbClr val="111827"/>
-                </a:solidFill>
-                <a:latin typeface="Calibri" pitchFamily="34" charset="0"/>
-                <a:ea typeface="Calibri" pitchFamily="34" charset="-122"/>
-                <a:cs typeface="Calibri" pitchFamily="34" charset="-120"/>
-              </a:rPr>
-              <a:t>3. Members' report queries are always scoped to req.user.id at the controller level — never trusted from the client.</a:t>
-            </a:r>
-            <a:endParaRPr lang="en-US" sz="1250" dirty="0"/>
-          </a:p>
-          <a:p>
-            <a:pPr marL="342900" indent="-342900">
-              <a:spcAft>
-                <a:spcPts val="800"/>
-              </a:spcAft>
-              <a:buSzPct val="100000"/>
-              <a:buChar char="•"/>
-            </a:pPr>
-            <a:r>
-              <a:rPr lang="en-US" sz="1250" dirty="0">
-                <a:solidFill>
-                  <a:srgbClr val="111827"/>
-                </a:solidFill>
-                <a:latin typeface="Calibri" pitchFamily="34" charset="0"/>
-                <a:ea typeface="Calibri" pitchFamily="34" charset="-122"/>
-                <a:cs typeface="Calibri" pitchFamily="34" charset="-120"/>
-              </a:rPr>
-              <a:t>4. Dashboard endpoints run SQL GROUP BY / SUM / COUNT queries directly over the reports table for real-time metrics.</a:t>
-            </a:r>
-            <a:endParaRPr lang="en-US" sz="1250" dirty="0"/>
-          </a:p>
-        </p:txBody>
-      </p:sp>
-      <p:sp>
-        <p:nvSpPr>
-          <p:cNvPr id="17" name="Text 15"/>
-          <p:cNvSpPr/>
-          <p:nvPr/>
-        </p:nvSpPr>
-        <p:spPr>
-          <a:xfrm>
-            <a:off x="457200" y="6473952"/>
-            <a:ext cx="7315200" cy="274320"/>
-          </a:xfrm>
-          <a:prstGeom prst="rect">
-            <a:avLst/>
-          </a:prstGeom>
-          <a:noFill/>
-          <a:ln/>
-        </p:spPr>
-        <p:txBody>
-          <a:bodyPr wrap="square" rtlCol="0" anchor="ctr"/>
-          <a:lstStyle/>
-          <a:p>
-            <a:pPr indent="0" marL="0">
-              <a:buNone/>
-            </a:pPr>
-            <a:r>
-              <a:rPr lang="en-US" sz="900" dirty="0">
-                <a:solidFill>
-                  <a:srgbClr val="94A3B8"/>
-                </a:solidFill>
-                <a:latin typeface="Calibri" pitchFamily="34" charset="0"/>
-                <a:ea typeface="Calibri" pitchFamily="34" charset="-122"/>
-                <a:cs typeface="Calibri" pitchFamily="34" charset="-120"/>
-              </a:rPr>
-              <a:t>Weekly Report Generator &amp; Team Dashboard</a:t>
+              <a:t>4</a:t>
             </a:r>
             <a:endParaRPr lang="en-US" sz="900" dirty="0"/>
           </a:p>
         </p:txBody>
       </p:sp>
-      <p:sp>
-        <p:nvSpPr>
-          <p:cNvPr id="18" name="Text 16"/>
-          <p:cNvSpPr/>
-          <p:nvPr/>
-        </p:nvSpPr>
-        <p:spPr>
-          <a:xfrm>
-            <a:off x="11274552" y="6473952"/>
-            <a:ext cx="457200" cy="274320"/>
-          </a:xfrm>
-          <a:prstGeom prst="rect">
-            <a:avLst/>
-          </a:prstGeom>
-          <a:noFill/>
-          <a:ln/>
-        </p:spPr>
-        <p:txBody>
-          <a:bodyPr wrap="square" rtlCol="0" anchor="ctr"/>
-          <a:lstStyle/>
-          <a:p>
-            <a:pPr algn="r" indent="0" marL="0">
-              <a:buNone/>
-            </a:pPr>
-            <a:r>
-              <a:rPr lang="en-US" sz="900" dirty="0">
-                <a:solidFill>
-                  <a:srgbClr val="94A3B8"/>
-                </a:solidFill>
-                <a:latin typeface="Calibri" pitchFamily="34" charset="0"/>
-                <a:ea typeface="Calibri" pitchFamily="34" charset="-122"/>
-                <a:cs typeface="Calibri" pitchFamily="34" charset="-120"/>
-              </a:rPr>
-              <a:t>3</a:t>
-            </a:r>
-            <a:endParaRPr lang="en-US" sz="900" dirty="0"/>
-          </a:p>
-        </p:txBody>
-      </p:sp>
+      <p:pic>
+        <p:nvPicPr>
+          <p:cNvPr id="8" name="Picture 7"/>
+          <p:cNvPicPr>
+            <a:picLocks noChangeAspect="1"/>
+          </p:cNvPicPr>
+          <p:nvPr/>
+        </p:nvPicPr>
+        <p:blipFill>
+          <a:blip r:embed="rId3"/>
+          <a:stretch>
+            <a:fillRect/>
+          </a:stretch>
+        </p:blipFill>
+        <p:spPr>
+          <a:xfrm>
+            <a:off x="1336787" y="1209933"/>
+            <a:ext cx="9442830" cy="4898259"/>
+          </a:xfrm>
+          <a:prstGeom prst="rect">
+            <a:avLst/>
+          </a:prstGeom>
+        </p:spPr>
+      </p:pic>
     </p:spTree>
   </p:cSld>
   <p:clrMapOvr>
@@ -5496,14 +4769,15 @@
 </p:sld>
 </file>
 
-<file path=ppt/slides/slide4.xml><?xml version="1.0" encoding="utf-8"?>
+<file path=ppt/slides/slide5.xml><?xml version="1.0" encoding="utf-8"?>
 <p:sld xmlns:a="http://schemas.openxmlformats.org/drawingml/2006/main" xmlns:r="http://schemas.openxmlformats.org/officeDocument/2006/relationships" xmlns:p="http://schemas.openxmlformats.org/presentationml/2006/main">
-  <p:cSld name="Slide 4">
+  <p:cSld name="Slide 5">
     <p:bg>
       <p:bgPr>
         <a:solidFill>
-          <a:srgbClr val="FFFFFF"/>
+          <a:srgbClr val="F8FAFC"/>
         </a:solidFill>
+        <a:effectLst/>
       </p:bgPr>
     </p:bg>
     <p:spTree>
@@ -5528,8 +4802,8 @@
         </p:nvSpPr>
         <p:spPr>
           <a:xfrm>
-            <a:off x="548640" y="365760"/>
-            <a:ext cx="7315200" cy="502920"/>
+            <a:off x="548640" y="411480"/>
+            <a:ext cx="7315200" cy="548640"/>
           </a:xfrm>
           <a:prstGeom prst="rect">
             <a:avLst/>
@@ -5541,7 +4815,7 @@
           <a:bodyPr wrap="square" rtlCol="0" anchor="ctr"/>
           <a:lstStyle/>
           <a:p>
-            <a:pPr indent="0" marL="0">
+            <a:pPr marL="0" indent="0">
               <a:buNone/>
             </a:pPr>
             <a:r>
@@ -5553,7 +4827,7 @@
                 <a:ea typeface="Cambria" pitchFamily="34" charset="-122"/>
                 <a:cs typeface="Cambria" pitchFamily="34" charset="-120"/>
               </a:rPr>
-              <a:t>Database Design</a:t>
+              <a:t>Frontend Structure</a:t>
             </a:r>
             <a:endParaRPr lang="en-US" sz="2800" dirty="0"/>
           </a:p>
@@ -5567,8 +4841,8 @@
         </p:nvSpPr>
         <p:spPr>
           <a:xfrm>
-            <a:off x="548640" y="868680"/>
-            <a:ext cx="9144000" cy="365760"/>
+            <a:off x="548640" y="960120"/>
+            <a:ext cx="10515600" cy="365760"/>
           </a:xfrm>
           <a:prstGeom prst="rect">
             <a:avLst/>
@@ -5580,7 +4854,7 @@
           <a:bodyPr wrap="square" rtlCol="0" anchor="ctr"/>
           <a:lstStyle/>
           <a:p>
-            <a:pPr indent="0" marL="0">
+            <a:pPr marL="0" indent="0">
               <a:buNone/>
             </a:pPr>
             <a:r>
@@ -5592,30 +4866,81 @@
                 <a:ea typeface="Calibri" pitchFamily="34" charset="-122"/>
                 <a:cs typeface="Calibri" pitchFamily="34" charset="-120"/>
               </a:rPr>
-              <a:t>Entity-Relationship Diagram — PostgreSQL tables</a:t>
+              <a:t>Clear separation between the personal report page and the team dashboard</a:t>
             </a:r>
             <a:endParaRPr lang="en-US" sz="1300" dirty="0"/>
           </a:p>
         </p:txBody>
+      </p:sp>
+      <p:sp>
+        <p:nvSpPr>
+          <p:cNvPr id="4" name="Shape 2"/>
+          <p:cNvSpPr/>
+          <p:nvPr/>
+        </p:nvSpPr>
+        <p:spPr>
+          <a:xfrm>
+            <a:off x="548640" y="1600200"/>
+            <a:ext cx="5394960" cy="2752859"/>
+          </a:xfrm>
+          <a:prstGeom prst="roundRect">
+            <a:avLst>
+              <a:gd name="adj" fmla="val 1739"/>
+            </a:avLst>
+          </a:prstGeom>
+          <a:solidFill>
+            <a:srgbClr val="FFFFFF"/>
+          </a:solidFill>
+          <a:ln/>
+          <a:effectLst>
+            <a:outerShdw blurRad="101600" dist="38100" dir="5400000" algn="bl" rotWithShape="0">
+              <a:srgbClr val="1E293B">
+                <a:alpha val="8000"/>
+              </a:srgbClr>
+            </a:outerShdw>
+          </a:effectLst>
+        </p:spPr>
+      </p:sp>
+      <p:sp>
+        <p:nvSpPr>
+          <p:cNvPr id="5" name="Shape 3"/>
+          <p:cNvSpPr/>
+          <p:nvPr/>
+        </p:nvSpPr>
+        <p:spPr>
+          <a:xfrm>
+            <a:off x="822960" y="1874520"/>
+            <a:ext cx="640080" cy="640080"/>
+          </a:xfrm>
+          <a:prstGeom prst="roundRect">
+            <a:avLst>
+              <a:gd name="adj" fmla="val 20000"/>
+            </a:avLst>
+          </a:prstGeom>
+          <a:solidFill>
+            <a:srgbClr val="3763F2"/>
+          </a:solidFill>
+          <a:ln/>
+        </p:spPr>
       </p:sp>
       <p:pic>
         <p:nvPicPr>
-          <p:cNvPr id="4" name="Image 0" descr="/home/claude/project/ER_DIAGRAM.png">    </p:cNvPr>
+          <p:cNvPr id="6" name="Image 0" descr="preencoded.png"/>
           <p:cNvPicPr>
             <a:picLocks noChangeAspect="1"/>
           </p:cNvPicPr>
           <p:nvPr/>
         </p:nvPicPr>
         <p:blipFill>
-          <a:blip r:embed="rId1"/>
+          <a:blip r:embed="rId3"/>
           <a:stretch>
             <a:fillRect/>
           </a:stretch>
         </p:blipFill>
         <p:spPr>
           <a:xfrm>
-            <a:off x="2221511" y="1371600"/>
-            <a:ext cx="7745931" cy="5074920"/>
+            <a:off x="960120" y="2011680"/>
+            <a:ext cx="365760" cy="365760"/>
           </a:xfrm>
           <a:prstGeom prst="rect">
             <a:avLst/>
@@ -5624,14 +4949,14 @@
       </p:pic>
       <p:sp>
         <p:nvSpPr>
-          <p:cNvPr id="5" name="Text 2"/>
-          <p:cNvSpPr/>
-          <p:nvPr/>
-        </p:nvSpPr>
-        <p:spPr>
-          <a:xfrm>
-            <a:off x="457200" y="6473952"/>
-            <a:ext cx="7315200" cy="274320"/>
+          <p:cNvPr id="7" name="Text 4"/>
+          <p:cNvSpPr/>
+          <p:nvPr/>
+        </p:nvSpPr>
+        <p:spPr>
+          <a:xfrm>
+            <a:off x="1645920" y="1874520"/>
+            <a:ext cx="3931920" cy="640080"/>
           </a:xfrm>
           <a:prstGeom prst="rect">
             <a:avLst/>
@@ -5643,34 +4968,34 @@
           <a:bodyPr wrap="square" rtlCol="0" anchor="ctr"/>
           <a:lstStyle/>
           <a:p>
-            <a:pPr indent="0" marL="0">
+            <a:pPr marL="0" indent="0">
               <a:buNone/>
             </a:pPr>
             <a:r>
-              <a:rPr lang="en-US" sz="900" dirty="0">
-                <a:solidFill>
-                  <a:srgbClr val="94A3B8"/>
+              <a:rPr lang="en-US" sz="1600" b="1" dirty="0">
+                <a:solidFill>
+                  <a:srgbClr val="111827"/>
                 </a:solidFill>
                 <a:latin typeface="Calibri" pitchFamily="34" charset="0"/>
                 <a:ea typeface="Calibri" pitchFamily="34" charset="-122"/>
                 <a:cs typeface="Calibri" pitchFamily="34" charset="-120"/>
               </a:rPr>
-              <a:t>Weekly Report Generator &amp; Team Dashboard</a:t>
-            </a:r>
-            <a:endParaRPr lang="en-US" sz="900" dirty="0"/>
-          </a:p>
-        </p:txBody>
-      </p:sp>
-      <p:sp>
-        <p:nvSpPr>
-          <p:cNvPr id="6" name="Text 3"/>
-          <p:cNvSpPr/>
-          <p:nvPr/>
-        </p:nvSpPr>
-        <p:spPr>
-          <a:xfrm>
-            <a:off x="11274552" y="6473952"/>
-            <a:ext cx="457200" cy="274320"/>
+              <a:t>My Reports (Team Member)</a:t>
+            </a:r>
+            <a:endParaRPr lang="en-US" sz="1600" dirty="0"/>
+          </a:p>
+        </p:txBody>
+      </p:sp>
+      <p:sp>
+        <p:nvSpPr>
+          <p:cNvPr id="8" name="Text 5"/>
+          <p:cNvSpPr/>
+          <p:nvPr/>
+        </p:nvSpPr>
+        <p:spPr>
+          <a:xfrm>
+            <a:off x="822960" y="2743200"/>
+            <a:ext cx="4846320" cy="1737360"/>
           </a:xfrm>
           <a:prstGeom prst="rect">
             <a:avLst/>
@@ -5682,24 +5007,332 @@
           <a:bodyPr wrap="square" rtlCol="0" anchor="ctr"/>
           <a:lstStyle/>
           <a:p>
-            <a:pPr algn="r" indent="0" marL="0">
-              <a:buNone/>
-            </a:pPr>
-            <a:r>
-              <a:rPr lang="en-US" sz="900" dirty="0">
-                <a:solidFill>
-                  <a:srgbClr val="94A3B8"/>
+            <a:pPr marL="342900" indent="-342900">
+              <a:spcAft>
+                <a:spcPts val="1000"/>
+              </a:spcAft>
+              <a:buSzPct val="100000"/>
+              <a:buChar char="•"/>
+            </a:pPr>
+            <a:r>
+              <a:rPr lang="en-US" sz="1250" dirty="0">
+                <a:solidFill>
+                  <a:srgbClr val="64748B"/>
                 </a:solidFill>
                 <a:latin typeface="Calibri" pitchFamily="34" charset="0"/>
                 <a:ea typeface="Calibri" pitchFamily="34" charset="-122"/>
                 <a:cs typeface="Calibri" pitchFamily="34" charset="-120"/>
               </a:rPr>
-              <a:t>4</a:t>
+              <a:t>ReportForm — fixed, shared schema</a:t>
+            </a:r>
+            <a:endParaRPr lang="en-US" sz="1250" dirty="0"/>
+          </a:p>
+          <a:p>
+            <a:pPr marL="342900" indent="-342900">
+              <a:spcAft>
+                <a:spcPts val="1000"/>
+              </a:spcAft>
+              <a:buSzPct val="100000"/>
+              <a:buChar char="•"/>
+            </a:pPr>
+            <a:r>
+              <a:rPr lang="en-US" sz="1250" dirty="0">
+                <a:solidFill>
+                  <a:srgbClr val="64748B"/>
+                </a:solidFill>
+                <a:latin typeface="Calibri" pitchFamily="34" charset="0"/>
+                <a:ea typeface="Calibri" pitchFamily="34" charset="-122"/>
+                <a:cs typeface="Calibri" pitchFamily="34" charset="-120"/>
+              </a:rPr>
+              <a:t>ReportCard — history grouped by week</a:t>
+            </a:r>
+            <a:endParaRPr lang="en-US" sz="1250" dirty="0"/>
+          </a:p>
+          <a:p>
+            <a:pPr marL="342900" indent="-342900">
+              <a:spcAft>
+                <a:spcPts val="1000"/>
+              </a:spcAft>
+              <a:buSzPct val="100000"/>
+              <a:buChar char="•"/>
+            </a:pPr>
+            <a:r>
+              <a:rPr lang="en-US" sz="1250" dirty="0">
+                <a:solidFill>
+                  <a:srgbClr val="64748B"/>
+                </a:solidFill>
+                <a:latin typeface="Calibri" pitchFamily="34" charset="0"/>
+                <a:ea typeface="Calibri" pitchFamily="34" charset="-122"/>
+                <a:cs typeface="Calibri" pitchFamily="34" charset="-120"/>
+              </a:rPr>
+              <a:t>Create / edit / submit / save draft</a:t>
+            </a:r>
+            <a:endParaRPr lang="en-US" sz="1250" dirty="0"/>
+          </a:p>
+        </p:txBody>
+      </p:sp>
+      <p:sp>
+        <p:nvSpPr>
+          <p:cNvPr id="10" name="Shape 7"/>
+          <p:cNvSpPr/>
+          <p:nvPr/>
+        </p:nvSpPr>
+        <p:spPr>
+          <a:xfrm>
+            <a:off x="6263640" y="1600200"/>
+            <a:ext cx="5394960" cy="2752859"/>
+          </a:xfrm>
+          <a:prstGeom prst="roundRect">
+            <a:avLst>
+              <a:gd name="adj" fmla="val 1739"/>
+            </a:avLst>
+          </a:prstGeom>
+          <a:solidFill>
+            <a:srgbClr val="FFFFFF"/>
+          </a:solidFill>
+          <a:ln/>
+          <a:effectLst>
+            <a:outerShdw blurRad="101600" dist="38100" dir="5400000" algn="bl" rotWithShape="0">
+              <a:srgbClr val="1E293B">
+                <a:alpha val="8000"/>
+              </a:srgbClr>
+            </a:outerShdw>
+          </a:effectLst>
+        </p:spPr>
+      </p:sp>
+      <p:sp>
+        <p:nvSpPr>
+          <p:cNvPr id="11" name="Shape 8"/>
+          <p:cNvSpPr/>
+          <p:nvPr/>
+        </p:nvSpPr>
+        <p:spPr>
+          <a:xfrm>
+            <a:off x="6537960" y="1874520"/>
+            <a:ext cx="640080" cy="640080"/>
+          </a:xfrm>
+          <a:prstGeom prst="roundRect">
+            <a:avLst>
+              <a:gd name="adj" fmla="val 20000"/>
+            </a:avLst>
+          </a:prstGeom>
+          <a:solidFill>
+            <a:srgbClr val="10B981"/>
+          </a:solidFill>
+          <a:ln/>
+        </p:spPr>
+      </p:sp>
+      <p:pic>
+        <p:nvPicPr>
+          <p:cNvPr id="12" name="Image 1" descr="preencoded.png"/>
+          <p:cNvPicPr>
+            <a:picLocks noChangeAspect="1"/>
+          </p:cNvPicPr>
+          <p:nvPr/>
+        </p:nvPicPr>
+        <p:blipFill>
+          <a:blip r:embed="rId4"/>
+          <a:stretch>
+            <a:fillRect/>
+          </a:stretch>
+        </p:blipFill>
+        <p:spPr>
+          <a:xfrm>
+            <a:off x="6675120" y="2011680"/>
+            <a:ext cx="365760" cy="365760"/>
+          </a:xfrm>
+          <a:prstGeom prst="rect">
+            <a:avLst/>
+          </a:prstGeom>
+        </p:spPr>
+      </p:pic>
+      <p:sp>
+        <p:nvSpPr>
+          <p:cNvPr id="13" name="Text 9"/>
+          <p:cNvSpPr/>
+          <p:nvPr/>
+        </p:nvSpPr>
+        <p:spPr>
+          <a:xfrm>
+            <a:off x="7360920" y="1874520"/>
+            <a:ext cx="3931920" cy="640080"/>
+          </a:xfrm>
+          <a:prstGeom prst="rect">
+            <a:avLst/>
+          </a:prstGeom>
+          <a:noFill/>
+          <a:ln/>
+        </p:spPr>
+        <p:txBody>
+          <a:bodyPr wrap="square" rtlCol="0" anchor="ctr"/>
+          <a:lstStyle/>
+          <a:p>
+            <a:pPr marL="0" indent="0">
+              <a:buNone/>
+            </a:pPr>
+            <a:r>
+              <a:rPr lang="en-US" sz="1600" b="1" dirty="0">
+                <a:solidFill>
+                  <a:srgbClr val="111827"/>
+                </a:solidFill>
+                <a:latin typeface="Calibri" pitchFamily="34" charset="0"/>
+                <a:ea typeface="Calibri" pitchFamily="34" charset="-122"/>
+                <a:cs typeface="Calibri" pitchFamily="34" charset="-120"/>
+              </a:rPr>
+              <a:t>Team Dashboard (Manager)</a:t>
+            </a:r>
+            <a:endParaRPr lang="en-US" sz="1600" dirty="0"/>
+          </a:p>
+        </p:txBody>
+      </p:sp>
+      <p:sp>
+        <p:nvSpPr>
+          <p:cNvPr id="14" name="Text 10"/>
+          <p:cNvSpPr/>
+          <p:nvPr/>
+        </p:nvSpPr>
+        <p:spPr>
+          <a:xfrm>
+            <a:off x="6537960" y="2743200"/>
+            <a:ext cx="4846320" cy="1737360"/>
+          </a:xfrm>
+          <a:prstGeom prst="rect">
+            <a:avLst/>
+          </a:prstGeom>
+          <a:noFill/>
+          <a:ln/>
+        </p:spPr>
+        <p:txBody>
+          <a:bodyPr wrap="square" rtlCol="0" anchor="ctr"/>
+          <a:lstStyle/>
+          <a:p>
+            <a:pPr marL="342900" indent="-342900">
+              <a:spcAft>
+                <a:spcPts val="1000"/>
+              </a:spcAft>
+              <a:buSzPct val="100000"/>
+              <a:buChar char="•"/>
+            </a:pPr>
+            <a:r>
+              <a:rPr lang="en-US" sz="1250" dirty="0">
+                <a:solidFill>
+                  <a:srgbClr val="64748B"/>
+                </a:solidFill>
+                <a:latin typeface="Calibri" pitchFamily="34" charset="0"/>
+                <a:ea typeface="Calibri" pitchFamily="34" charset="-122"/>
+                <a:cs typeface="Calibri" pitchFamily="34" charset="-120"/>
+              </a:rPr>
+              <a:t>SummaryCard — compliance, blockers, headcount</a:t>
+            </a:r>
+            <a:endParaRPr lang="en-US" sz="1250" dirty="0"/>
+          </a:p>
+          <a:p>
+            <a:pPr marL="342900" indent="-342900">
+              <a:spcAft>
+                <a:spcPts val="1000"/>
+              </a:spcAft>
+              <a:buSzPct val="100000"/>
+              <a:buChar char="•"/>
+            </a:pPr>
+            <a:r>
+              <a:rPr lang="en-US" sz="1250" dirty="0">
+                <a:solidFill>
+                  <a:srgbClr val="64748B"/>
+                </a:solidFill>
+                <a:latin typeface="Calibri" pitchFamily="34" charset="0"/>
+                <a:ea typeface="Calibri" pitchFamily="34" charset="-122"/>
+                <a:cs typeface="Calibri" pitchFamily="34" charset="-120"/>
+              </a:rPr>
+              <a:t>TasksTrendChart / SubmissionStatusChart / WorkloadChart</a:t>
+            </a:r>
+            <a:endParaRPr lang="en-US" sz="1250" dirty="0"/>
+          </a:p>
+          <a:p>
+            <a:pPr marL="342900" indent="-342900">
+              <a:spcAft>
+                <a:spcPts val="1000"/>
+              </a:spcAft>
+              <a:buSzPct val="100000"/>
+              <a:buChar char="•"/>
+            </a:pPr>
+            <a:r>
+              <a:rPr lang="en-US" sz="1250" dirty="0">
+                <a:solidFill>
+                  <a:srgbClr val="64748B"/>
+                </a:solidFill>
+                <a:latin typeface="Calibri" pitchFamily="34" charset="0"/>
+                <a:ea typeface="Calibri" pitchFamily="34" charset="-122"/>
+                <a:cs typeface="Calibri" pitchFamily="34" charset="-120"/>
+              </a:rPr>
+              <a:t>Filterable report table (member, project, date range)</a:t>
+            </a:r>
+            <a:endParaRPr lang="en-US" sz="1250" dirty="0"/>
+          </a:p>
+        </p:txBody>
+      </p:sp>
+      <p:sp>
+        <p:nvSpPr>
+          <p:cNvPr id="16" name="Text 12"/>
+          <p:cNvSpPr/>
+          <p:nvPr/>
+        </p:nvSpPr>
+        <p:spPr>
+          <a:xfrm>
+            <a:off x="457200" y="6473952"/>
+            <a:ext cx="7315200" cy="274320"/>
+          </a:xfrm>
+          <a:prstGeom prst="rect">
+            <a:avLst/>
+          </a:prstGeom>
+          <a:noFill/>
+          <a:ln/>
+        </p:spPr>
+        <p:txBody>
+          <a:bodyPr wrap="square" rtlCol="0" anchor="ctr"/>
+          <a:lstStyle/>
+          <a:p>
+            <a:pPr marL="0" indent="0">
+              <a:buNone/>
+            </a:pPr>
+            <a:r>
+              <a:rPr lang="en-US" sz="900" dirty="0">
+                <a:solidFill>
+                  <a:srgbClr val="94A3B8"/>
+                </a:solidFill>
+                <a:latin typeface="Calibri" pitchFamily="34" charset="0"/>
+                <a:ea typeface="Calibri" pitchFamily="34" charset="-122"/>
+                <a:cs typeface="Calibri" pitchFamily="34" charset="-120"/>
+              </a:rPr>
+              <a:t>Weekly Report Generator &amp; Team Dashboard</a:t>
             </a:r>
             <a:endParaRPr lang="en-US" sz="900" dirty="0"/>
           </a:p>
         </p:txBody>
       </p:sp>
+      <p:pic>
+        <p:nvPicPr>
+          <p:cNvPr id="19" name="Picture 18"/>
+          <p:cNvPicPr>
+            <a:picLocks noChangeAspect="1"/>
+          </p:cNvPicPr>
+          <p:nvPr/>
+        </p:nvPicPr>
+        <p:blipFill>
+          <a:blip r:embed="rId5"/>
+          <a:stretch>
+            <a:fillRect/>
+          </a:stretch>
+        </p:blipFill>
+        <p:spPr>
+          <a:xfrm>
+            <a:off x="11201360" y="6053132"/>
+            <a:ext cx="457240" cy="280440"/>
+          </a:xfrm>
+          <a:prstGeom prst="rect">
+            <a:avLst/>
+          </a:prstGeom>
+        </p:spPr>
+      </p:pic>
     </p:spTree>
   </p:cSld>
   <p:clrMapOvr>
@@ -5708,14 +5341,15 @@
 </p:sld>
 </file>
 
-<file path=ppt/slides/slide5.xml><?xml version="1.0" encoding="utf-8"?>
+<file path=ppt/slides/slide6.xml><?xml version="1.0" encoding="utf-8"?>
 <p:sld xmlns:a="http://schemas.openxmlformats.org/drawingml/2006/main" xmlns:r="http://schemas.openxmlformats.org/officeDocument/2006/relationships" xmlns:p="http://schemas.openxmlformats.org/presentationml/2006/main">
-  <p:cSld name="Slide 5">
+  <p:cSld name="Slide 6">
     <p:bg>
       <p:bgPr>
         <a:solidFill>
           <a:srgbClr val="F8FAFC"/>
         </a:solidFill>
+        <a:effectLst/>
       </p:bgPr>
     </p:bg>
     <p:spTree>
@@ -5741,7 +5375,7 @@
         <p:spPr>
           <a:xfrm>
             <a:off x="548640" y="411480"/>
-            <a:ext cx="7315200" cy="548640"/>
+            <a:ext cx="10058400" cy="548640"/>
           </a:xfrm>
           <a:prstGeom prst="rect">
             <a:avLst/>
@@ -5753,671 +5387,7 @@
           <a:bodyPr wrap="square" rtlCol="0" anchor="ctr"/>
           <a:lstStyle/>
           <a:p>
-            <a:pPr indent="0" marL="0">
-              <a:buNone/>
-            </a:pPr>
-            <a:r>
-              <a:rPr lang="en-US" sz="2800" b="1" dirty="0">
-                <a:solidFill>
-                  <a:srgbClr val="111827"/>
-                </a:solidFill>
-                <a:latin typeface="Cambria" pitchFamily="34" charset="0"/>
-                <a:ea typeface="Cambria" pitchFamily="34" charset="-122"/>
-                <a:cs typeface="Cambria" pitchFamily="34" charset="-120"/>
-              </a:rPr>
-              <a:t>Frontend Structure</a:t>
-            </a:r>
-            <a:endParaRPr lang="en-US" sz="2800" dirty="0"/>
-          </a:p>
-        </p:txBody>
-      </p:sp>
-      <p:sp>
-        <p:nvSpPr>
-          <p:cNvPr id="3" name="Text 1"/>
-          <p:cNvSpPr/>
-          <p:nvPr/>
-        </p:nvSpPr>
-        <p:spPr>
-          <a:xfrm>
-            <a:off x="548640" y="960120"/>
-            <a:ext cx="10515600" cy="365760"/>
-          </a:xfrm>
-          <a:prstGeom prst="rect">
-            <a:avLst/>
-          </a:prstGeom>
-          <a:noFill/>
-          <a:ln/>
-        </p:spPr>
-        <p:txBody>
-          <a:bodyPr wrap="square" rtlCol="0" anchor="ctr"/>
-          <a:lstStyle/>
-          <a:p>
-            <a:pPr indent="0" marL="0">
-              <a:buNone/>
-            </a:pPr>
-            <a:r>
-              <a:rPr lang="en-US" sz="1300" dirty="0">
-                <a:solidFill>
-                  <a:srgbClr val="64748B"/>
-                </a:solidFill>
-                <a:latin typeface="Calibri" pitchFamily="34" charset="0"/>
-                <a:ea typeface="Calibri" pitchFamily="34" charset="-122"/>
-                <a:cs typeface="Calibri" pitchFamily="34" charset="-120"/>
-              </a:rPr>
-              <a:t>Clear separation between the personal report page and the team dashboard</a:t>
-            </a:r>
-            <a:endParaRPr lang="en-US" sz="1300" dirty="0"/>
-          </a:p>
-        </p:txBody>
-      </p:sp>
-      <p:sp>
-        <p:nvSpPr>
-          <p:cNvPr id="4" name="Shape 2"/>
-          <p:cNvSpPr/>
-          <p:nvPr/>
-        </p:nvSpPr>
-        <p:spPr>
-          <a:xfrm>
-            <a:off x="548640" y="1600200"/>
-            <a:ext cx="5394960" cy="4206240"/>
-          </a:xfrm>
-          <a:prstGeom prst="roundRect">
-            <a:avLst>
-              <a:gd name="adj" fmla="val 1739"/>
-            </a:avLst>
-          </a:prstGeom>
-          <a:solidFill>
-            <a:srgbClr val="FFFFFF"/>
-          </a:solidFill>
-          <a:ln/>
-          <a:effectLst>
-            <a:outerShdw sx="100000" sy="100000" kx="0" ky="0" algn="bl" rotWithShape="0" blurRad="101600" dist="38100" dir="5400000">
-              <a:srgbClr val="1E293B">
-                <a:alpha val="8000"/>
-              </a:srgbClr>
-            </a:outerShdw>
-          </a:effectLst>
-        </p:spPr>
-      </p:sp>
-      <p:sp>
-        <p:nvSpPr>
-          <p:cNvPr id="5" name="Shape 3"/>
-          <p:cNvSpPr/>
-          <p:nvPr/>
-        </p:nvSpPr>
-        <p:spPr>
-          <a:xfrm>
-            <a:off x="822960" y="1874520"/>
-            <a:ext cx="640080" cy="640080"/>
-          </a:xfrm>
-          <a:prstGeom prst="roundRect">
-            <a:avLst>
-              <a:gd name="adj" fmla="val 20000"/>
-            </a:avLst>
-          </a:prstGeom>
-          <a:solidFill>
-            <a:srgbClr val="3763F2"/>
-          </a:solidFill>
-          <a:ln/>
-        </p:spPr>
-      </p:sp>
-      <p:pic>
-        <p:nvPicPr>
-          <p:cNvPr id="6" name="Image 0" descr="preencoded.png">    </p:cNvPr>
-          <p:cNvPicPr>
-            <a:picLocks noChangeAspect="1"/>
-          </p:cNvPicPr>
-          <p:nvPr/>
-        </p:nvPicPr>
-        <p:blipFill>
-          <a:blip r:embed="rId1"/>
-          <a:stretch>
-            <a:fillRect/>
-          </a:stretch>
-        </p:blipFill>
-        <p:spPr>
-          <a:xfrm>
-            <a:off x="960120" y="2011680"/>
-            <a:ext cx="365760" cy="365760"/>
-          </a:xfrm>
-          <a:prstGeom prst="rect">
-            <a:avLst/>
-          </a:prstGeom>
-        </p:spPr>
-      </p:pic>
-      <p:sp>
-        <p:nvSpPr>
-          <p:cNvPr id="7" name="Text 4"/>
-          <p:cNvSpPr/>
-          <p:nvPr/>
-        </p:nvSpPr>
-        <p:spPr>
-          <a:xfrm>
-            <a:off x="1645920" y="1874520"/>
-            <a:ext cx="3931920" cy="640080"/>
-          </a:xfrm>
-          <a:prstGeom prst="rect">
-            <a:avLst/>
-          </a:prstGeom>
-          <a:noFill/>
-          <a:ln/>
-        </p:spPr>
-        <p:txBody>
-          <a:bodyPr wrap="square" rtlCol="0" anchor="ctr"/>
-          <a:lstStyle/>
-          <a:p>
-            <a:pPr indent="0" marL="0">
-              <a:buNone/>
-            </a:pPr>
-            <a:r>
-              <a:rPr lang="en-US" sz="1600" b="1" dirty="0">
-                <a:solidFill>
-                  <a:srgbClr val="111827"/>
-                </a:solidFill>
-                <a:latin typeface="Calibri" pitchFamily="34" charset="0"/>
-                <a:ea typeface="Calibri" pitchFamily="34" charset="-122"/>
-                <a:cs typeface="Calibri" pitchFamily="34" charset="-120"/>
-              </a:rPr>
-              <a:t>My Reports (Team Member)</a:t>
-            </a:r>
-            <a:endParaRPr lang="en-US" sz="1600" dirty="0"/>
-          </a:p>
-        </p:txBody>
-      </p:sp>
-      <p:sp>
-        <p:nvSpPr>
-          <p:cNvPr id="8" name="Text 5"/>
-          <p:cNvSpPr/>
-          <p:nvPr/>
-        </p:nvSpPr>
-        <p:spPr>
-          <a:xfrm>
-            <a:off x="822960" y="2743200"/>
-            <a:ext cx="4846320" cy="1737360"/>
-          </a:xfrm>
-          <a:prstGeom prst="rect">
-            <a:avLst/>
-          </a:prstGeom>
-          <a:noFill/>
-          <a:ln/>
-        </p:spPr>
-        <p:txBody>
-          <a:bodyPr wrap="square" rtlCol="0" anchor="ctr"/>
-          <a:lstStyle/>
-          <a:p>
-            <a:pPr marL="342900" indent="-342900">
-              <a:spcAft>
-                <a:spcPts val="1000"/>
-              </a:spcAft>
-              <a:buSzPct val="100000"/>
-              <a:buChar char="•"/>
-            </a:pPr>
-            <a:r>
-              <a:rPr lang="en-US" sz="1250" dirty="0">
-                <a:solidFill>
-                  <a:srgbClr val="64748B"/>
-                </a:solidFill>
-                <a:latin typeface="Calibri" pitchFamily="34" charset="0"/>
-                <a:ea typeface="Calibri" pitchFamily="34" charset="-122"/>
-                <a:cs typeface="Calibri" pitchFamily="34" charset="-120"/>
-              </a:rPr>
-              <a:t>ReportForm — fixed, shared schema</a:t>
-            </a:r>
-            <a:endParaRPr lang="en-US" sz="1250" dirty="0"/>
-          </a:p>
-          <a:p>
-            <a:pPr marL="342900" indent="-342900">
-              <a:spcAft>
-                <a:spcPts val="1000"/>
-              </a:spcAft>
-              <a:buSzPct val="100000"/>
-              <a:buChar char="•"/>
-            </a:pPr>
-            <a:r>
-              <a:rPr lang="en-US" sz="1250" dirty="0">
-                <a:solidFill>
-                  <a:srgbClr val="64748B"/>
-                </a:solidFill>
-                <a:latin typeface="Calibri" pitchFamily="34" charset="0"/>
-                <a:ea typeface="Calibri" pitchFamily="34" charset="-122"/>
-                <a:cs typeface="Calibri" pitchFamily="34" charset="-120"/>
-              </a:rPr>
-              <a:t>ReportCard — history grouped by week</a:t>
-            </a:r>
-            <a:endParaRPr lang="en-US" sz="1250" dirty="0"/>
-          </a:p>
-          <a:p>
-            <a:pPr marL="342900" indent="-342900">
-              <a:spcAft>
-                <a:spcPts val="1000"/>
-              </a:spcAft>
-              <a:buSzPct val="100000"/>
-              <a:buChar char="•"/>
-            </a:pPr>
-            <a:r>
-              <a:rPr lang="en-US" sz="1250" dirty="0">
-                <a:solidFill>
-                  <a:srgbClr val="64748B"/>
-                </a:solidFill>
-                <a:latin typeface="Calibri" pitchFamily="34" charset="0"/>
-                <a:ea typeface="Calibri" pitchFamily="34" charset="-122"/>
-                <a:cs typeface="Calibri" pitchFamily="34" charset="-120"/>
-              </a:rPr>
-              <a:t>Create / edit / submit / save draft</a:t>
-            </a:r>
-            <a:endParaRPr lang="en-US" sz="1250" dirty="0"/>
-          </a:p>
-        </p:txBody>
-      </p:sp>
-      <p:sp>
-        <p:nvSpPr>
-          <p:cNvPr id="9" name="Text 6"/>
-          <p:cNvSpPr/>
-          <p:nvPr/>
-        </p:nvSpPr>
-        <p:spPr>
-          <a:xfrm>
-            <a:off x="822960" y="4892040"/>
-            <a:ext cx="4846320" cy="548640"/>
-          </a:xfrm>
-          <a:prstGeom prst="rect">
-            <a:avLst/>
-          </a:prstGeom>
-          <a:noFill/>
-          <a:ln/>
-        </p:spPr>
-        <p:txBody>
-          <a:bodyPr wrap="square" rtlCol="0" anchor="ctr"/>
-          <a:lstStyle/>
-          <a:p>
-            <a:pPr indent="0" marL="0">
-              <a:buNone/>
-            </a:pPr>
-            <a:r>
-              <a:rPr lang="en-US" sz="1000" i="1" dirty="0">
-                <a:solidFill>
-                  <a:srgbClr val="94A3B8"/>
-                </a:solidFill>
-                <a:latin typeface="Calibri" pitchFamily="34" charset="0"/>
-                <a:ea typeface="Calibri" pitchFamily="34" charset="-122"/>
-                <a:cs typeface="Calibri" pitchFamily="34" charset="-120"/>
-              </a:rPr>
-              <a:t>Folder: src/pages, src/components (ReportForm, ReportCard)</a:t>
-            </a:r>
-            <a:endParaRPr lang="en-US" sz="1000" dirty="0"/>
-          </a:p>
-        </p:txBody>
-      </p:sp>
-      <p:sp>
-        <p:nvSpPr>
-          <p:cNvPr id="10" name="Shape 7"/>
-          <p:cNvSpPr/>
-          <p:nvPr/>
-        </p:nvSpPr>
-        <p:spPr>
-          <a:xfrm>
-            <a:off x="6263640" y="1600200"/>
-            <a:ext cx="5394960" cy="4206240"/>
-          </a:xfrm>
-          <a:prstGeom prst="roundRect">
-            <a:avLst>
-              <a:gd name="adj" fmla="val 1739"/>
-            </a:avLst>
-          </a:prstGeom>
-          <a:solidFill>
-            <a:srgbClr val="FFFFFF"/>
-          </a:solidFill>
-          <a:ln/>
-          <a:effectLst>
-            <a:outerShdw sx="100000" sy="100000" kx="0" ky="0" algn="bl" rotWithShape="0" blurRad="101600" dist="38100" dir="5400000">
-              <a:srgbClr val="1E293B">
-                <a:alpha val="8000"/>
-              </a:srgbClr>
-            </a:outerShdw>
-          </a:effectLst>
-        </p:spPr>
-      </p:sp>
-      <p:sp>
-        <p:nvSpPr>
-          <p:cNvPr id="11" name="Shape 8"/>
-          <p:cNvSpPr/>
-          <p:nvPr/>
-        </p:nvSpPr>
-        <p:spPr>
-          <a:xfrm>
-            <a:off x="6537960" y="1874520"/>
-            <a:ext cx="640080" cy="640080"/>
-          </a:xfrm>
-          <a:prstGeom prst="roundRect">
-            <a:avLst>
-              <a:gd name="adj" fmla="val 20000"/>
-            </a:avLst>
-          </a:prstGeom>
-          <a:solidFill>
-            <a:srgbClr val="10B981"/>
-          </a:solidFill>
-          <a:ln/>
-        </p:spPr>
-      </p:sp>
-      <p:pic>
-        <p:nvPicPr>
-          <p:cNvPr id="12" name="Image 1" descr="preencoded.png">    </p:cNvPr>
-          <p:cNvPicPr>
-            <a:picLocks noChangeAspect="1"/>
-          </p:cNvPicPr>
-          <p:nvPr/>
-        </p:nvPicPr>
-        <p:blipFill>
-          <a:blip r:embed="rId2"/>
-          <a:stretch>
-            <a:fillRect/>
-          </a:stretch>
-        </p:blipFill>
-        <p:spPr>
-          <a:xfrm>
-            <a:off x="6675120" y="2011680"/>
-            <a:ext cx="365760" cy="365760"/>
-          </a:xfrm>
-          <a:prstGeom prst="rect">
-            <a:avLst/>
-          </a:prstGeom>
-        </p:spPr>
-      </p:pic>
-      <p:sp>
-        <p:nvSpPr>
-          <p:cNvPr id="13" name="Text 9"/>
-          <p:cNvSpPr/>
-          <p:nvPr/>
-        </p:nvSpPr>
-        <p:spPr>
-          <a:xfrm>
-            <a:off x="7360920" y="1874520"/>
-            <a:ext cx="3931920" cy="640080"/>
-          </a:xfrm>
-          <a:prstGeom prst="rect">
-            <a:avLst/>
-          </a:prstGeom>
-          <a:noFill/>
-          <a:ln/>
-        </p:spPr>
-        <p:txBody>
-          <a:bodyPr wrap="square" rtlCol="0" anchor="ctr"/>
-          <a:lstStyle/>
-          <a:p>
-            <a:pPr indent="0" marL="0">
-              <a:buNone/>
-            </a:pPr>
-            <a:r>
-              <a:rPr lang="en-US" sz="1600" b="1" dirty="0">
-                <a:solidFill>
-                  <a:srgbClr val="111827"/>
-                </a:solidFill>
-                <a:latin typeface="Calibri" pitchFamily="34" charset="0"/>
-                <a:ea typeface="Calibri" pitchFamily="34" charset="-122"/>
-                <a:cs typeface="Calibri" pitchFamily="34" charset="-120"/>
-              </a:rPr>
-              <a:t>Team Dashboard (Manager)</a:t>
-            </a:r>
-            <a:endParaRPr lang="en-US" sz="1600" dirty="0"/>
-          </a:p>
-        </p:txBody>
-      </p:sp>
-      <p:sp>
-        <p:nvSpPr>
-          <p:cNvPr id="14" name="Text 10"/>
-          <p:cNvSpPr/>
-          <p:nvPr/>
-        </p:nvSpPr>
-        <p:spPr>
-          <a:xfrm>
-            <a:off x="6537960" y="2743200"/>
-            <a:ext cx="4846320" cy="1737360"/>
-          </a:xfrm>
-          <a:prstGeom prst="rect">
-            <a:avLst/>
-          </a:prstGeom>
-          <a:noFill/>
-          <a:ln/>
-        </p:spPr>
-        <p:txBody>
-          <a:bodyPr wrap="square" rtlCol="0" anchor="ctr"/>
-          <a:lstStyle/>
-          <a:p>
-            <a:pPr marL="342900" indent="-342900">
-              <a:spcAft>
-                <a:spcPts val="1000"/>
-              </a:spcAft>
-              <a:buSzPct val="100000"/>
-              <a:buChar char="•"/>
-            </a:pPr>
-            <a:r>
-              <a:rPr lang="en-US" sz="1250" dirty="0">
-                <a:solidFill>
-                  <a:srgbClr val="64748B"/>
-                </a:solidFill>
-                <a:latin typeface="Calibri" pitchFamily="34" charset="0"/>
-                <a:ea typeface="Calibri" pitchFamily="34" charset="-122"/>
-                <a:cs typeface="Calibri" pitchFamily="34" charset="-120"/>
-              </a:rPr>
-              <a:t>SummaryCard — compliance, blockers, headcount</a:t>
-            </a:r>
-            <a:endParaRPr lang="en-US" sz="1250" dirty="0"/>
-          </a:p>
-          <a:p>
-            <a:pPr marL="342900" indent="-342900">
-              <a:spcAft>
-                <a:spcPts val="1000"/>
-              </a:spcAft>
-              <a:buSzPct val="100000"/>
-              <a:buChar char="•"/>
-            </a:pPr>
-            <a:r>
-              <a:rPr lang="en-US" sz="1250" dirty="0">
-                <a:solidFill>
-                  <a:srgbClr val="64748B"/>
-                </a:solidFill>
-                <a:latin typeface="Calibri" pitchFamily="34" charset="0"/>
-                <a:ea typeface="Calibri" pitchFamily="34" charset="-122"/>
-                <a:cs typeface="Calibri" pitchFamily="34" charset="-120"/>
-              </a:rPr>
-              <a:t>TasksTrendChart / SubmissionStatusChart / WorkloadChart</a:t>
-            </a:r>
-            <a:endParaRPr lang="en-US" sz="1250" dirty="0"/>
-          </a:p>
-          <a:p>
-            <a:pPr marL="342900" indent="-342900">
-              <a:spcAft>
-                <a:spcPts val="1000"/>
-              </a:spcAft>
-              <a:buSzPct val="100000"/>
-              <a:buChar char="•"/>
-            </a:pPr>
-            <a:r>
-              <a:rPr lang="en-US" sz="1250" dirty="0">
-                <a:solidFill>
-                  <a:srgbClr val="64748B"/>
-                </a:solidFill>
-                <a:latin typeface="Calibri" pitchFamily="34" charset="0"/>
-                <a:ea typeface="Calibri" pitchFamily="34" charset="-122"/>
-                <a:cs typeface="Calibri" pitchFamily="34" charset="-120"/>
-              </a:rPr>
-              <a:t>Filterable report table (member, project, date range)</a:t>
-            </a:r>
-            <a:endParaRPr lang="en-US" sz="1250" dirty="0"/>
-          </a:p>
-        </p:txBody>
-      </p:sp>
-      <p:sp>
-        <p:nvSpPr>
-          <p:cNvPr id="15" name="Text 11"/>
-          <p:cNvSpPr/>
-          <p:nvPr/>
-        </p:nvSpPr>
-        <p:spPr>
-          <a:xfrm>
-            <a:off x="6537960" y="4892040"/>
-            <a:ext cx="4846320" cy="548640"/>
-          </a:xfrm>
-          <a:prstGeom prst="rect">
-            <a:avLst/>
-          </a:prstGeom>
-          <a:noFill/>
-          <a:ln/>
-        </p:spPr>
-        <p:txBody>
-          <a:bodyPr wrap="square" rtlCol="0" anchor="ctr"/>
-          <a:lstStyle/>
-          <a:p>
-            <a:pPr indent="0" marL="0">
-              <a:buNone/>
-            </a:pPr>
-            <a:r>
-              <a:rPr lang="en-US" sz="1000" i="1" dirty="0">
-                <a:solidFill>
-                  <a:srgbClr val="94A3B8"/>
-                </a:solidFill>
-                <a:latin typeface="Calibri" pitchFamily="34" charset="0"/>
-                <a:ea typeface="Calibri" pitchFamily="34" charset="-122"/>
-                <a:cs typeface="Calibri" pitchFamily="34" charset="-120"/>
-              </a:rPr>
-              <a:t>Folder: src/pages, src/components (charts/, SummaryCard)</a:t>
-            </a:r>
-            <a:endParaRPr lang="en-US" sz="1000" dirty="0"/>
-          </a:p>
-        </p:txBody>
-      </p:sp>
-      <p:sp>
-        <p:nvSpPr>
-          <p:cNvPr id="16" name="Text 12"/>
-          <p:cNvSpPr/>
-          <p:nvPr/>
-        </p:nvSpPr>
-        <p:spPr>
-          <a:xfrm>
-            <a:off x="457200" y="6473952"/>
-            <a:ext cx="7315200" cy="274320"/>
-          </a:xfrm>
-          <a:prstGeom prst="rect">
-            <a:avLst/>
-          </a:prstGeom>
-          <a:noFill/>
-          <a:ln/>
-        </p:spPr>
-        <p:txBody>
-          <a:bodyPr wrap="square" rtlCol="0" anchor="ctr"/>
-          <a:lstStyle/>
-          <a:p>
-            <a:pPr indent="0" marL="0">
-              <a:buNone/>
-            </a:pPr>
-            <a:r>
-              <a:rPr lang="en-US" sz="900" dirty="0">
-                <a:solidFill>
-                  <a:srgbClr val="94A3B8"/>
-                </a:solidFill>
-                <a:latin typeface="Calibri" pitchFamily="34" charset="0"/>
-                <a:ea typeface="Calibri" pitchFamily="34" charset="-122"/>
-                <a:cs typeface="Calibri" pitchFamily="34" charset="-120"/>
-              </a:rPr>
-              <a:t>Weekly Report Generator &amp; Team Dashboard</a:t>
-            </a:r>
-            <a:endParaRPr lang="en-US" sz="900" dirty="0"/>
-          </a:p>
-        </p:txBody>
-      </p:sp>
-      <p:sp>
-        <p:nvSpPr>
-          <p:cNvPr id="17" name="Text 13"/>
-          <p:cNvSpPr/>
-          <p:nvPr/>
-        </p:nvSpPr>
-        <p:spPr>
-          <a:xfrm>
-            <a:off x="11274552" y="6473952"/>
-            <a:ext cx="457200" cy="274320"/>
-          </a:xfrm>
-          <a:prstGeom prst="rect">
-            <a:avLst/>
-          </a:prstGeom>
-          <a:noFill/>
-          <a:ln/>
-        </p:spPr>
-        <p:txBody>
-          <a:bodyPr wrap="square" rtlCol="0" anchor="ctr"/>
-          <a:lstStyle/>
-          <a:p>
-            <a:pPr algn="r" indent="0" marL="0">
-              <a:buNone/>
-            </a:pPr>
-            <a:r>
-              <a:rPr lang="en-US" sz="900" dirty="0">
-                <a:solidFill>
-                  <a:srgbClr val="94A3B8"/>
-                </a:solidFill>
-                <a:latin typeface="Calibri" pitchFamily="34" charset="0"/>
-                <a:ea typeface="Calibri" pitchFamily="34" charset="-122"/>
-                <a:cs typeface="Calibri" pitchFamily="34" charset="-120"/>
-              </a:rPr>
-              <a:t>5</a:t>
-            </a:r>
-            <a:endParaRPr lang="en-US" sz="900" dirty="0"/>
-          </a:p>
-        </p:txBody>
-      </p:sp>
-    </p:spTree>
-  </p:cSld>
-  <p:clrMapOvr>
-    <a:masterClrMapping/>
-  </p:clrMapOvr>
-</p:sld>
-</file>
-
-<file path=ppt/slides/slide6.xml><?xml version="1.0" encoding="utf-8"?>
-<p:sld xmlns:a="http://schemas.openxmlformats.org/drawingml/2006/main" xmlns:r="http://schemas.openxmlformats.org/officeDocument/2006/relationships" xmlns:p="http://schemas.openxmlformats.org/presentationml/2006/main">
-  <p:cSld name="Slide 6">
-    <p:bg>
-      <p:bgPr>
-        <a:solidFill>
-          <a:srgbClr val="F8FAFC"/>
-        </a:solidFill>
-      </p:bgPr>
-    </p:bg>
-    <p:spTree>
-      <p:nvGrpSpPr>
-        <p:cNvPr id="1" name=""/>
-        <p:cNvGrpSpPr/>
-        <p:nvPr/>
-      </p:nvGrpSpPr>
-      <p:grpSpPr>
-        <a:xfrm>
-          <a:off x="0" y="0"/>
-          <a:ext cx="0" cy="0"/>
-          <a:chOff x="0" y="0"/>
-          <a:chExt cx="0" cy="0"/>
-        </a:xfrm>
-      </p:grpSpPr>
-      <p:sp>
-        <p:nvSpPr>
-          <p:cNvPr id="2" name="Text 0"/>
-          <p:cNvSpPr/>
-          <p:nvPr/>
-        </p:nvSpPr>
-        <p:spPr>
-          <a:xfrm>
-            <a:off x="548640" y="411480"/>
-            <a:ext cx="10058400" cy="548640"/>
-          </a:xfrm>
-          <a:prstGeom prst="rect">
-            <a:avLst/>
-          </a:prstGeom>
-          <a:noFill/>
-          <a:ln/>
-        </p:spPr>
-        <p:txBody>
-          <a:bodyPr wrap="square" rtlCol="0" anchor="ctr"/>
-          <a:lstStyle/>
-          <a:p>
-            <a:pPr indent="0" marL="0">
+            <a:pPr marL="0" indent="0">
               <a:buNone/>
             </a:pPr>
             <a:r>
@@ -6444,14 +5414,14 @@
           <p:nvPr>
             <p:extLst>
               <p:ext uri="{D42A27DB-BD31-4B8C-83A1-F6EECF244321}">
-                <p14:modId xmlns:p14="http://schemas.microsoft.com/office/powerpoint/2010/main" val="1579011935"/>
+                <p14:modId xmlns:p14="http://schemas.microsoft.com/office/powerpoint/2010/main" val="2808970702"/>
               </p:ext>
             </p:extLst>
           </p:nvPr>
         </p:nvGraphicFramePr>
         <p:xfrm>
           <a:off x="548640" y="1143000"/>
-          <a:ext cx="11064240" cy="914400"/>
+          <a:ext cx="11064240" cy="3017520"/>
         </p:xfrm>
         <a:graphic>
           <a:graphicData uri="http://schemas.openxmlformats.org/drawingml/2006/table">
@@ -6468,7 +5438,7 @@
                     <a:bodyPr/>
                     <a:lstStyle/>
                     <a:p>
-                      <a:pPr indent="0" marL="0">
+                      <a:pPr marL="0" indent="0">
                         <a:buNone/>
                       </a:pPr>
                       <a:r>
@@ -6489,7 +5459,7 @@
                       </a:endParaRPr>
                     </a:p>
                   </a:txBody>
-                  <a:tcPr marL="91440" marR="91440" marT="45720" marB="45720" anchor="ctr">
+                  <a:tcPr anchor="ctr">
                     <a:lnL w="6350" cap="flat" cmpd="sng" algn="ctr">
                       <a:solidFill>
                         <a:srgbClr val="E2E8F0"/>
@@ -6536,7 +5506,7 @@
                     <a:bodyPr/>
                     <a:lstStyle/>
                     <a:p>
-                      <a:pPr indent="0" marL="0">
+                      <a:pPr marL="0" indent="0">
                         <a:buNone/>
                       </a:pPr>
                       <a:r>
@@ -6557,7 +5527,7 @@
                       </a:endParaRPr>
                     </a:p>
                   </a:txBody>
-                  <a:tcPr marL="91440" marR="91440" marT="45720" marB="45720" anchor="ctr">
+                  <a:tcPr anchor="ctr">
                     <a:lnL w="6350" cap="flat" cmpd="sng" algn="ctr">
                       <a:solidFill>
                         <a:srgbClr val="E2E8F0"/>
@@ -6604,7 +5574,7 @@
                     <a:bodyPr/>
                     <a:lstStyle/>
                     <a:p>
-                      <a:pPr indent="0" marL="0">
+                      <a:pPr marL="0" indent="0">
                         <a:buNone/>
                       </a:pPr>
                       <a:r>
@@ -6625,7 +5595,7 @@
                       </a:endParaRPr>
                     </a:p>
                   </a:txBody>
-                  <a:tcPr marL="91440" marR="91440" marT="45720" marB="45720" anchor="ctr">
+                  <a:tcPr anchor="ctr">
                     <a:lnL w="6350" cap="flat" cmpd="sng" algn="ctr">
                       <a:solidFill>
                         <a:srgbClr val="E2E8F0"/>
@@ -6674,7 +5644,7 @@
                     <a:bodyPr/>
                     <a:lstStyle/>
                     <a:p>
-                      <a:pPr indent="0" marL="0">
+                      <a:pPr marL="0" indent="0">
                         <a:buNone/>
                       </a:pPr>
                       <a:r>
@@ -6695,7 +5665,7 @@
                       </a:endParaRPr>
                     </a:p>
                   </a:txBody>
-                  <a:tcPr marL="91440" marR="91440" marT="45720" marB="45720" anchor="ctr">
+                  <a:tcPr anchor="ctr">
                     <a:lnL w="6350" cap="flat" cmpd="sng" algn="ctr">
                       <a:solidFill>
                         <a:srgbClr val="E2E8F0"/>
@@ -6739,7 +5709,7 @@
                     <a:bodyPr/>
                     <a:lstStyle/>
                     <a:p>
-                      <a:pPr indent="0" marL="0">
+                      <a:pPr marL="0" indent="0">
                         <a:buNone/>
                       </a:pPr>
                       <a:r>
@@ -6760,7 +5730,7 @@
                       </a:endParaRPr>
                     </a:p>
                   </a:txBody>
-                  <a:tcPr marL="91440" marR="91440" marT="45720" marB="45720" anchor="ctr">
+                  <a:tcPr anchor="ctr">
                     <a:lnL w="6350" cap="flat" cmpd="sng" algn="ctr">
                       <a:solidFill>
                         <a:srgbClr val="E2E8F0"/>
@@ -6804,7 +5774,7 @@
                     <a:bodyPr/>
                     <a:lstStyle/>
                     <a:p>
-                      <a:pPr indent="0" marL="0">
+                      <a:pPr marL="0" indent="0">
                         <a:buNone/>
                       </a:pPr>
                       <a:r>
@@ -6825,7 +5795,7 @@
                       </a:endParaRPr>
                     </a:p>
                   </a:txBody>
-                  <a:tcPr marL="91440" marR="91440" marT="45720" marB="45720" anchor="ctr">
+                  <a:tcPr anchor="ctr">
                     <a:lnL w="6350" cap="flat" cmpd="sng" algn="ctr">
                       <a:solidFill>
                         <a:srgbClr val="E2E8F0"/>
@@ -6871,7 +5841,7 @@
                     <a:bodyPr/>
                     <a:lstStyle/>
                     <a:p>
-                      <a:pPr indent="0" marL="0">
+                      <a:pPr marL="0" indent="0">
                         <a:buNone/>
                       </a:pPr>
                       <a:r>
@@ -6892,7 +5862,7 @@
                       </a:endParaRPr>
                     </a:p>
                   </a:txBody>
-                  <a:tcPr marL="91440" marR="91440" marT="45720" marB="45720" anchor="ctr">
+                  <a:tcPr anchor="ctr">
                     <a:lnL w="6350" cap="flat" cmpd="sng" algn="ctr">
                       <a:solidFill>
                         <a:srgbClr val="E2E8F0"/>
@@ -6936,7 +5906,7 @@
                     <a:bodyPr/>
                     <a:lstStyle/>
                     <a:p>
-                      <a:pPr indent="0" marL="0">
+                      <a:pPr marL="0" indent="0">
                         <a:buNone/>
                       </a:pPr>
                       <a:r>
@@ -6957,7 +5927,7 @@
                       </a:endParaRPr>
                     </a:p>
                   </a:txBody>
-                  <a:tcPr marL="91440" marR="91440" marT="45720" marB="45720" anchor="ctr">
+                  <a:tcPr anchor="ctr">
                     <a:lnL w="6350" cap="flat" cmpd="sng" algn="ctr">
                       <a:solidFill>
                         <a:srgbClr val="E2E8F0"/>
@@ -7001,7 +5971,7 @@
                     <a:bodyPr/>
                     <a:lstStyle/>
                     <a:p>
-                      <a:pPr indent="0" marL="0">
+                      <a:pPr marL="0" indent="0">
                         <a:buNone/>
                       </a:pPr>
                       <a:r>
@@ -7022,7 +5992,7 @@
                       </a:endParaRPr>
                     </a:p>
                   </a:txBody>
-                  <a:tcPr marL="91440" marR="91440" marT="45720" marB="45720" anchor="ctr">
+                  <a:tcPr anchor="ctr">
                     <a:lnL w="6350" cap="flat" cmpd="sng" algn="ctr">
                       <a:solidFill>
                         <a:srgbClr val="E2E8F0"/>
@@ -7068,7 +6038,7 @@
                     <a:bodyPr/>
                     <a:lstStyle/>
                     <a:p>
-                      <a:pPr indent="0" marL="0">
+                      <a:pPr marL="0" indent="0">
                         <a:buNone/>
                       </a:pPr>
                       <a:r>
@@ -7089,7 +6059,7 @@
                       </a:endParaRPr>
                     </a:p>
                   </a:txBody>
-                  <a:tcPr marL="91440" marR="91440" marT="45720" marB="45720" anchor="ctr">
+                  <a:tcPr anchor="ctr">
                     <a:lnL w="6350" cap="flat" cmpd="sng" algn="ctr">
                       <a:solidFill>
                         <a:srgbClr val="E2E8F0"/>
@@ -7133,9 +6103,20 @@
                     <a:bodyPr/>
                     <a:lstStyle/>
                     <a:p>
-                      <a:pPr indent="0" marL="0">
+                      <a:pPr marL="0" indent="0">
                         <a:buNone/>
                       </a:pPr>
+                      <a:r>
+                        <a:rPr lang="en-US" sz="1150" dirty="0" smtClean="0">
+                          <a:solidFill>
+                            <a:srgbClr val="111827"/>
+                          </a:solidFill>
+                          <a:latin typeface="Calibri" pitchFamily="34" charset="0"/>
+                          <a:ea typeface="Calibri" pitchFamily="34" charset="-122"/>
+                          <a:cs typeface="Calibri" pitchFamily="34" charset="-120"/>
+                        </a:rPr>
+                        <a:t>Manager </a:t>
+                      </a:r>
                       <a:r>
                         <a:rPr lang="en-US" sz="1150" dirty="0">
                           <a:solidFill>
@@ -7145,7 +6126,7 @@
                           <a:ea typeface="Calibri" pitchFamily="34" charset="-122"/>
                           <a:cs typeface="Calibri" pitchFamily="34" charset="-120"/>
                         </a:rPr>
-                        <a:t>Owner only</a:t>
+                        <a:t>only</a:t>
                       </a:r>
                       <a:endParaRPr lang="en-US" sz="1150" dirty="0">
                         <a:latin typeface="Calibri" charset="0"/>
@@ -7154,7 +6135,7 @@
                       </a:endParaRPr>
                     </a:p>
                   </a:txBody>
-                  <a:tcPr marL="91440" marR="91440" marT="45720" marB="45720" anchor="ctr">
+                  <a:tcPr anchor="ctr">
                     <a:lnL w="6350" cap="flat" cmpd="sng" algn="ctr">
                       <a:solidFill>
                         <a:srgbClr val="E2E8F0"/>
@@ -7198,7 +6179,7 @@
                     <a:bodyPr/>
                     <a:lstStyle/>
                     <a:p>
-                      <a:pPr indent="0" marL="0">
+                      <a:pPr marL="0" indent="0">
                         <a:buNone/>
                       </a:pPr>
                       <a:r>
@@ -7219,7 +6200,7 @@
                       </a:endParaRPr>
                     </a:p>
                   </a:txBody>
-                  <a:tcPr marL="91440" marR="91440" marT="45720" marB="45720" anchor="ctr">
+                  <a:tcPr anchor="ctr">
                     <a:lnL w="6350" cap="flat" cmpd="sng" algn="ctr">
                       <a:solidFill>
                         <a:srgbClr val="E2E8F0"/>
@@ -7265,7 +6246,7 @@
                     <a:bodyPr/>
                     <a:lstStyle/>
                     <a:p>
-                      <a:pPr indent="0" marL="0">
+                      <a:pPr marL="0" indent="0">
                         <a:buNone/>
                       </a:pPr>
                       <a:r>
@@ -7286,7 +6267,7 @@
                       </a:endParaRPr>
                     </a:p>
                   </a:txBody>
-                  <a:tcPr marL="91440" marR="91440" marT="45720" marB="45720" anchor="ctr">
+                  <a:tcPr anchor="ctr">
                     <a:lnL w="6350" cap="flat" cmpd="sng" algn="ctr">
                       <a:solidFill>
                         <a:srgbClr val="E2E8F0"/>
@@ -7330,7 +6311,7 @@
                     <a:bodyPr/>
                     <a:lstStyle/>
                     <a:p>
-                      <a:pPr indent="0" marL="0">
+                      <a:pPr marL="0" indent="0">
                         <a:buNone/>
                       </a:pPr>
                       <a:r>
@@ -7351,7 +6332,7 @@
                       </a:endParaRPr>
                     </a:p>
                   </a:txBody>
-                  <a:tcPr marL="91440" marR="91440" marT="45720" marB="45720" anchor="ctr">
+                  <a:tcPr anchor="ctr">
                     <a:lnL w="6350" cap="flat" cmpd="sng" algn="ctr">
                       <a:solidFill>
                         <a:srgbClr val="E2E8F0"/>
@@ -7395,7 +6376,7 @@
                     <a:bodyPr/>
                     <a:lstStyle/>
                     <a:p>
-                      <a:pPr indent="0" marL="0">
+                      <a:pPr marL="0" indent="0">
                         <a:buNone/>
                       </a:pPr>
                       <a:r>
@@ -7416,7 +6397,7 @@
                       </a:endParaRPr>
                     </a:p>
                   </a:txBody>
-                  <a:tcPr marL="91440" marR="91440" marT="45720" marB="45720" anchor="ctr">
+                  <a:tcPr anchor="ctr">
                     <a:lnL w="6350" cap="flat" cmpd="sng" algn="ctr">
                       <a:solidFill>
                         <a:srgbClr val="E2E8F0"/>
@@ -7462,7 +6443,7 @@
                     <a:bodyPr/>
                     <a:lstStyle/>
                     <a:p>
-                      <a:pPr indent="0" marL="0">
+                      <a:pPr marL="0" indent="0">
                         <a:buNone/>
                       </a:pPr>
                       <a:r>
@@ -7483,7 +6464,7 @@
                       </a:endParaRPr>
                     </a:p>
                   </a:txBody>
-                  <a:tcPr marL="91440" marR="91440" marT="45720" marB="45720" anchor="ctr">
+                  <a:tcPr anchor="ctr">
                     <a:lnL w="6350" cap="flat" cmpd="sng" algn="ctr">
                       <a:solidFill>
                         <a:srgbClr val="E2E8F0"/>
@@ -7527,7 +6508,7 @@
                     <a:bodyPr/>
                     <a:lstStyle/>
                     <a:p>
-                      <a:pPr indent="0" marL="0">
+                      <a:pPr marL="0" indent="0">
                         <a:buNone/>
                       </a:pPr>
                       <a:r>
@@ -7548,7 +6529,7 @@
                       </a:endParaRPr>
                     </a:p>
                   </a:txBody>
-                  <a:tcPr marL="91440" marR="91440" marT="45720" marB="45720" anchor="ctr">
+                  <a:tcPr anchor="ctr">
                     <a:lnL w="6350" cap="flat" cmpd="sng" algn="ctr">
                       <a:solidFill>
                         <a:srgbClr val="E2E8F0"/>
@@ -7592,7 +6573,7 @@
                     <a:bodyPr/>
                     <a:lstStyle/>
                     <a:p>
-                      <a:pPr indent="0" marL="0">
+                      <a:pPr marL="0" indent="0">
                         <a:buNone/>
                       </a:pPr>
                       <a:r>
@@ -7613,7 +6594,7 @@
                       </a:endParaRPr>
                     </a:p>
                   </a:txBody>
-                  <a:tcPr marL="91440" marR="91440" marT="45720" marB="45720" anchor="ctr">
+                  <a:tcPr anchor="ctr">
                     <a:lnL w="6350" cap="flat" cmpd="sng" algn="ctr">
                       <a:solidFill>
                         <a:srgbClr val="E2E8F0"/>
@@ -7659,45 +6640,6 @@
       </p:graphicFrame>
       <p:sp>
         <p:nvSpPr>
-          <p:cNvPr id="4" name="Text 1"/>
-          <p:cNvSpPr/>
-          <p:nvPr/>
-        </p:nvSpPr>
-        <p:spPr>
-          <a:xfrm>
-            <a:off x="548640" y="4114800"/>
-            <a:ext cx="4572000" cy="365760"/>
-          </a:xfrm>
-          <a:prstGeom prst="rect">
-            <a:avLst/>
-          </a:prstGeom>
-          <a:noFill/>
-          <a:ln/>
-        </p:spPr>
-        <p:txBody>
-          <a:bodyPr wrap="square" rtlCol="0" anchor="ctr"/>
-          <a:lstStyle/>
-          <a:p>
-            <a:pPr indent="0" marL="0">
-              <a:buNone/>
-            </a:pPr>
-            <a:r>
-              <a:rPr lang="en-US" sz="1400" b="1" dirty="0">
-                <a:solidFill>
-                  <a:srgbClr val="111827"/>
-                </a:solidFill>
-                <a:latin typeface="Calibri" pitchFamily="34" charset="0"/>
-                <a:ea typeface="Calibri" pitchFamily="34" charset="-122"/>
-                <a:cs typeface="Calibri" pitchFamily="34" charset="-120"/>
-              </a:rPr>
-              <a:t>Middleware chain</a:t>
-            </a:r>
-            <a:endParaRPr lang="en-US" sz="1400" dirty="0"/>
-          </a:p>
-        </p:txBody>
-      </p:sp>
-      <p:sp>
-        <p:nvSpPr>
           <p:cNvPr id="5" name="Shape 2"/>
           <p:cNvSpPr/>
           <p:nvPr/>
@@ -7739,7 +6681,7 @@
           <a:bodyPr wrap="square" rtlCol="0" anchor="ctr"/>
           <a:lstStyle/>
           <a:p>
-            <a:pPr algn="ctr" indent="0" marL="0">
+            <a:pPr marL="0" indent="0" algn="ctr">
               <a:buNone/>
             </a:pPr>
             <a:r>
@@ -7759,7 +6701,7 @@
       </p:sp>
       <p:sp>
         <p:nvSpPr>
-          <p:cNvPr id="7" name="Shape 4"/>
+          <p:cNvPr id="3" name="Shape 4"/>
           <p:cNvSpPr/>
           <p:nvPr/>
         </p:nvSpPr>
@@ -7824,7 +6766,7 @@
           <a:bodyPr wrap="square" rtlCol="0" anchor="ctr"/>
           <a:lstStyle/>
           <a:p>
-            <a:pPr algn="ctr" indent="0" marL="0">
+            <a:pPr marL="0" indent="0" algn="ctr">
               <a:buNone/>
             </a:pPr>
             <a:r>
@@ -7909,7 +6851,7 @@
           <a:bodyPr wrap="square" rtlCol="0" anchor="ctr"/>
           <a:lstStyle/>
           <a:p>
-            <a:pPr algn="ctr" indent="0" marL="0">
+            <a:pPr marL="0" indent="0" algn="ctr">
               <a:buNone/>
             </a:pPr>
             <a:r>
@@ -7994,7 +6936,7 @@
           <a:bodyPr wrap="square" rtlCol="0" anchor="ctr"/>
           <a:lstStyle/>
           <a:p>
-            <a:pPr algn="ctr" indent="0" marL="0">
+            <a:pPr marL="0" indent="0" algn="ctr">
               <a:buNone/>
             </a:pPr>
             <a:r>
@@ -8079,7 +7021,7 @@
           <a:bodyPr wrap="square" rtlCol="0" anchor="ctr"/>
           <a:lstStyle/>
           <a:p>
-            <a:pPr algn="ctr" indent="0" marL="0">
+            <a:pPr marL="0" indent="0" algn="ctr">
               <a:buNone/>
             </a:pPr>
             <a:r>
@@ -8118,7 +7060,7 @@
           <a:bodyPr wrap="square" rtlCol="0" anchor="ctr"/>
           <a:lstStyle/>
           <a:p>
-            <a:pPr indent="0" marL="0">
+            <a:pPr marL="0" indent="0">
               <a:buNone/>
             </a:pPr>
             <a:r>
@@ -8136,45 +7078,30 @@
           </a:p>
         </p:txBody>
       </p:sp>
-      <p:sp>
-        <p:nvSpPr>
-          <p:cNvPr id="20" name="Text 17"/>
-          <p:cNvSpPr/>
-          <p:nvPr/>
-        </p:nvSpPr>
-        <p:spPr>
-          <a:xfrm>
-            <a:off x="11274552" y="6473952"/>
-            <a:ext cx="457200" cy="274320"/>
-          </a:xfrm>
-          <a:prstGeom prst="rect">
-            <a:avLst/>
-          </a:prstGeom>
-          <a:noFill/>
-          <a:ln/>
-        </p:spPr>
-        <p:txBody>
-          <a:bodyPr wrap="square" rtlCol="0" anchor="ctr"/>
-          <a:lstStyle/>
-          <a:p>
-            <a:pPr algn="r" indent="0" marL="0">
-              <a:buNone/>
-            </a:pPr>
-            <a:r>
-              <a:rPr lang="en-US" sz="900" dirty="0">
-                <a:solidFill>
-                  <a:srgbClr val="94A3B8"/>
-                </a:solidFill>
-                <a:latin typeface="Calibri" pitchFamily="34" charset="0"/>
-                <a:ea typeface="Calibri" pitchFamily="34" charset="-122"/>
-                <a:cs typeface="Calibri" pitchFamily="34" charset="-120"/>
-              </a:rPr>
-              <a:t>6</a:t>
-            </a:r>
-            <a:endParaRPr lang="en-US" sz="900" dirty="0"/>
-          </a:p>
-        </p:txBody>
-      </p:sp>
+      <p:pic>
+        <p:nvPicPr>
+          <p:cNvPr id="21" name="Picture 20"/>
+          <p:cNvPicPr>
+            <a:picLocks noChangeAspect="1"/>
+          </p:cNvPicPr>
+          <p:nvPr/>
+        </p:nvPicPr>
+        <p:blipFill>
+          <a:blip r:embed="rId3"/>
+          <a:stretch>
+            <a:fillRect/>
+          </a:stretch>
+        </p:blipFill>
+        <p:spPr>
+          <a:xfrm>
+            <a:off x="11247100" y="6117013"/>
+            <a:ext cx="457240" cy="280440"/>
+          </a:xfrm>
+          <a:prstGeom prst="rect">
+            <a:avLst/>
+          </a:prstGeom>
+        </p:spPr>
+      </p:pic>
     </p:spTree>
   </p:cSld>
   <p:clrMapOvr>
@@ -8191,6 +7118,7 @@
         <a:solidFill>
           <a:srgbClr val="F8FAFC"/>
         </a:solidFill>
+        <a:effectLst/>
       </p:bgPr>
     </p:bg>
     <p:spTree>
@@ -8228,7 +7156,7 @@
           <a:bodyPr wrap="square" rtlCol="0" anchor="ctr"/>
           <a:lstStyle/>
           <a:p>
-            <a:pPr indent="0" marL="0">
+            <a:pPr marL="0" indent="0">
               <a:buNone/>
             </a:pPr>
             <a:r>
@@ -8267,7 +7195,7 @@
           <a:bodyPr wrap="square" rtlCol="0" anchor="ctr"/>
           <a:lstStyle/>
           <a:p>
-            <a:pPr indent="0" marL="0">
+            <a:pPr marL="0" indent="0">
               <a:buNone/>
             </a:pPr>
             <a:r>
@@ -8287,7 +7215,7 @@
       </p:sp>
       <p:graphicFrame>
         <p:nvGraphicFramePr>
-          <p:cNvPr id="4" name="Chart 0" descr=""/>
+          <p:cNvPr id="4" name="Chart 0"/>
           <p:cNvGraphicFramePr/>
           <p:nvPr/>
         </p:nvGraphicFramePr>
@@ -8295,15 +7223,15 @@
           <a:off x="457200" y="1371600"/>
           <a:ext cx="3657600" cy="2377440"/>
         </p:xfrm>
-        <a:graphic xmlns:a="http://schemas.openxmlformats.org/drawingml/2006/main">
+        <a:graphic>
           <a:graphicData uri="http://schemas.openxmlformats.org/drawingml/2006/chart">
-            <c:chart xmlns:c="http://schemas.openxmlformats.org/drawingml/2006/chart" r:id="rId1"/>
+            <c:chart xmlns:c="http://schemas.openxmlformats.org/drawingml/2006/chart" xmlns:r="http://schemas.openxmlformats.org/officeDocument/2006/relationships" r:id="rId3"/>
           </a:graphicData>
         </a:graphic>
       </p:graphicFrame>
       <p:graphicFrame>
         <p:nvGraphicFramePr>
-          <p:cNvPr id="5" name="Chart 1" descr=""/>
+          <p:cNvPr id="5" name="Chart 1"/>
           <p:cNvGraphicFramePr/>
           <p:nvPr/>
         </p:nvGraphicFramePr>
@@ -8311,15 +7239,15 @@
           <a:off x="4297680" y="1371600"/>
           <a:ext cx="3657600" cy="2377440"/>
         </p:xfrm>
-        <a:graphic xmlns:a="http://schemas.openxmlformats.org/drawingml/2006/main">
+        <a:graphic>
           <a:graphicData uri="http://schemas.openxmlformats.org/drawingml/2006/chart">
-            <c:chart xmlns:c="http://schemas.openxmlformats.org/drawingml/2006/chart" r:id="rId2"/>
+            <c:chart xmlns:c="http://schemas.openxmlformats.org/drawingml/2006/chart" xmlns:r="http://schemas.openxmlformats.org/officeDocument/2006/relationships" r:id="rId4"/>
           </a:graphicData>
         </a:graphic>
       </p:graphicFrame>
       <p:graphicFrame>
         <p:nvGraphicFramePr>
-          <p:cNvPr id="6" name="Chart 2" descr=""/>
+          <p:cNvPr id="6" name="Chart 2"/>
           <p:cNvGraphicFramePr/>
           <p:nvPr/>
         </p:nvGraphicFramePr>
@@ -8327,9 +7255,9 @@
           <a:off x="8138160" y="1371600"/>
           <a:ext cx="3566160" cy="2377440"/>
         </p:xfrm>
-        <a:graphic xmlns:a="http://schemas.openxmlformats.org/drawingml/2006/main">
+        <a:graphic>
           <a:graphicData uri="http://schemas.openxmlformats.org/drawingml/2006/chart">
-            <c:chart xmlns:c="http://schemas.openxmlformats.org/drawingml/2006/chart" r:id="rId3"/>
+            <c:chart xmlns:c="http://schemas.openxmlformats.org/drawingml/2006/chart" xmlns:r="http://schemas.openxmlformats.org/officeDocument/2006/relationships" r:id="rId5"/>
           </a:graphicData>
         </a:graphic>
       </p:graphicFrame>
@@ -8354,7 +7282,7 @@
           <a:bodyPr wrap="square" rtlCol="0" anchor="ctr"/>
           <a:lstStyle/>
           <a:p>
-            <a:pPr indent="0" marL="0">
+            <a:pPr marL="0" indent="0">
               <a:spcAft>
                 <a:spcPts val="600"/>
               </a:spcAft>
@@ -8392,12 +7320,6 @@
               </a:rPr>
               <a:t>This week's count vs. team size</a:t>
             </a:r>
-            <a:pPr indent="0" marL="0">
-              <a:spcAft>
-                <a:spcPts val="600"/>
-              </a:spcAft>
-              <a:buNone/>
-            </a:pPr>
             <a:r>
               <a:rPr lang="en-US" sz="1200" b="1" dirty="0">
                 <a:solidFill>
@@ -8430,12 +7352,6 @@
               </a:rPr>
               <a:t>Submitted ÷ total members</a:t>
             </a:r>
-            <a:pPr indent="0" marL="0">
-              <a:spcAft>
-                <a:spcPts val="600"/>
-              </a:spcAft>
-              <a:buNone/>
-            </a:pPr>
             <a:r>
               <a:rPr lang="en-US" sz="1200" b="1" dirty="0">
                 <a:solidFill>
@@ -8468,12 +7384,6 @@
               </a:rPr>
               <a:t>Reports with a non-empty blockers field</a:t>
             </a:r>
-            <a:pPr indent="0" marL="0">
-              <a:spcAft>
-                <a:spcPts val="600"/>
-              </a:spcAft>
-              <a:buNone/>
-            </a:pPr>
             <a:r>
               <a:rPr lang="en-US" sz="1200" b="1" dirty="0">
                 <a:solidFill>
@@ -8531,7 +7441,7 @@
           <a:bodyPr wrap="square" rtlCol="0" anchor="ctr"/>
           <a:lstStyle/>
           <a:p>
-            <a:pPr indent="0" marL="0">
+            <a:pPr marL="0" indent="0">
               <a:buNone/>
             </a:pPr>
             <a:r>
@@ -8549,45 +7459,30 @@
           </a:p>
         </p:txBody>
       </p:sp>
-      <p:sp>
-        <p:nvSpPr>
-          <p:cNvPr id="9" name="Text 4"/>
-          <p:cNvSpPr/>
-          <p:nvPr/>
-        </p:nvSpPr>
-        <p:spPr>
-          <a:xfrm>
-            <a:off x="11274552" y="6473952"/>
-            <a:ext cx="457200" cy="274320"/>
-          </a:xfrm>
-          <a:prstGeom prst="rect">
-            <a:avLst/>
-          </a:prstGeom>
-          <a:noFill/>
-          <a:ln/>
-        </p:spPr>
-        <p:txBody>
-          <a:bodyPr wrap="square" rtlCol="0" anchor="ctr"/>
-          <a:lstStyle/>
-          <a:p>
-            <a:pPr algn="r" indent="0" marL="0">
-              <a:buNone/>
-            </a:pPr>
-            <a:r>
-              <a:rPr lang="en-US" sz="900" dirty="0">
-                <a:solidFill>
-                  <a:srgbClr val="94A3B8"/>
-                </a:solidFill>
-                <a:latin typeface="Calibri" pitchFamily="34" charset="0"/>
-                <a:ea typeface="Calibri" pitchFamily="34" charset="-122"/>
-                <a:cs typeface="Calibri" pitchFamily="34" charset="-120"/>
-              </a:rPr>
-              <a:t>7</a:t>
-            </a:r>
-            <a:endParaRPr lang="en-US" sz="900" dirty="0"/>
-          </a:p>
-        </p:txBody>
-      </p:sp>
+      <p:pic>
+        <p:nvPicPr>
+          <p:cNvPr id="10" name="Picture 9"/>
+          <p:cNvPicPr>
+            <a:picLocks noChangeAspect="1"/>
+          </p:cNvPicPr>
+          <p:nvPr/>
+        </p:nvPicPr>
+        <p:blipFill>
+          <a:blip r:embed="rId6"/>
+          <a:stretch>
+            <a:fillRect/>
+          </a:stretch>
+        </p:blipFill>
+        <p:spPr>
+          <a:xfrm>
+            <a:off x="11247080" y="6149392"/>
+            <a:ext cx="457240" cy="280440"/>
+          </a:xfrm>
+          <a:prstGeom prst="rect">
+            <a:avLst/>
+          </a:prstGeom>
+        </p:spPr>
+      </p:pic>
     </p:spTree>
   </p:cSld>
   <p:clrMapOvr>
@@ -8598,12 +7493,13 @@
 
 <file path=ppt/slides/slide8.xml><?xml version="1.0" encoding="utf-8"?>
 <p:sld xmlns:a="http://schemas.openxmlformats.org/drawingml/2006/main" xmlns:r="http://schemas.openxmlformats.org/officeDocument/2006/relationships" xmlns:p="http://schemas.openxmlformats.org/presentationml/2006/main">
-  <p:cSld name="Slide 8">
+  <p:cSld name="Slide 9">
     <p:bg>
       <p:bgPr>
         <a:solidFill>
-          <a:srgbClr val="111827"/>
+          <a:srgbClr val="F8FAFC"/>
         </a:solidFill>
+        <a:effectLst/>
       </p:bgPr>
     </p:bg>
     <p:spTree>
@@ -8622,23 +7518,42 @@
       </p:grpSpPr>
       <p:sp>
         <p:nvSpPr>
-          <p:cNvPr id="2" name="Shape 0"/>
-          <p:cNvSpPr/>
-          <p:nvPr/>
-        </p:nvSpPr>
-        <p:spPr>
-          <a:xfrm>
-            <a:off x="9601200" y="-1371600"/>
-            <a:ext cx="4114800" cy="4114800"/>
-          </a:xfrm>
-          <a:prstGeom prst="ellipse">
-            <a:avLst/>
-          </a:prstGeom>
-          <a:solidFill>
-            <a:srgbClr val="1E2A45"/>
-          </a:solidFill>
-          <a:ln/>
-        </p:spPr>
+          <p:cNvPr id="2" name="Text 0"/>
+          <p:cNvSpPr/>
+          <p:nvPr/>
+        </p:nvSpPr>
+        <p:spPr>
+          <a:xfrm>
+            <a:off x="548640" y="411480"/>
+            <a:ext cx="10058400" cy="548640"/>
+          </a:xfrm>
+          <a:prstGeom prst="rect">
+            <a:avLst/>
+          </a:prstGeom>
+          <a:noFill/>
+          <a:ln/>
+        </p:spPr>
+        <p:txBody>
+          <a:bodyPr wrap="square" rtlCol="0" anchor="ctr"/>
+          <a:lstStyle/>
+          <a:p>
+            <a:pPr marL="0" indent="0">
+              <a:buNone/>
+            </a:pPr>
+            <a:r>
+              <a:rPr lang="en-US" sz="2600" b="1" dirty="0">
+                <a:solidFill>
+                  <a:srgbClr val="111827"/>
+                </a:solidFill>
+                <a:latin typeface="Cambria" pitchFamily="34" charset="0"/>
+                <a:ea typeface="Cambria" pitchFamily="34" charset="-122"/>
+                <a:cs typeface="Cambria" pitchFamily="34" charset="-120"/>
+              </a:rPr>
+              <a:t>Challenges &amp; How They Were Solved</a:t>
+            </a:r>
+            <a:endParaRPr lang="en-US" sz="2600" dirty="0"/>
+          </a:p>
+        </p:txBody>
       </p:sp>
       <p:sp>
         <p:nvSpPr>
@@ -8648,38 +7563,45 @@
         </p:nvSpPr>
         <p:spPr>
           <a:xfrm>
-            <a:off x="548640" y="548640"/>
-            <a:ext cx="731520" cy="731520"/>
+            <a:off x="548640" y="1280160"/>
+            <a:ext cx="11064240" cy="1051560"/>
           </a:xfrm>
           <a:prstGeom prst="roundRect">
             <a:avLst>
-              <a:gd name="adj" fmla="val 20000"/>
+              <a:gd name="adj" fmla="val 6957"/>
             </a:avLst>
           </a:prstGeom>
           <a:solidFill>
-            <a:srgbClr val="3763F2"/>
+            <a:srgbClr val="FFFFFF"/>
           </a:solidFill>
           <a:ln/>
+          <a:effectLst>
+            <a:outerShdw blurRad="76200" dist="25400" dir="5400000" algn="bl" rotWithShape="0">
+              <a:srgbClr val="1E293B">
+                <a:alpha val="6000"/>
+              </a:srgbClr>
+            </a:outerShdw>
+          </a:effectLst>
         </p:spPr>
       </p:sp>
       <p:pic>
         <p:nvPicPr>
-          <p:cNvPr id="4" name="Image 0" descr="preencoded.png">    </p:cNvPr>
+          <p:cNvPr id="4" name="Image 0" descr="preencoded.png"/>
           <p:cNvPicPr>
             <a:picLocks noChangeAspect="1"/>
           </p:cNvPicPr>
           <p:nvPr/>
         </p:nvPicPr>
         <p:blipFill>
-          <a:blip r:embed="rId1"/>
+          <a:blip r:embed="rId3"/>
           <a:stretch>
             <a:fillRect/>
           </a:stretch>
         </p:blipFill>
         <p:spPr>
           <a:xfrm>
-            <a:off x="713232" y="713232"/>
-            <a:ext cx="402336" cy="402336"/>
+            <a:off x="777240" y="1554480"/>
+            <a:ext cx="457200" cy="457200"/>
           </a:xfrm>
           <a:prstGeom prst="rect">
             <a:avLst/>
@@ -8694,8 +7616,8 @@
         </p:nvSpPr>
         <p:spPr>
           <a:xfrm>
-            <a:off x="1463040" y="548640"/>
-            <a:ext cx="9601200" cy="731520"/>
+            <a:off x="1417320" y="1371600"/>
+            <a:ext cx="4023360" cy="868680"/>
           </a:xfrm>
           <a:prstGeom prst="rect">
             <a:avLst/>
@@ -8707,93 +7629,34 @@
           <a:bodyPr wrap="square" rtlCol="0" anchor="ctr"/>
           <a:lstStyle/>
           <a:p>
-            <a:pPr indent="0" marL="0">
+            <a:pPr marL="0" indent="0">
               <a:buNone/>
             </a:pPr>
             <a:r>
-              <a:rPr lang="en-US" sz="2400" b="1" dirty="0">
-                <a:solidFill>
-                  <a:srgbClr val="FFFFFF"/>
-                </a:solidFill>
-                <a:latin typeface="Cambria" pitchFamily="34" charset="0"/>
-                <a:ea typeface="Cambria" pitchFamily="34" charset="-122"/>
-                <a:cs typeface="Cambria" pitchFamily="34" charset="-120"/>
-              </a:rPr>
-              <a:t>AI Chat Assistant  (Good to Have)</a:t>
-            </a:r>
-            <a:endParaRPr lang="en-US" sz="2400" dirty="0"/>
-          </a:p>
-        </p:txBody>
-      </p:sp>
-      <p:sp>
-        <p:nvSpPr>
-          <p:cNvPr id="6" name="Text 3"/>
-          <p:cNvSpPr/>
-          <p:nvPr/>
-        </p:nvSpPr>
-        <p:spPr>
-          <a:xfrm>
-            <a:off x="548640" y="1463040"/>
-            <a:ext cx="10972800" cy="457200"/>
-          </a:xfrm>
-          <a:prstGeom prst="rect">
-            <a:avLst/>
-          </a:prstGeom>
-          <a:noFill/>
-          <a:ln/>
-        </p:spPr>
-        <p:txBody>
-          <a:bodyPr wrap="square" rtlCol="0" anchor="ctr"/>
-          <a:lstStyle/>
-          <a:p>
-            <a:pPr indent="0" marL="0">
-              <a:buNone/>
-            </a:pPr>
-            <a:r>
-              <a:rPr lang="en-US" sz="1300" i="1" dirty="0">
-                <a:solidFill>
-                  <a:srgbClr val="8AB0FF"/>
+              <a:rPr lang="en-US" sz="1200" b="1" dirty="0">
+                <a:solidFill>
+                  <a:srgbClr val="111827"/>
                 </a:solidFill>
                 <a:latin typeface="Calibri" pitchFamily="34" charset="0"/>
                 <a:ea typeface="Calibri" pitchFamily="34" charset="-122"/>
                 <a:cs typeface="Calibri" pitchFamily="34" charset="-120"/>
               </a:rPr>
-              <a:t>Status: proposed design, not built in the 4-day timebox — prioritized core CRUD, RBAC, and dashboard first.</a:t>
-            </a:r>
-            <a:endParaRPr lang="en-US" sz="1300" dirty="0"/>
-          </a:p>
-        </p:txBody>
-      </p:sp>
-      <p:sp>
-        <p:nvSpPr>
-          <p:cNvPr id="7" name="Shape 4"/>
-          <p:cNvSpPr/>
-          <p:nvPr/>
-        </p:nvSpPr>
-        <p:spPr>
-          <a:xfrm>
-            <a:off x="548640" y="2176272"/>
-            <a:ext cx="128016" cy="128016"/>
-          </a:xfrm>
-          <a:prstGeom prst="ellipse">
-            <a:avLst/>
-          </a:prstGeom>
-          <a:solidFill>
-            <a:srgbClr val="10B981"/>
-          </a:solidFill>
-          <a:ln/>
-        </p:spPr>
-      </p:sp>
-      <p:sp>
-        <p:nvSpPr>
-          <p:cNvPr id="8" name="Text 5"/>
-          <p:cNvSpPr/>
-          <p:nvPr/>
-        </p:nvSpPr>
-        <p:spPr>
-          <a:xfrm>
-            <a:off x="868680" y="2011680"/>
-            <a:ext cx="10607040" cy="685800"/>
+              <a:t>Keeping report fields identical for every user</a:t>
+            </a:r>
+            <a:endParaRPr lang="en-US" sz="1200" dirty="0"/>
+          </a:p>
+        </p:txBody>
+      </p:sp>
+      <p:sp>
+        <p:nvSpPr>
+          <p:cNvPr id="6" name="Text 3"/>
+          <p:cNvSpPr/>
+          <p:nvPr/>
+        </p:nvSpPr>
+        <p:spPr>
+          <a:xfrm>
+            <a:off x="5577840" y="1371600"/>
+            <a:ext cx="5852160" cy="868680"/>
           </a:xfrm>
           <a:prstGeom prst="rect">
             <a:avLst/>
@@ -8805,68 +7668,126 @@
           <a:bodyPr wrap="square" rtlCol="0" anchor="ctr"/>
           <a:lstStyle/>
           <a:p>
-            <a:pPr indent="0" marL="0">
+            <a:pPr marL="0" indent="0">
               <a:buNone/>
             </a:pPr>
             <a:r>
-              <a:rPr lang="en-US" sz="1250" b="1" dirty="0">
-                <a:solidFill>
-                  <a:srgbClr val="FFFFFF"/>
+              <a:rPr lang="en-US" sz="1100" dirty="0">
+                <a:solidFill>
+                  <a:srgbClr val="64748B"/>
                 </a:solidFill>
                 <a:latin typeface="Calibri" pitchFamily="34" charset="0"/>
                 <a:ea typeface="Calibri" pitchFamily="34" charset="-122"/>
                 <a:cs typeface="Calibri" pitchFamily="34" charset="-120"/>
               </a:rPr>
-              <a:t>Approach:  </a:t>
-            </a:r>
-            <a:pPr indent="0" marL="0">
+              <a:t>Enforced once in the Sequelize model definition and again in a single shared ReportForm component — no per-user customization surface exists in the UI or API.</a:t>
+            </a:r>
+            <a:endParaRPr lang="en-US" sz="1100" dirty="0"/>
+          </a:p>
+        </p:txBody>
+      </p:sp>
+      <p:sp>
+        <p:nvSpPr>
+          <p:cNvPr id="7" name="Shape 4"/>
+          <p:cNvSpPr/>
+          <p:nvPr/>
+        </p:nvSpPr>
+        <p:spPr>
+          <a:xfrm>
+            <a:off x="548640" y="2468880"/>
+            <a:ext cx="11064240" cy="1051560"/>
+          </a:xfrm>
+          <a:prstGeom prst="roundRect">
+            <a:avLst>
+              <a:gd name="adj" fmla="val 6957"/>
+            </a:avLst>
+          </a:prstGeom>
+          <a:solidFill>
+            <a:srgbClr val="FFFFFF"/>
+          </a:solidFill>
+          <a:ln/>
+          <a:effectLst>
+            <a:outerShdw blurRad="76200" dist="25400" dir="5400000" algn="bl" rotWithShape="0">
+              <a:srgbClr val="1E293B">
+                <a:alpha val="6000"/>
+              </a:srgbClr>
+            </a:outerShdw>
+          </a:effectLst>
+        </p:spPr>
+      </p:sp>
+      <p:pic>
+        <p:nvPicPr>
+          <p:cNvPr id="8" name="Image 1" descr="preencoded.png"/>
+          <p:cNvPicPr>
+            <a:picLocks noChangeAspect="1"/>
+          </p:cNvPicPr>
+          <p:nvPr/>
+        </p:nvPicPr>
+        <p:blipFill>
+          <a:blip r:embed="rId3"/>
+          <a:stretch>
+            <a:fillRect/>
+          </a:stretch>
+        </p:blipFill>
+        <p:spPr>
+          <a:xfrm>
+            <a:off x="777240" y="2743200"/>
+            <a:ext cx="457200" cy="457200"/>
+          </a:xfrm>
+          <a:prstGeom prst="rect">
+            <a:avLst/>
+          </a:prstGeom>
+        </p:spPr>
+      </p:pic>
+      <p:sp>
+        <p:nvSpPr>
+          <p:cNvPr id="9" name="Text 5"/>
+          <p:cNvSpPr/>
+          <p:nvPr/>
+        </p:nvSpPr>
+        <p:spPr>
+          <a:xfrm>
+            <a:off x="1417320" y="2560320"/>
+            <a:ext cx="4023360" cy="868680"/>
+          </a:xfrm>
+          <a:prstGeom prst="rect">
+            <a:avLst/>
+          </a:prstGeom>
+          <a:noFill/>
+          <a:ln/>
+        </p:spPr>
+        <p:txBody>
+          <a:bodyPr wrap="square" rtlCol="0" anchor="ctr"/>
+          <a:lstStyle/>
+          <a:p>
+            <a:pPr marL="0" indent="0">
               <a:buNone/>
             </a:pPr>
             <a:r>
-              <a:rPr lang="en-US" sz="1250" dirty="0">
-                <a:solidFill>
-                  <a:srgbClr val="CBD5E1"/>
+              <a:rPr lang="en-US" sz="1200" b="1" dirty="0">
+                <a:solidFill>
+                  <a:srgbClr val="111827"/>
                 </a:solidFill>
                 <a:latin typeface="Calibri" pitchFamily="34" charset="0"/>
                 <a:ea typeface="Calibri" pitchFamily="34" charset="-122"/>
                 <a:cs typeface="Calibri" pitchFamily="34" charset="-120"/>
               </a:rPr>
-              <a:t>Lightweight RAG: on each manager question, fetch the relevant week/project's report rows from PostgreSQL and pass them as context to the LLM (Anthropic Claude) alongside the question.</a:t>
-            </a:r>
-            <a:endParaRPr lang="en-US" sz="1250" dirty="0"/>
-          </a:p>
-        </p:txBody>
-      </p:sp>
-      <p:sp>
-        <p:nvSpPr>
-          <p:cNvPr id="9" name="Shape 6"/>
-          <p:cNvSpPr/>
-          <p:nvPr/>
-        </p:nvSpPr>
-        <p:spPr>
-          <a:xfrm>
-            <a:off x="548640" y="2953512"/>
-            <a:ext cx="128016" cy="128016"/>
-          </a:xfrm>
-          <a:prstGeom prst="ellipse">
-            <a:avLst/>
-          </a:prstGeom>
-          <a:solidFill>
-            <a:srgbClr val="10B981"/>
-          </a:solidFill>
-          <a:ln/>
-        </p:spPr>
-      </p:sp>
-      <p:sp>
-        <p:nvSpPr>
-          <p:cNvPr id="10" name="Text 7"/>
-          <p:cNvSpPr/>
-          <p:nvPr/>
-        </p:nvSpPr>
-        <p:spPr>
-          <a:xfrm>
-            <a:off x="868680" y="2788920"/>
-            <a:ext cx="10607040" cy="685800"/>
+              <a:t>Preventing members from viewing/editing others' reports</a:t>
+            </a:r>
+            <a:endParaRPr lang="en-US" sz="1200" dirty="0"/>
+          </a:p>
+        </p:txBody>
+      </p:sp>
+      <p:sp>
+        <p:nvSpPr>
+          <p:cNvPr id="10" name="Text 6"/>
+          <p:cNvSpPr/>
+          <p:nvPr/>
+        </p:nvSpPr>
+        <p:spPr>
+          <a:xfrm>
+            <a:off x="5577840" y="2560320"/>
+            <a:ext cx="5852160" cy="868680"/>
           </a:xfrm>
           <a:prstGeom prst="rect">
             <a:avLst/>
@@ -8878,68 +7799,126 @@
           <a:bodyPr wrap="square" rtlCol="0" anchor="ctr"/>
           <a:lstStyle/>
           <a:p>
-            <a:pPr indent="0" marL="0">
+            <a:pPr marL="0" indent="0">
               <a:buNone/>
             </a:pPr>
             <a:r>
-              <a:rPr lang="en-US" sz="1250" b="1" dirty="0">
-                <a:solidFill>
-                  <a:srgbClr val="FFFFFF"/>
+              <a:rPr lang="en-US" sz="1100" dirty="0">
+                <a:solidFill>
+                  <a:srgbClr val="64748B"/>
                 </a:solidFill>
                 <a:latin typeface="Calibri" pitchFamily="34" charset="0"/>
                 <a:ea typeface="Calibri" pitchFamily="34" charset="-122"/>
                 <a:cs typeface="Calibri" pitchFamily="34" charset="-120"/>
               </a:rPr>
-              <a:t>Capabilities:  </a:t>
-            </a:r>
-            <a:pPr indent="0" marL="0">
+              <a:t>Ownership check happens in the controller (report.user === req.user.id), not just hidden in the frontend — verified with role-based route tests.</a:t>
+            </a:r>
+            <a:endParaRPr lang="en-US" sz="1100" dirty="0"/>
+          </a:p>
+        </p:txBody>
+      </p:sp>
+      <p:sp>
+        <p:nvSpPr>
+          <p:cNvPr id="11" name="Shape 7"/>
+          <p:cNvSpPr/>
+          <p:nvPr/>
+        </p:nvSpPr>
+        <p:spPr>
+          <a:xfrm>
+            <a:off x="548640" y="3657600"/>
+            <a:ext cx="11064240" cy="1051560"/>
+          </a:xfrm>
+          <a:prstGeom prst="roundRect">
+            <a:avLst>
+              <a:gd name="adj" fmla="val 6957"/>
+            </a:avLst>
+          </a:prstGeom>
+          <a:solidFill>
+            <a:srgbClr val="FFFFFF"/>
+          </a:solidFill>
+          <a:ln/>
+          <a:effectLst>
+            <a:outerShdw blurRad="76200" dist="25400" dir="5400000" algn="bl" rotWithShape="0">
+              <a:srgbClr val="1E293B">
+                <a:alpha val="6000"/>
+              </a:srgbClr>
+            </a:outerShdw>
+          </a:effectLst>
+        </p:spPr>
+      </p:sp>
+      <p:pic>
+        <p:nvPicPr>
+          <p:cNvPr id="12" name="Image 2" descr="preencoded.png"/>
+          <p:cNvPicPr>
+            <a:picLocks noChangeAspect="1"/>
+          </p:cNvPicPr>
+          <p:nvPr/>
+        </p:nvPicPr>
+        <p:blipFill>
+          <a:blip r:embed="rId3"/>
+          <a:stretch>
+            <a:fillRect/>
+          </a:stretch>
+        </p:blipFill>
+        <p:spPr>
+          <a:xfrm>
+            <a:off x="777240" y="3931920"/>
+            <a:ext cx="457200" cy="457200"/>
+          </a:xfrm>
+          <a:prstGeom prst="rect">
+            <a:avLst/>
+          </a:prstGeom>
+        </p:spPr>
+      </p:pic>
+      <p:sp>
+        <p:nvSpPr>
+          <p:cNvPr id="13" name="Text 8"/>
+          <p:cNvSpPr/>
+          <p:nvPr/>
+        </p:nvSpPr>
+        <p:spPr>
+          <a:xfrm>
+            <a:off x="1417320" y="3749040"/>
+            <a:ext cx="4023360" cy="868680"/>
+          </a:xfrm>
+          <a:prstGeom prst="rect">
+            <a:avLst/>
+          </a:prstGeom>
+          <a:noFill/>
+          <a:ln/>
+        </p:spPr>
+        <p:txBody>
+          <a:bodyPr wrap="square" rtlCol="0" anchor="ctr"/>
+          <a:lstStyle/>
+          <a:p>
+            <a:pPr marL="0" indent="0">
               <a:buNone/>
             </a:pPr>
             <a:r>
-              <a:rPr lang="en-US" sz="1250" dirty="0">
-                <a:solidFill>
-                  <a:srgbClr val="CBD5E1"/>
+              <a:rPr lang="en-US" sz="1200" b="1" dirty="0">
+                <a:solidFill>
+                  <a:srgbClr val="111827"/>
                 </a:solidFill>
                 <a:latin typeface="Calibri" pitchFamily="34" charset="0"/>
                 <a:ea typeface="Calibri" pitchFamily="34" charset="-122"/>
                 <a:cs typeface="Calibri" pitchFamily="34" charset="-120"/>
               </a:rPr>
-              <a:t>Conversational Q&amp;A ("What did the design team work on last week?") and an auto-generated team summary highlighting completed work, recurring blockers, and workload imbalances.</a:t>
-            </a:r>
-            <a:endParaRPr lang="en-US" sz="1250" dirty="0"/>
-          </a:p>
-        </p:txBody>
-      </p:sp>
-      <p:sp>
-        <p:nvSpPr>
-          <p:cNvPr id="11" name="Shape 8"/>
-          <p:cNvSpPr/>
-          <p:nvPr/>
-        </p:nvSpPr>
-        <p:spPr>
-          <a:xfrm>
-            <a:off x="548640" y="3730752"/>
-            <a:ext cx="128016" cy="128016"/>
-          </a:xfrm>
-          <a:prstGeom prst="ellipse">
-            <a:avLst/>
-          </a:prstGeom>
-          <a:solidFill>
-            <a:srgbClr val="10B981"/>
-          </a:solidFill>
-          <a:ln/>
-        </p:spPr>
-      </p:sp>
-      <p:sp>
-        <p:nvSpPr>
-          <p:cNvPr id="12" name="Text 9"/>
-          <p:cNvSpPr/>
-          <p:nvPr/>
-        </p:nvSpPr>
-        <p:spPr>
-          <a:xfrm>
-            <a:off x="868680" y="3566160"/>
-            <a:ext cx="10607040" cy="685800"/>
+              <a:t>Computing dashboard metrics efficiently</a:t>
+            </a:r>
+            <a:endParaRPr lang="en-US" sz="1200" dirty="0"/>
+          </a:p>
+        </p:txBody>
+      </p:sp>
+      <p:sp>
+        <p:nvSpPr>
+          <p:cNvPr id="14" name="Text 9"/>
+          <p:cNvSpPr/>
+          <p:nvPr/>
+        </p:nvSpPr>
+        <p:spPr>
+          <a:xfrm>
+            <a:off x="5577840" y="3749040"/>
+            <a:ext cx="5852160" cy="868680"/>
           </a:xfrm>
           <a:prstGeom prst="rect">
             <a:avLst/>
@@ -8951,68 +7930,126 @@
           <a:bodyPr wrap="square" rtlCol="0" anchor="ctr"/>
           <a:lstStyle/>
           <a:p>
-            <a:pPr indent="0" marL="0">
+            <a:pPr marL="0" indent="0">
               <a:buNone/>
             </a:pPr>
             <a:r>
-              <a:rPr lang="en-US" sz="1250" b="1" dirty="0">
-                <a:solidFill>
-                  <a:srgbClr val="FFFFFF"/>
+              <a:rPr lang="en-US" sz="1100" dirty="0">
+                <a:solidFill>
+                  <a:srgbClr val="64748B"/>
                 </a:solidFill>
                 <a:latin typeface="Calibri" pitchFamily="34" charset="0"/>
                 <a:ea typeface="Calibri" pitchFamily="34" charset="-122"/>
                 <a:cs typeface="Calibri" pitchFamily="34" charset="-120"/>
               </a:rPr>
-              <a:t>Data privacy:  </a:t>
-            </a:r>
-            <a:pPr indent="0" marL="0">
+              <a:t>Used SQL GROUP BY / SUM / COUNT queries (via Sequelize) directly on the reports table instead of pulling all rows into Node and computing in memory.</a:t>
+            </a:r>
+            <a:endParaRPr lang="en-US" sz="1100" dirty="0"/>
+          </a:p>
+        </p:txBody>
+      </p:sp>
+      <p:sp>
+        <p:nvSpPr>
+          <p:cNvPr id="15" name="Shape 10"/>
+          <p:cNvSpPr/>
+          <p:nvPr/>
+        </p:nvSpPr>
+        <p:spPr>
+          <a:xfrm>
+            <a:off x="548640" y="4846320"/>
+            <a:ext cx="11064240" cy="1051560"/>
+          </a:xfrm>
+          <a:prstGeom prst="roundRect">
+            <a:avLst>
+              <a:gd name="adj" fmla="val 6957"/>
+            </a:avLst>
+          </a:prstGeom>
+          <a:solidFill>
+            <a:srgbClr val="FFFFFF"/>
+          </a:solidFill>
+          <a:ln/>
+          <a:effectLst>
+            <a:outerShdw blurRad="76200" dist="25400" dir="5400000" algn="bl" rotWithShape="0">
+              <a:srgbClr val="1E293B">
+                <a:alpha val="6000"/>
+              </a:srgbClr>
+            </a:outerShdw>
+          </a:effectLst>
+        </p:spPr>
+      </p:sp>
+      <p:pic>
+        <p:nvPicPr>
+          <p:cNvPr id="16" name="Image 3" descr="preencoded.png"/>
+          <p:cNvPicPr>
+            <a:picLocks noChangeAspect="1"/>
+          </p:cNvPicPr>
+          <p:nvPr/>
+        </p:nvPicPr>
+        <p:blipFill>
+          <a:blip r:embed="rId3"/>
+          <a:stretch>
+            <a:fillRect/>
+          </a:stretch>
+        </p:blipFill>
+        <p:spPr>
+          <a:xfrm>
+            <a:off x="777240" y="5120640"/>
+            <a:ext cx="457200" cy="457200"/>
+          </a:xfrm>
+          <a:prstGeom prst="rect">
+            <a:avLst/>
+          </a:prstGeom>
+        </p:spPr>
+      </p:pic>
+      <p:sp>
+        <p:nvSpPr>
+          <p:cNvPr id="17" name="Text 11"/>
+          <p:cNvSpPr/>
+          <p:nvPr/>
+        </p:nvSpPr>
+        <p:spPr>
+          <a:xfrm>
+            <a:off x="1417320" y="4937760"/>
+            <a:ext cx="4023360" cy="868680"/>
+          </a:xfrm>
+          <a:prstGeom prst="rect">
+            <a:avLst/>
+          </a:prstGeom>
+          <a:noFill/>
+          <a:ln/>
+        </p:spPr>
+        <p:txBody>
+          <a:bodyPr wrap="square" rtlCol="0" anchor="ctr"/>
+          <a:lstStyle/>
+          <a:p>
+            <a:pPr marL="0" indent="0">
               <a:buNone/>
             </a:pPr>
             <a:r>
-              <a:rPr lang="en-US" sz="1250" dirty="0">
-                <a:solidFill>
-                  <a:srgbClr val="CBD5E1"/>
+              <a:rPr lang="en-US" sz="1200" b="1" dirty="0">
+                <a:solidFill>
+                  <a:srgbClr val="111827"/>
                 </a:solidFill>
                 <a:latin typeface="Calibri" pitchFamily="34" charset="0"/>
                 <a:ea typeface="Calibri" pitchFamily="34" charset="-122"/>
                 <a:cs typeface="Calibri" pitchFamily="34" charset="-120"/>
               </a:rPr>
-              <a:t>Only aggregated/derived text is sent to the LLM provider, scoped to what the requesting manager can already see; no raw credentials or unrelated members' data leave the server.</a:t>
-            </a:r>
-            <a:endParaRPr lang="en-US" sz="1250" dirty="0"/>
-          </a:p>
-        </p:txBody>
-      </p:sp>
-      <p:sp>
-        <p:nvSpPr>
-          <p:cNvPr id="13" name="Shape 10"/>
-          <p:cNvSpPr/>
-          <p:nvPr/>
-        </p:nvSpPr>
-        <p:spPr>
-          <a:xfrm>
-            <a:off x="548640" y="4507992"/>
-            <a:ext cx="128016" cy="128016"/>
-          </a:xfrm>
-          <a:prstGeom prst="ellipse">
-            <a:avLst/>
-          </a:prstGeom>
-          <a:solidFill>
-            <a:srgbClr val="10B981"/>
-          </a:solidFill>
-          <a:ln/>
-        </p:spPr>
-      </p:sp>
-      <p:sp>
-        <p:nvSpPr>
-          <p:cNvPr id="14" name="Text 11"/>
-          <p:cNvSpPr/>
-          <p:nvPr/>
-        </p:nvSpPr>
-        <p:spPr>
-          <a:xfrm>
-            <a:off x="868680" y="4343400"/>
-            <a:ext cx="10607040" cy="685800"/>
+              <a:t>Defining 'late' vs 'pending' submissions</a:t>
+            </a:r>
+            <a:endParaRPr lang="en-US" sz="1200" dirty="0"/>
+          </a:p>
+        </p:txBody>
+      </p:sp>
+      <p:sp>
+        <p:nvSpPr>
+          <p:cNvPr id="18" name="Text 12"/>
+          <p:cNvSpPr/>
+          <p:nvPr/>
+        </p:nvSpPr>
+        <p:spPr>
+          <a:xfrm>
+            <a:off x="5577840" y="4937760"/>
+            <a:ext cx="5852160" cy="868680"/>
           </a:xfrm>
           <a:prstGeom prst="rect">
             <a:avLst/>
@@ -9024,48 +8061,73 @@
           <a:bodyPr wrap="square" rtlCol="0" anchor="ctr"/>
           <a:lstStyle/>
           <a:p>
-            <a:pPr indent="0" marL="0">
+            <a:pPr marL="0" indent="0">
               <a:buNone/>
             </a:pPr>
             <a:r>
-              <a:rPr lang="en-US" sz="1250" b="1" dirty="0">
-                <a:solidFill>
-                  <a:srgbClr val="FFFFFF"/>
+              <a:rPr lang="en-US" sz="1100" dirty="0">
+                <a:solidFill>
+                  <a:srgbClr val="64748B"/>
                 </a:solidFill>
                 <a:latin typeface="Calibri" pitchFamily="34" charset="0"/>
                 <a:ea typeface="Calibri" pitchFamily="34" charset="-122"/>
                 <a:cs typeface="Calibri" pitchFamily="34" charset="-120"/>
               </a:rPr>
-              <a:t>UI:  </a:t>
-            </a:r>
-            <a:pPr indent="0" marL="0">
+              <a:t>A member is 'late' only once the selected week's Sunday has passed and they still haven't submitted — computed server-side per request.</a:t>
+            </a:r>
+            <a:endParaRPr lang="en-US" sz="1100" dirty="0"/>
+          </a:p>
+        </p:txBody>
+      </p:sp>
+      <p:sp>
+        <p:nvSpPr>
+          <p:cNvPr id="19" name="Text 13"/>
+          <p:cNvSpPr/>
+          <p:nvPr/>
+        </p:nvSpPr>
+        <p:spPr>
+          <a:xfrm>
+            <a:off x="457200" y="6473952"/>
+            <a:ext cx="7315200" cy="274320"/>
+          </a:xfrm>
+          <a:prstGeom prst="rect">
+            <a:avLst/>
+          </a:prstGeom>
+          <a:noFill/>
+          <a:ln/>
+        </p:spPr>
+        <p:txBody>
+          <a:bodyPr wrap="square" rtlCol="0" anchor="ctr"/>
+          <a:lstStyle/>
+          <a:p>
+            <a:pPr marL="0" indent="0">
               <a:buNone/>
             </a:pPr>
             <a:r>
-              <a:rPr lang="en-US" sz="1250" dirty="0">
-                <a:solidFill>
-                  <a:srgbClr val="CBD5E1"/>
+              <a:rPr lang="en-US" sz="900" dirty="0">
+                <a:solidFill>
+                  <a:srgbClr val="94A3B8"/>
                 </a:solidFill>
                 <a:latin typeface="Calibri" pitchFamily="34" charset="0"/>
                 <a:ea typeface="Calibri" pitchFamily="34" charset="-122"/>
                 <a:cs typeface="Calibri" pitchFamily="34" charset="-120"/>
               </a:rPr>
-              <a:t>A simple floating chat widget on the Team Dashboard, calling a new /api/assistant/query endpoint (manager-only).</a:t>
-            </a:r>
-            <a:endParaRPr lang="en-US" sz="1250" dirty="0"/>
-          </a:p>
-        </p:txBody>
-      </p:sp>
-      <p:sp>
-        <p:nvSpPr>
-          <p:cNvPr id="15" name="Text 12"/>
-          <p:cNvSpPr/>
-          <p:nvPr/>
-        </p:nvSpPr>
-        <p:spPr>
-          <a:xfrm>
-            <a:off x="457200" y="6473952"/>
-            <a:ext cx="7315200" cy="274320"/>
+              <a:t>Weekly Report Generator &amp; Team Dashboard</a:t>
+            </a:r>
+            <a:endParaRPr lang="en-US" sz="900" dirty="0"/>
+          </a:p>
+        </p:txBody>
+      </p:sp>
+      <p:sp>
+        <p:nvSpPr>
+          <p:cNvPr id="20" name="Text 14"/>
+          <p:cNvSpPr/>
+          <p:nvPr/>
+        </p:nvSpPr>
+        <p:spPr>
+          <a:xfrm>
+            <a:off x="11274552" y="6190614"/>
+            <a:ext cx="457200" cy="274320"/>
           </a:xfrm>
           <a:prstGeom prst="rect">
             <a:avLst/>
@@ -9077,7 +8139,7 @@
           <a:bodyPr wrap="square" rtlCol="0" anchor="ctr"/>
           <a:lstStyle/>
           <a:p>
-            <a:pPr indent="0" marL="0">
+            <a:pPr marL="0" indent="0" algn="r">
               <a:buNone/>
             </a:pPr>
             <a:r>
@@ -9086,46 +8148,6 @@
                   <a:srgbClr val="94A3B8"/>
                 </a:solidFill>
                 <a:latin typeface="Calibri" pitchFamily="34" charset="0"/>
-                <a:ea typeface="Calibri" pitchFamily="34" charset="-122"/>
-                <a:cs typeface="Calibri" pitchFamily="34" charset="-120"/>
-              </a:rPr>
-              <a:t>Weekly Report Generator &amp; Team Dashboard</a:t>
-            </a:r>
-            <a:endParaRPr lang="en-US" sz="900" dirty="0"/>
-          </a:p>
-        </p:txBody>
-      </p:sp>
-      <p:sp>
-        <p:nvSpPr>
-          <p:cNvPr id="16" name="Text 13"/>
-          <p:cNvSpPr/>
-          <p:nvPr/>
-        </p:nvSpPr>
-        <p:spPr>
-          <a:xfrm>
-            <a:off x="11274552" y="6473952"/>
-            <a:ext cx="457200" cy="274320"/>
-          </a:xfrm>
-          <a:prstGeom prst="rect">
-            <a:avLst/>
-          </a:prstGeom>
-          <a:noFill/>
-          <a:ln/>
-        </p:spPr>
-        <p:txBody>
-          <a:bodyPr wrap="square" rtlCol="0" anchor="ctr"/>
-          <a:lstStyle/>
-          <a:p>
-            <a:pPr algn="r" indent="0" marL="0">
-              <a:buNone/>
-            </a:pPr>
-            <a:r>
-              <a:rPr lang="en-US" sz="900" dirty="0">
-                <a:solidFill>
-                  <a:srgbClr val="94A3B8"/>
-                </a:solidFill>
-                <a:latin typeface="Calibri" pitchFamily="34" charset="0"/>
-                <a:ea typeface="Calibri" pitchFamily="34" charset="-122"/>
                 <a:cs typeface="Calibri" pitchFamily="34" charset="-120"/>
               </a:rPr>
               <a:t>8</a:t>
@@ -9144,12 +8166,13 @@
 
 <file path=ppt/slides/slide9.xml><?xml version="1.0" encoding="utf-8"?>
 <p:sld xmlns:a="http://schemas.openxmlformats.org/drawingml/2006/main" xmlns:r="http://schemas.openxmlformats.org/officeDocument/2006/relationships" xmlns:p="http://schemas.openxmlformats.org/presentationml/2006/main">
-  <p:cSld name="Slide 9">
+  <p:cSld name="Slide 10">
     <p:bg>
       <p:bgPr>
         <a:solidFill>
           <a:srgbClr val="F8FAFC"/>
         </a:solidFill>
+        <a:effectLst/>
       </p:bgPr>
     </p:bg>
     <p:spTree>
@@ -9175,7 +8198,7 @@
         <p:spPr>
           <a:xfrm>
             <a:off x="548640" y="411480"/>
-            <a:ext cx="10058400" cy="548640"/>
+            <a:ext cx="9144000" cy="548640"/>
           </a:xfrm>
           <a:prstGeom prst="rect">
             <a:avLst/>
@@ -9187,11 +8210,11 @@
           <a:bodyPr wrap="square" rtlCol="0" anchor="ctr"/>
           <a:lstStyle/>
           <a:p>
-            <a:pPr indent="0" marL="0">
+            <a:pPr marL="0" indent="0">
               <a:buNone/>
             </a:pPr>
             <a:r>
-              <a:rPr lang="en-US" sz="2600" b="1" dirty="0">
+              <a:rPr lang="en-US" sz="2800" b="1" dirty="0">
                 <a:solidFill>
                   <a:srgbClr val="111827"/>
                 </a:solidFill>
@@ -9199,9 +8222,9 @@
                 <a:ea typeface="Cambria" pitchFamily="34" charset="-122"/>
                 <a:cs typeface="Cambria" pitchFamily="34" charset="-120"/>
               </a:rPr>
-              <a:t>Challenges &amp; How They Were Solved</a:t>
-            </a:r>
-            <a:endParaRPr lang="en-US" sz="2600" dirty="0"/>
+              <a:t>Possible Future Improvements</a:t>
+            </a:r>
+            <a:endParaRPr lang="en-US" sz="2800" dirty="0"/>
           </a:p>
         </p:txBody>
       </p:sp>
@@ -9213,65 +8236,34 @@
         </p:nvSpPr>
         <p:spPr>
           <a:xfrm>
-            <a:off x="548640" y="1280160"/>
-            <a:ext cx="11064240" cy="1051560"/>
+            <a:off x="548640" y="1371600"/>
+            <a:ext cx="457200" cy="457200"/>
           </a:xfrm>
           <a:prstGeom prst="roundRect">
             <a:avLst>
-              <a:gd name="adj" fmla="val 6957"/>
+              <a:gd name="adj" fmla="val 20000"/>
             </a:avLst>
           </a:prstGeom>
           <a:solidFill>
-            <a:srgbClr val="FFFFFF"/>
+            <a:srgbClr val="3763F2"/>
           </a:solidFill>
           <a:ln/>
-          <a:effectLst>
-            <a:outerShdw sx="100000" sy="100000" kx="0" ky="0" algn="bl" rotWithShape="0" blurRad="76200" dist="25400" dir="5400000">
-              <a:srgbClr val="1E293B">
-                <a:alpha val="6000"/>
-              </a:srgbClr>
-            </a:outerShdw>
-          </a:effectLst>
-        </p:spPr>
-      </p:sp>
-      <p:pic>
-        <p:nvPicPr>
-          <p:cNvPr id="4" name="Image 0" descr="preencoded.png">    </p:cNvPr>
-          <p:cNvPicPr>
-            <a:picLocks noChangeAspect="1"/>
-          </p:cNvPicPr>
-          <p:nvPr/>
-        </p:nvPicPr>
-        <p:blipFill>
-          <a:blip r:embed="rId1"/>
-          <a:stretch>
-            <a:fillRect/>
-          </a:stretch>
-        </p:blipFill>
-        <p:spPr>
-          <a:xfrm>
-            <a:off x="777240" y="1554480"/>
+        </p:spPr>
+      </p:sp>
+      <p:sp>
+        <p:nvSpPr>
+          <p:cNvPr id="4" name="Text 2"/>
+          <p:cNvSpPr/>
+          <p:nvPr/>
+        </p:nvSpPr>
+        <p:spPr>
+          <a:xfrm>
+            <a:off x="548640" y="1371600"/>
             <a:ext cx="457200" cy="457200"/>
           </a:xfrm>
           <a:prstGeom prst="rect">
             <a:avLst/>
           </a:prstGeom>
-        </p:spPr>
-      </p:pic>
-      <p:sp>
-        <p:nvSpPr>
-          <p:cNvPr id="5" name="Text 2"/>
-          <p:cNvSpPr/>
-          <p:nvPr/>
-        </p:nvSpPr>
-        <p:spPr>
-          <a:xfrm>
-            <a:off x="1417320" y="1371600"/>
-            <a:ext cx="4023360" cy="868680"/>
-          </a:xfrm>
-          <a:prstGeom prst="rect">
-            <a:avLst/>
-          </a:prstGeom>
           <a:noFill/>
           <a:ln/>
         </p:spPr>
@@ -9279,34 +8271,34 @@
           <a:bodyPr wrap="square" rtlCol="0" anchor="ctr"/>
           <a:lstStyle/>
           <a:p>
-            <a:pPr indent="0" marL="0">
+            <a:pPr marL="0" indent="0" algn="ctr">
               <a:buNone/>
             </a:pPr>
             <a:r>
-              <a:rPr lang="en-US" sz="1200" b="1" dirty="0">
-                <a:solidFill>
-                  <a:srgbClr val="111827"/>
+              <a:rPr lang="en-US" sz="1400" b="1" dirty="0">
+                <a:solidFill>
+                  <a:srgbClr val="FFFFFF"/>
                 </a:solidFill>
                 <a:latin typeface="Calibri" pitchFamily="34" charset="0"/>
                 <a:ea typeface="Calibri" pitchFamily="34" charset="-122"/>
                 <a:cs typeface="Calibri" pitchFamily="34" charset="-120"/>
               </a:rPr>
-              <a:t>Keeping report fields identical for every user</a:t>
-            </a:r>
-            <a:endParaRPr lang="en-US" sz="1200" dirty="0"/>
-          </a:p>
-        </p:txBody>
-      </p:sp>
-      <p:sp>
-        <p:nvSpPr>
-          <p:cNvPr id="6" name="Text 3"/>
-          <p:cNvSpPr/>
-          <p:nvPr/>
-        </p:nvSpPr>
-        <p:spPr>
-          <a:xfrm>
-            <a:off x="5577840" y="1371600"/>
-            <a:ext cx="5852160" cy="868680"/>
+              <a:t>1</a:t>
+            </a:r>
+            <a:endParaRPr lang="en-US" sz="1400" dirty="0"/>
+          </a:p>
+        </p:txBody>
+      </p:sp>
+      <p:sp>
+        <p:nvSpPr>
+          <p:cNvPr id="5" name="Text 3"/>
+          <p:cNvSpPr/>
+          <p:nvPr/>
+        </p:nvSpPr>
+        <p:spPr>
+          <a:xfrm>
+            <a:off x="1188720" y="1371600"/>
+            <a:ext cx="10332720" cy="457200"/>
           </a:xfrm>
           <a:prstGeom prst="rect">
             <a:avLst/>
@@ -9318,91 +8310,60 @@
           <a:bodyPr wrap="square" rtlCol="0" anchor="ctr"/>
           <a:lstStyle/>
           <a:p>
-            <a:pPr indent="0" marL="0">
+            <a:pPr marL="0" indent="0">
               <a:buNone/>
             </a:pPr>
             <a:r>
-              <a:rPr lang="en-US" sz="1100" dirty="0">
-                <a:solidFill>
-                  <a:srgbClr val="64748B"/>
+              <a:rPr lang="en-US" sz="1350" dirty="0">
+                <a:solidFill>
+                  <a:srgbClr val="111827"/>
                 </a:solidFill>
                 <a:latin typeface="Calibri" pitchFamily="34" charset="0"/>
                 <a:ea typeface="Calibri" pitchFamily="34" charset="-122"/>
                 <a:cs typeface="Calibri" pitchFamily="34" charset="-120"/>
               </a:rPr>
-              <a:t>Enforced once in the Sequelize model definition and again in a single shared ReportForm component — no per-user customization surface exists in the UI or API.</a:t>
-            </a:r>
-            <a:endParaRPr lang="en-US" sz="1100" dirty="0"/>
-          </a:p>
-        </p:txBody>
-      </p:sp>
-      <p:sp>
-        <p:nvSpPr>
-          <p:cNvPr id="7" name="Shape 4"/>
-          <p:cNvSpPr/>
-          <p:nvPr/>
-        </p:nvSpPr>
-        <p:spPr>
-          <a:xfrm>
-            <a:off x="548640" y="2468880"/>
-            <a:ext cx="11064240" cy="1051560"/>
+              <a:t>Build the AI Chat Assistant described earlier (Q&amp;A + auto-generated team summaries)</a:t>
+            </a:r>
+            <a:endParaRPr lang="en-US" sz="1350" dirty="0"/>
+          </a:p>
+        </p:txBody>
+      </p:sp>
+      <p:sp>
+        <p:nvSpPr>
+          <p:cNvPr id="6" name="Shape 4"/>
+          <p:cNvSpPr/>
+          <p:nvPr/>
+        </p:nvSpPr>
+        <p:spPr>
+          <a:xfrm>
+            <a:off x="548640" y="2029968"/>
+            <a:ext cx="457200" cy="457200"/>
           </a:xfrm>
           <a:prstGeom prst="roundRect">
             <a:avLst>
-              <a:gd name="adj" fmla="val 6957"/>
+              <a:gd name="adj" fmla="val 20000"/>
             </a:avLst>
           </a:prstGeom>
           <a:solidFill>
-            <a:srgbClr val="FFFFFF"/>
+            <a:srgbClr val="10B981"/>
           </a:solidFill>
           <a:ln/>
-          <a:effectLst>
-            <a:outerShdw sx="100000" sy="100000" kx="0" ky="0" algn="bl" rotWithShape="0" blurRad="76200" dist="25400" dir="5400000">
-              <a:srgbClr val="1E293B">
-                <a:alpha val="6000"/>
-              </a:srgbClr>
-            </a:outerShdw>
-          </a:effectLst>
-        </p:spPr>
-      </p:sp>
-      <p:pic>
-        <p:nvPicPr>
-          <p:cNvPr id="8" name="Image 1" descr="preencoded.png">    </p:cNvPr>
-          <p:cNvPicPr>
-            <a:picLocks noChangeAspect="1"/>
-          </p:cNvPicPr>
-          <p:nvPr/>
-        </p:nvPicPr>
-        <p:blipFill>
-          <a:blip r:embed="rId2"/>
-          <a:stretch>
-            <a:fillRect/>
-          </a:stretch>
-        </p:blipFill>
-        <p:spPr>
-          <a:xfrm>
-            <a:off x="777240" y="2743200"/>
+        </p:spPr>
+      </p:sp>
+      <p:sp>
+        <p:nvSpPr>
+          <p:cNvPr id="7" name="Text 5"/>
+          <p:cNvSpPr/>
+          <p:nvPr/>
+        </p:nvSpPr>
+        <p:spPr>
+          <a:xfrm>
+            <a:off x="548640" y="2029968"/>
             <a:ext cx="457200" cy="457200"/>
           </a:xfrm>
           <a:prstGeom prst="rect">
             <a:avLst/>
           </a:prstGeom>
-        </p:spPr>
-      </p:pic>
-      <p:sp>
-        <p:nvSpPr>
-          <p:cNvPr id="9" name="Text 5"/>
-          <p:cNvSpPr/>
-          <p:nvPr/>
-        </p:nvSpPr>
-        <p:spPr>
-          <a:xfrm>
-            <a:off x="1417320" y="2560320"/>
-            <a:ext cx="4023360" cy="868680"/>
-          </a:xfrm>
-          <a:prstGeom prst="rect">
-            <a:avLst/>
-          </a:prstGeom>
           <a:noFill/>
           <a:ln/>
         </p:spPr>
@@ -9410,34 +8371,34 @@
           <a:bodyPr wrap="square" rtlCol="0" anchor="ctr"/>
           <a:lstStyle/>
           <a:p>
-            <a:pPr indent="0" marL="0">
+            <a:pPr marL="0" indent="0" algn="ctr">
               <a:buNone/>
             </a:pPr>
             <a:r>
-              <a:rPr lang="en-US" sz="1200" b="1" dirty="0">
-                <a:solidFill>
-                  <a:srgbClr val="111827"/>
+              <a:rPr lang="en-US" sz="1400" b="1" dirty="0">
+                <a:solidFill>
+                  <a:srgbClr val="FFFFFF"/>
                 </a:solidFill>
                 <a:latin typeface="Calibri" pitchFamily="34" charset="0"/>
                 <a:ea typeface="Calibri" pitchFamily="34" charset="-122"/>
                 <a:cs typeface="Calibri" pitchFamily="34" charset="-120"/>
               </a:rPr>
-              <a:t>Preventing members from viewing/editing others' reports</a:t>
-            </a:r>
-            <a:endParaRPr lang="en-US" sz="1200" dirty="0"/>
-          </a:p>
-        </p:txBody>
-      </p:sp>
-      <p:sp>
-        <p:nvSpPr>
-          <p:cNvPr id="10" name="Text 6"/>
-          <p:cNvSpPr/>
-          <p:nvPr/>
-        </p:nvSpPr>
-        <p:spPr>
-          <a:xfrm>
-            <a:off x="5577840" y="2560320"/>
-            <a:ext cx="5852160" cy="868680"/>
+              <a:t>2</a:t>
+            </a:r>
+            <a:endParaRPr lang="en-US" sz="1400" dirty="0"/>
+          </a:p>
+        </p:txBody>
+      </p:sp>
+      <p:sp>
+        <p:nvSpPr>
+          <p:cNvPr id="8" name="Text 6"/>
+          <p:cNvSpPr/>
+          <p:nvPr/>
+        </p:nvSpPr>
+        <p:spPr>
+          <a:xfrm>
+            <a:off x="1188720" y="2029968"/>
+            <a:ext cx="10332720" cy="457200"/>
           </a:xfrm>
           <a:prstGeom prst="rect">
             <a:avLst/>
@@ -9449,91 +8410,60 @@
           <a:bodyPr wrap="square" rtlCol="0" anchor="ctr"/>
           <a:lstStyle/>
           <a:p>
-            <a:pPr indent="0" marL="0">
+            <a:pPr marL="0" indent="0">
               <a:buNone/>
             </a:pPr>
             <a:r>
-              <a:rPr lang="en-US" sz="1100" dirty="0">
-                <a:solidFill>
-                  <a:srgbClr val="64748B"/>
+              <a:rPr lang="en-US" sz="1350" dirty="0">
+                <a:solidFill>
+                  <a:srgbClr val="111827"/>
                 </a:solidFill>
                 <a:latin typeface="Calibri" pitchFamily="34" charset="0"/>
                 <a:ea typeface="Calibri" pitchFamily="34" charset="-122"/>
                 <a:cs typeface="Calibri" pitchFamily="34" charset="-120"/>
               </a:rPr>
-              <a:t>Ownership check happens in the controller (report.user === req.user.id), not just hidden in the frontend — verified with role-based route tests.</a:t>
-            </a:r>
-            <a:endParaRPr lang="en-US" sz="1100" dirty="0"/>
-          </a:p>
-        </p:txBody>
-      </p:sp>
-      <p:sp>
-        <p:nvSpPr>
-          <p:cNvPr id="11" name="Shape 7"/>
-          <p:cNvSpPr/>
-          <p:nvPr/>
-        </p:nvSpPr>
-        <p:spPr>
-          <a:xfrm>
-            <a:off x="548640" y="3657600"/>
-            <a:ext cx="11064240" cy="1051560"/>
+              <a:t>Email/Slack reminders for pending or late weekly reports</a:t>
+            </a:r>
+            <a:endParaRPr lang="en-US" sz="1350" dirty="0"/>
+          </a:p>
+        </p:txBody>
+      </p:sp>
+      <p:sp>
+        <p:nvSpPr>
+          <p:cNvPr id="9" name="Shape 7"/>
+          <p:cNvSpPr/>
+          <p:nvPr/>
+        </p:nvSpPr>
+        <p:spPr>
+          <a:xfrm>
+            <a:off x="548640" y="2688336"/>
+            <a:ext cx="457200" cy="457200"/>
           </a:xfrm>
           <a:prstGeom prst="roundRect">
             <a:avLst>
-              <a:gd name="adj" fmla="val 6957"/>
+              <a:gd name="adj" fmla="val 20000"/>
             </a:avLst>
           </a:prstGeom>
           <a:solidFill>
-            <a:srgbClr val="FFFFFF"/>
+            <a:srgbClr val="3763F2"/>
           </a:solidFill>
           <a:ln/>
-          <a:effectLst>
-            <a:outerShdw sx="100000" sy="100000" kx="0" ky="0" algn="bl" rotWithShape="0" blurRad="76200" dist="25400" dir="5400000">
-              <a:srgbClr val="1E293B">
-                <a:alpha val="6000"/>
-              </a:srgbClr>
-            </a:outerShdw>
-          </a:effectLst>
-        </p:spPr>
-      </p:sp>
-      <p:pic>
-        <p:nvPicPr>
-          <p:cNvPr id="12" name="Image 2" descr="preencoded.png">    </p:cNvPr>
-          <p:cNvPicPr>
-            <a:picLocks noChangeAspect="1"/>
-          </p:cNvPicPr>
-          <p:nvPr/>
-        </p:nvPicPr>
-        <p:blipFill>
-          <a:blip r:embed="rId3"/>
-          <a:stretch>
-            <a:fillRect/>
-          </a:stretch>
-        </p:blipFill>
-        <p:spPr>
-          <a:xfrm>
-            <a:off x="777240" y="3931920"/>
+        </p:spPr>
+      </p:sp>
+      <p:sp>
+        <p:nvSpPr>
+          <p:cNvPr id="10" name="Text 8"/>
+          <p:cNvSpPr/>
+          <p:nvPr/>
+        </p:nvSpPr>
+        <p:spPr>
+          <a:xfrm>
+            <a:off x="548640" y="2688336"/>
             <a:ext cx="457200" cy="457200"/>
           </a:xfrm>
           <a:prstGeom prst="rect">
             <a:avLst/>
           </a:prstGeom>
-        </p:spPr>
-      </p:pic>
-      <p:sp>
-        <p:nvSpPr>
-          <p:cNvPr id="13" name="Text 8"/>
-          <p:cNvSpPr/>
-          <p:nvPr/>
-        </p:nvSpPr>
-        <p:spPr>
-          <a:xfrm>
-            <a:off x="1417320" y="3749040"/>
-            <a:ext cx="4023360" cy="868680"/>
-          </a:xfrm>
-          <a:prstGeom prst="rect">
-            <a:avLst/>
-          </a:prstGeom>
           <a:noFill/>
           <a:ln/>
         </p:spPr>
@@ -9541,34 +8471,34 @@
           <a:bodyPr wrap="square" rtlCol="0" anchor="ctr"/>
           <a:lstStyle/>
           <a:p>
-            <a:pPr indent="0" marL="0">
+            <a:pPr marL="0" indent="0" algn="ctr">
               <a:buNone/>
             </a:pPr>
             <a:r>
-              <a:rPr lang="en-US" sz="1200" b="1" dirty="0">
-                <a:solidFill>
-                  <a:srgbClr val="111827"/>
+              <a:rPr lang="en-US" sz="1400" b="1" dirty="0">
+                <a:solidFill>
+                  <a:srgbClr val="FFFFFF"/>
                 </a:solidFill>
                 <a:latin typeface="Calibri" pitchFamily="34" charset="0"/>
                 <a:ea typeface="Calibri" pitchFamily="34" charset="-122"/>
                 <a:cs typeface="Calibri" pitchFamily="34" charset="-120"/>
               </a:rPr>
-              <a:t>Computing dashboard metrics efficiently</a:t>
-            </a:r>
-            <a:endParaRPr lang="en-US" sz="1200" dirty="0"/>
-          </a:p>
-        </p:txBody>
-      </p:sp>
-      <p:sp>
-        <p:nvSpPr>
-          <p:cNvPr id="14" name="Text 9"/>
-          <p:cNvSpPr/>
-          <p:nvPr/>
-        </p:nvSpPr>
-        <p:spPr>
-          <a:xfrm>
-            <a:off x="5577840" y="3749040"/>
-            <a:ext cx="5852160" cy="868680"/>
+              <a:t>3</a:t>
+            </a:r>
+            <a:endParaRPr lang="en-US" sz="1400" dirty="0"/>
+          </a:p>
+        </p:txBody>
+      </p:sp>
+      <p:sp>
+        <p:nvSpPr>
+          <p:cNvPr id="11" name="Text 9"/>
+          <p:cNvSpPr/>
+          <p:nvPr/>
+        </p:nvSpPr>
+        <p:spPr>
+          <a:xfrm>
+            <a:off x="1188720" y="2688336"/>
+            <a:ext cx="10332720" cy="457200"/>
           </a:xfrm>
           <a:prstGeom prst="rect">
             <a:avLst/>
@@ -9580,91 +8510,60 @@
           <a:bodyPr wrap="square" rtlCol="0" anchor="ctr"/>
           <a:lstStyle/>
           <a:p>
-            <a:pPr indent="0" marL="0">
+            <a:pPr marL="0" indent="0">
               <a:buNone/>
             </a:pPr>
             <a:r>
-              <a:rPr lang="en-US" sz="1100" dirty="0">
-                <a:solidFill>
-                  <a:srgbClr val="64748B"/>
+              <a:rPr lang="en-US" sz="1350" dirty="0">
+                <a:solidFill>
+                  <a:srgbClr val="111827"/>
                 </a:solidFill>
                 <a:latin typeface="Calibri" pitchFamily="34" charset="0"/>
                 <a:ea typeface="Calibri" pitchFamily="34" charset="-122"/>
                 <a:cs typeface="Calibri" pitchFamily="34" charset="-120"/>
               </a:rPr>
-              <a:t>Used SQL GROUP BY / SUM / COUNT queries (via Sequelize) directly on the reports table instead of pulling all rows into Node and computing in memory.</a:t>
-            </a:r>
-            <a:endParaRPr lang="en-US" sz="1100" dirty="0"/>
-          </a:p>
-        </p:txBody>
-      </p:sp>
-      <p:sp>
-        <p:nvSpPr>
-          <p:cNvPr id="15" name="Shape 10"/>
-          <p:cNvSpPr/>
-          <p:nvPr/>
-        </p:nvSpPr>
-        <p:spPr>
-          <a:xfrm>
-            <a:off x="548640" y="4846320"/>
-            <a:ext cx="11064240" cy="1051560"/>
+              <a:t>Refresh-token rotation instead of long-lived JWTs, plus rate limiting on auth routes</a:t>
+            </a:r>
+            <a:endParaRPr lang="en-US" sz="1350" dirty="0"/>
+          </a:p>
+        </p:txBody>
+      </p:sp>
+      <p:sp>
+        <p:nvSpPr>
+          <p:cNvPr id="12" name="Shape 10"/>
+          <p:cNvSpPr/>
+          <p:nvPr/>
+        </p:nvSpPr>
+        <p:spPr>
+          <a:xfrm>
+            <a:off x="548640" y="3346704"/>
+            <a:ext cx="457200" cy="457200"/>
           </a:xfrm>
           <a:prstGeom prst="roundRect">
             <a:avLst>
-              <a:gd name="adj" fmla="val 6957"/>
+              <a:gd name="adj" fmla="val 20000"/>
             </a:avLst>
           </a:prstGeom>
           <a:solidFill>
-            <a:srgbClr val="FFFFFF"/>
+            <a:srgbClr val="10B981"/>
           </a:solidFill>
           <a:ln/>
-          <a:effectLst>
-            <a:outerShdw sx="100000" sy="100000" kx="0" ky="0" algn="bl" rotWithShape="0" blurRad="76200" dist="25400" dir="5400000">
-              <a:srgbClr val="1E293B">
-                <a:alpha val="6000"/>
-              </a:srgbClr>
-            </a:outerShdw>
-          </a:effectLst>
-        </p:spPr>
-      </p:sp>
-      <p:pic>
-        <p:nvPicPr>
-          <p:cNvPr id="16" name="Image 3" descr="preencoded.png">    </p:cNvPr>
-          <p:cNvPicPr>
-            <a:picLocks noChangeAspect="1"/>
-          </p:cNvPicPr>
-          <p:nvPr/>
-        </p:nvPicPr>
-        <p:blipFill>
-          <a:blip r:embed="rId4"/>
-          <a:stretch>
-            <a:fillRect/>
-          </a:stretch>
-        </p:blipFill>
-        <p:spPr>
-          <a:xfrm>
-            <a:off x="777240" y="5120640"/>
+        </p:spPr>
+      </p:sp>
+      <p:sp>
+        <p:nvSpPr>
+          <p:cNvPr id="13" name="Text 11"/>
+          <p:cNvSpPr/>
+          <p:nvPr/>
+        </p:nvSpPr>
+        <p:spPr>
+          <a:xfrm>
+            <a:off x="548640" y="3346704"/>
             <a:ext cx="457200" cy="457200"/>
           </a:xfrm>
           <a:prstGeom prst="rect">
             <a:avLst/>
           </a:prstGeom>
-        </p:spPr>
-      </p:pic>
-      <p:sp>
-        <p:nvSpPr>
-          <p:cNvPr id="17" name="Text 11"/>
-          <p:cNvSpPr/>
-          <p:nvPr/>
-        </p:nvSpPr>
-        <p:spPr>
-          <a:xfrm>
-            <a:off x="1417320" y="4937760"/>
-            <a:ext cx="4023360" cy="868680"/>
-          </a:xfrm>
-          <a:prstGeom prst="rect">
-            <a:avLst/>
-          </a:prstGeom>
           <a:noFill/>
           <a:ln/>
         </p:spPr>
@@ -9672,34 +8571,56 @@
           <a:bodyPr wrap="square" rtlCol="0" anchor="ctr"/>
           <a:lstStyle/>
           <a:p>
-            <a:pPr indent="0" marL="0">
+            <a:pPr marL="0" indent="0" algn="ctr">
               <a:buNone/>
             </a:pPr>
             <a:r>
-              <a:rPr lang="en-US" sz="1200" b="1" dirty="0">
-                <a:solidFill>
-                  <a:srgbClr val="111827"/>
+              <a:rPr lang="en-US" sz="1400" b="1" dirty="0">
+                <a:solidFill>
+                  <a:srgbClr val="FFFFFF"/>
                 </a:solidFill>
                 <a:latin typeface="Calibri" pitchFamily="34" charset="0"/>
                 <a:ea typeface="Calibri" pitchFamily="34" charset="-122"/>
                 <a:cs typeface="Calibri" pitchFamily="34" charset="-120"/>
               </a:rPr>
-              <a:t>Defining 'late' vs 'pending' submissions</a:t>
-            </a:r>
-            <a:endParaRPr lang="en-US" sz="1200" dirty="0"/>
-          </a:p>
-        </p:txBody>
-      </p:sp>
-      <p:sp>
-        <p:nvSpPr>
-          <p:cNvPr id="18" name="Text 12"/>
-          <p:cNvSpPr/>
-          <p:nvPr/>
-        </p:nvSpPr>
-        <p:spPr>
-          <a:xfrm>
-            <a:off x="5577840" y="4937760"/>
-            <a:ext cx="5852160" cy="868680"/>
+              <a:t>4</a:t>
+            </a:r>
+            <a:endParaRPr lang="en-US" sz="1400" dirty="0"/>
+          </a:p>
+        </p:txBody>
+      </p:sp>
+      <p:sp>
+        <p:nvSpPr>
+          <p:cNvPr id="15" name="Shape 13"/>
+          <p:cNvSpPr/>
+          <p:nvPr/>
+        </p:nvSpPr>
+        <p:spPr>
+          <a:xfrm>
+            <a:off x="548640" y="4005072"/>
+            <a:ext cx="457200" cy="457200"/>
+          </a:xfrm>
+          <a:prstGeom prst="roundRect">
+            <a:avLst>
+              <a:gd name="adj" fmla="val 20000"/>
+            </a:avLst>
+          </a:prstGeom>
+          <a:solidFill>
+            <a:srgbClr val="3763F2"/>
+          </a:solidFill>
+          <a:ln/>
+        </p:spPr>
+      </p:sp>
+      <p:sp>
+        <p:nvSpPr>
+          <p:cNvPr id="16" name="Text 14"/>
+          <p:cNvSpPr/>
+          <p:nvPr/>
+        </p:nvSpPr>
+        <p:spPr>
+          <a:xfrm>
+            <a:off x="548640" y="4005072"/>
+            <a:ext cx="457200" cy="457200"/>
           </a:xfrm>
           <a:prstGeom prst="rect">
             <a:avLst/>
@@ -9711,34 +8632,34 @@
           <a:bodyPr wrap="square" rtlCol="0" anchor="ctr"/>
           <a:lstStyle/>
           <a:p>
-            <a:pPr indent="0" marL="0">
+            <a:pPr marL="0" indent="0" algn="ctr">
               <a:buNone/>
             </a:pPr>
             <a:r>
-              <a:rPr lang="en-US" sz="1100" dirty="0">
-                <a:solidFill>
-                  <a:srgbClr val="64748B"/>
+              <a:rPr lang="en-US" sz="1400" b="1" dirty="0">
+                <a:solidFill>
+                  <a:srgbClr val="FFFFFF"/>
                 </a:solidFill>
                 <a:latin typeface="Calibri" pitchFamily="34" charset="0"/>
                 <a:ea typeface="Calibri" pitchFamily="34" charset="-122"/>
                 <a:cs typeface="Calibri" pitchFamily="34" charset="-120"/>
               </a:rPr>
-              <a:t>A member is 'late' only once the selected week's Sunday has passed and they still haven't submitted — computed server-side per request.</a:t>
-            </a:r>
-            <a:endParaRPr lang="en-US" sz="1100" dirty="0"/>
-          </a:p>
-        </p:txBody>
-      </p:sp>
-      <p:sp>
-        <p:nvSpPr>
-          <p:cNvPr id="19" name="Text 13"/>
-          <p:cNvSpPr/>
-          <p:nvPr/>
-        </p:nvSpPr>
-        <p:spPr>
-          <a:xfrm>
-            <a:off x="457200" y="6473952"/>
-            <a:ext cx="7315200" cy="274320"/>
+              <a:t>5</a:t>
+            </a:r>
+            <a:endParaRPr lang="en-US" sz="1400" dirty="0"/>
+          </a:p>
+        </p:txBody>
+      </p:sp>
+      <p:sp>
+        <p:nvSpPr>
+          <p:cNvPr id="17" name="Text 15"/>
+          <p:cNvSpPr/>
+          <p:nvPr/>
+        </p:nvSpPr>
+        <p:spPr>
+          <a:xfrm>
+            <a:off x="1188720" y="4005072"/>
+            <a:ext cx="10332720" cy="457200"/>
           </a:xfrm>
           <a:prstGeom prst="rect">
             <a:avLst/>
@@ -9750,34 +8671,34 @@
           <a:bodyPr wrap="square" rtlCol="0" anchor="ctr"/>
           <a:lstStyle/>
           <a:p>
-            <a:pPr indent="0" marL="0">
+            <a:pPr marL="0" indent="0">
               <a:buNone/>
             </a:pPr>
             <a:r>
-              <a:rPr lang="en-US" sz="900" dirty="0">
-                <a:solidFill>
-                  <a:srgbClr val="94A3B8"/>
+              <a:rPr lang="en-US" sz="1350" dirty="0">
+                <a:solidFill>
+                  <a:srgbClr val="111827"/>
                 </a:solidFill>
                 <a:latin typeface="Calibri" pitchFamily="34" charset="0"/>
                 <a:ea typeface="Calibri" pitchFamily="34" charset="-122"/>
                 <a:cs typeface="Calibri" pitchFamily="34" charset="-120"/>
               </a:rPr>
-              <a:t>Weekly Report Generator &amp; Team Dashboard</a:t>
-            </a:r>
-            <a:endParaRPr lang="en-US" sz="900" dirty="0"/>
-          </a:p>
-        </p:txBody>
-      </p:sp>
-      <p:sp>
-        <p:nvSpPr>
-          <p:cNvPr id="20" name="Text 14"/>
-          <p:cNvSpPr/>
-          <p:nvPr/>
-        </p:nvSpPr>
-        <p:spPr>
-          <a:xfrm>
-            <a:off x="11274552" y="6473952"/>
-            <a:ext cx="457200" cy="274320"/>
+              <a:t>Exportable PDF/CSV weekly summaries for managers and stakeholders</a:t>
+            </a:r>
+            <a:endParaRPr lang="en-US" sz="1350" dirty="0"/>
+          </a:p>
+        </p:txBody>
+      </p:sp>
+      <p:sp>
+        <p:nvSpPr>
+          <p:cNvPr id="19" name="Text 17"/>
+          <p:cNvSpPr/>
+          <p:nvPr/>
+        </p:nvSpPr>
+        <p:spPr>
+          <a:xfrm>
+            <a:off x="548640" y="4663440"/>
+            <a:ext cx="457200" cy="457200"/>
           </a:xfrm>
           <a:prstGeom prst="rect">
             <a:avLst/>
@@ -9789,16 +8710,121 @@
           <a:bodyPr wrap="square" rtlCol="0" anchor="ctr"/>
           <a:lstStyle/>
           <a:p>
-            <a:pPr algn="r" indent="0" marL="0">
+            <a:pPr marL="0" indent="0" algn="ctr">
               <a:buNone/>
             </a:pPr>
-            <a:r>
-              <a:rPr lang="en-US" sz="900" dirty="0">
-                <a:solidFill>
-                  <a:srgbClr val="94A3B8"/>
+            <a:endParaRPr lang="en-US" sz="1400" dirty="0"/>
+          </a:p>
+        </p:txBody>
+      </p:sp>
+      <p:sp>
+        <p:nvSpPr>
+          <p:cNvPr id="20" name="Text 18"/>
+          <p:cNvSpPr/>
+          <p:nvPr/>
+        </p:nvSpPr>
+        <p:spPr>
+          <a:xfrm>
+            <a:off x="1188720" y="3335113"/>
+            <a:ext cx="10332720" cy="457200"/>
+          </a:xfrm>
+          <a:prstGeom prst="rect">
+            <a:avLst/>
+          </a:prstGeom>
+          <a:noFill/>
+          <a:ln/>
+        </p:spPr>
+        <p:txBody>
+          <a:bodyPr wrap="square" rtlCol="0" anchor="ctr"/>
+          <a:lstStyle/>
+          <a:p>
+            <a:pPr marL="0" indent="0">
+              <a:buNone/>
+            </a:pPr>
+            <a:r>
+              <a:rPr lang="en-US" sz="1350" dirty="0">
+                <a:solidFill>
+                  <a:srgbClr val="111827"/>
                 </a:solidFill>
                 <a:latin typeface="Calibri" pitchFamily="34" charset="0"/>
                 <a:ea typeface="Calibri" pitchFamily="34" charset="-122"/>
+                <a:cs typeface="Calibri" pitchFamily="34" charset="-120"/>
+              </a:rPr>
+              <a:t>Automated tests (Jest/Supertest) covering role-based access boundaries</a:t>
+            </a:r>
+            <a:endParaRPr lang="en-US" sz="1350" dirty="0"/>
+          </a:p>
+        </p:txBody>
+      </p:sp>
+      <p:sp>
+        <p:nvSpPr>
+          <p:cNvPr id="21" name="Text 19"/>
+          <p:cNvSpPr/>
+          <p:nvPr/>
+        </p:nvSpPr>
+        <p:spPr>
+          <a:xfrm>
+            <a:off x="457200" y="6473952"/>
+            <a:ext cx="7315200" cy="274320"/>
+          </a:xfrm>
+          <a:prstGeom prst="rect">
+            <a:avLst/>
+          </a:prstGeom>
+          <a:noFill/>
+          <a:ln/>
+        </p:spPr>
+        <p:txBody>
+          <a:bodyPr wrap="square" rtlCol="0" anchor="ctr"/>
+          <a:lstStyle/>
+          <a:p>
+            <a:pPr marL="0" indent="0">
+              <a:buNone/>
+            </a:pPr>
+            <a:r>
+              <a:rPr lang="en-US" sz="900" dirty="0">
+                <a:solidFill>
+                  <a:srgbClr val="94A3B8"/>
+                </a:solidFill>
+                <a:latin typeface="Calibri" pitchFamily="34" charset="0"/>
+                <a:ea typeface="Calibri" pitchFamily="34" charset="-122"/>
+                <a:cs typeface="Calibri" pitchFamily="34" charset="-120"/>
+              </a:rPr>
+              <a:t>Weekly Report Generator &amp; Team Dashboard</a:t>
+            </a:r>
+            <a:endParaRPr lang="en-US" sz="900" dirty="0"/>
+          </a:p>
+        </p:txBody>
+      </p:sp>
+      <p:sp>
+        <p:nvSpPr>
+          <p:cNvPr id="22" name="Text 20"/>
+          <p:cNvSpPr/>
+          <p:nvPr/>
+        </p:nvSpPr>
+        <p:spPr>
+          <a:xfrm>
+            <a:off x="11274552" y="6048949"/>
+            <a:ext cx="457200" cy="274320"/>
+          </a:xfrm>
+          <a:prstGeom prst="rect">
+            <a:avLst/>
+          </a:prstGeom>
+          <a:noFill/>
+          <a:ln/>
+        </p:spPr>
+        <p:txBody>
+          <a:bodyPr wrap="square" rtlCol="0" anchor="ctr"/>
+          <a:lstStyle/>
+          <a:p>
+            <a:pPr marL="0" indent="0" algn="r">
+              <a:buNone/>
+            </a:pPr>
+            <a:r>
+              <a:rPr lang="en-US" sz="900" dirty="0">
+                <a:solidFill>
+                  <a:srgbClr val="94A3B8"/>
+                </a:solidFill>
+                <a:latin typeface="Calibri" pitchFamily="34" charset="0"/>
                 <a:cs typeface="Calibri" pitchFamily="34" charset="-120"/>
               </a:rPr>
               <a:t>9</a:t>
@@ -10108,4 +9134,265 @@
     </a:ext>
   </a:extLst>
 </a:theme>
+</file>
+
+<file path=ppt/theme/theme2.xml><?xml version="1.0" encoding="utf-8"?>
+<a:theme xmlns:a="http://schemas.openxmlformats.org/drawingml/2006/main" name="Office Theme">
+  <a:themeElements>
+    <a:clrScheme name="Office">
+      <a:dk1>
+        <a:sysClr val="windowText" lastClr="000000"/>
+      </a:dk1>
+      <a:lt1>
+        <a:sysClr val="window" lastClr="FFFFFF"/>
+      </a:lt1>
+      <a:dk2>
+        <a:srgbClr val="44546A"/>
+      </a:dk2>
+      <a:lt2>
+        <a:srgbClr val="E7E6E6"/>
+      </a:lt2>
+      <a:accent1>
+        <a:srgbClr val="5B9BD5"/>
+      </a:accent1>
+      <a:accent2>
+        <a:srgbClr val="ED7D31"/>
+      </a:accent2>
+      <a:accent3>
+        <a:srgbClr val="A5A5A5"/>
+      </a:accent3>
+      <a:accent4>
+        <a:srgbClr val="FFC000"/>
+      </a:accent4>
+      <a:accent5>
+        <a:srgbClr val="4472C4"/>
+      </a:accent5>
+      <a:accent6>
+        <a:srgbClr val="70AD47"/>
+      </a:accent6>
+      <a:hlink>
+        <a:srgbClr val="0563C1"/>
+      </a:hlink>
+      <a:folHlink>
+        <a:srgbClr val="954F72"/>
+      </a:folHlink>
+    </a:clrScheme>
+    <a:fontScheme name="Office">
+      <a:majorFont>
+        <a:latin typeface="Calibri Light" panose="020F0302020204030204"/>
+        <a:ea typeface=""/>
+        <a:cs typeface=""/>
+        <a:font script="Jpan" typeface="ＭＳ Ｐゴシック"/>
+        <a:font script="Hang" typeface="맑은 고딕"/>
+        <a:font script="Hans" typeface="宋体"/>
+        <a:font script="Hant" typeface="新細明體"/>
+        <a:font script="Arab" typeface="Times New Roman"/>
+        <a:font script="Hebr" typeface="Times New Roman"/>
+        <a:font script="Thai" typeface="Angsana New"/>
+        <a:font script="Ethi" typeface="Nyala"/>
+        <a:font script="Beng" typeface="Vrinda"/>
+        <a:font script="Gujr" typeface="Shruti"/>
+        <a:font script="Khmr" typeface="MoolBoran"/>
+        <a:font script="Knda" typeface="Tunga"/>
+        <a:font script="Guru" typeface="Raavi"/>
+        <a:font script="Cans" typeface="Euphemia"/>
+        <a:font script="Cher" typeface="Plantagenet Cherokee"/>
+        <a:font script="Yiii" typeface="Microsoft Yi Baiti"/>
+        <a:font script="Tibt" typeface="Microsoft Himalaya"/>
+        <a:font script="Thaa" typeface="MV Boli"/>
+        <a:font script="Deva" typeface="Mangal"/>
+        <a:font script="Telu" typeface="Gautami"/>
+        <a:font script="Taml" typeface="Latha"/>
+        <a:font script="Syrc" typeface="Estrangelo Edessa"/>
+        <a:font script="Orya" typeface="Kalinga"/>
+        <a:font script="Mlym" typeface="Kartika"/>
+        <a:font script="Laoo" typeface="DokChampa"/>
+        <a:font script="Sinh" typeface="Iskoola Pota"/>
+        <a:font script="Mong" typeface="Mongolian Baiti"/>
+        <a:font script="Viet" typeface="Times New Roman"/>
+        <a:font script="Uigh" typeface="Microsoft Uighur"/>
+        <a:font script="Geor" typeface="Sylfaen"/>
+      </a:majorFont>
+      <a:minorFont>
+        <a:latin typeface="Calibri" panose="020F0502020204030204"/>
+        <a:ea typeface=""/>
+        <a:cs typeface=""/>
+        <a:font script="Jpan" typeface="ＭＳ Ｐゴシック"/>
+        <a:font script="Hang" typeface="맑은 고딕"/>
+        <a:font script="Hans" typeface="宋体"/>
+        <a:font script="Hant" typeface="新細明體"/>
+        <a:font script="Arab" typeface="Arial"/>
+        <a:font script="Hebr" typeface="Arial"/>
+        <a:font script="Thai" typeface="Cordia New"/>
+        <a:font script="Ethi" typeface="Nyala"/>
+        <a:font script="Beng" typeface="Vrinda"/>
+        <a:font script="Gujr" typeface="Shruti"/>
+        <a:font script="Khmr" typeface="DaunPenh"/>
+        <a:font script="Knda" typeface="Tunga"/>
+        <a:font script="Guru" typeface="Raavi"/>
+        <a:font script="Cans" typeface="Euphemia"/>
+        <a:font script="Cher" typeface="Plantagenet Cherokee"/>
+        <a:font script="Yiii" typeface="Microsoft Yi Baiti"/>
+        <a:font script="Tibt" typeface="Microsoft Himalaya"/>
+        <a:font script="Thaa" typeface="MV Boli"/>
+        <a:font script="Deva" typeface="Mangal"/>
+        <a:font script="Telu" typeface="Gautami"/>
+        <a:font script="Taml" typeface="Latha"/>
+        <a:font script="Syrc" typeface="Estrangelo Edessa"/>
+        <a:font script="Orya" typeface="Kalinga"/>
+        <a:font script="Mlym" typeface="Kartika"/>
+        <a:font script="Laoo" typeface="DokChampa"/>
+        <a:font script="Sinh" typeface="Iskoola Pota"/>
+        <a:font script="Mong" typeface="Mongolian Baiti"/>
+        <a:font script="Viet" typeface="Arial"/>
+        <a:font script="Uigh" typeface="Microsoft Uighur"/>
+        <a:font script="Geor" typeface="Sylfaen"/>
+      </a:minorFont>
+    </a:fontScheme>
+    <a:fmtScheme name="Office">
+      <a:fillStyleLst>
+        <a:solidFill>
+          <a:schemeClr val="phClr"/>
+        </a:solidFill>
+        <a:gradFill rotWithShape="1">
+          <a:gsLst>
+            <a:gs pos="0">
+              <a:schemeClr val="phClr">
+                <a:lumMod val="110000"/>
+                <a:satMod val="105000"/>
+                <a:tint val="67000"/>
+              </a:schemeClr>
+            </a:gs>
+            <a:gs pos="50000">
+              <a:schemeClr val="phClr">
+                <a:lumMod val="105000"/>
+                <a:satMod val="103000"/>
+                <a:tint val="73000"/>
+              </a:schemeClr>
+            </a:gs>
+            <a:gs pos="100000">
+              <a:schemeClr val="phClr">
+                <a:lumMod val="105000"/>
+                <a:satMod val="109000"/>
+                <a:tint val="81000"/>
+              </a:schemeClr>
+            </a:gs>
+          </a:gsLst>
+          <a:lin ang="5400000" scaled="0"/>
+        </a:gradFill>
+        <a:gradFill rotWithShape="1">
+          <a:gsLst>
+            <a:gs pos="0">
+              <a:schemeClr val="phClr">
+                <a:satMod val="103000"/>
+                <a:lumMod val="102000"/>
+                <a:tint val="94000"/>
+              </a:schemeClr>
+            </a:gs>
+            <a:gs pos="50000">
+              <a:schemeClr val="phClr">
+                <a:satMod val="110000"/>
+                <a:lumMod val="100000"/>
+                <a:shade val="100000"/>
+              </a:schemeClr>
+            </a:gs>
+            <a:gs pos="100000">
+              <a:schemeClr val="phClr">
+                <a:lumMod val="99000"/>
+                <a:satMod val="120000"/>
+                <a:shade val="78000"/>
+              </a:schemeClr>
+            </a:gs>
+          </a:gsLst>
+          <a:lin ang="5400000" scaled="0"/>
+        </a:gradFill>
+      </a:fillStyleLst>
+      <a:lnStyleLst>
+        <a:ln w="6350" cap="flat" cmpd="sng" algn="ctr">
+          <a:solidFill>
+            <a:schemeClr val="phClr"/>
+          </a:solidFill>
+          <a:prstDash val="solid"/>
+          <a:miter lim="800000"/>
+        </a:ln>
+        <a:ln w="12700" cap="flat" cmpd="sng" algn="ctr">
+          <a:solidFill>
+            <a:schemeClr val="phClr"/>
+          </a:solidFill>
+          <a:prstDash val="solid"/>
+          <a:miter lim="800000"/>
+        </a:ln>
+        <a:ln w="19050" cap="flat" cmpd="sng" algn="ctr">
+          <a:solidFill>
+            <a:schemeClr val="phClr"/>
+          </a:solidFill>
+          <a:prstDash val="solid"/>
+          <a:miter lim="800000"/>
+        </a:ln>
+      </a:lnStyleLst>
+      <a:effectStyleLst>
+        <a:effectStyle>
+          <a:effectLst/>
+        </a:effectStyle>
+        <a:effectStyle>
+          <a:effectLst/>
+        </a:effectStyle>
+        <a:effectStyle>
+          <a:effectLst>
+            <a:outerShdw blurRad="57150" dist="19050" dir="5400000" algn="ctr" rotWithShape="0">
+              <a:srgbClr val="000000">
+                <a:alpha val="63000"/>
+              </a:srgbClr>
+            </a:outerShdw>
+          </a:effectLst>
+        </a:effectStyle>
+      </a:effectStyleLst>
+      <a:bgFillStyleLst>
+        <a:solidFill>
+          <a:schemeClr val="phClr"/>
+        </a:solidFill>
+        <a:solidFill>
+          <a:schemeClr val="phClr">
+            <a:tint val="95000"/>
+            <a:satMod val="170000"/>
+          </a:schemeClr>
+        </a:solidFill>
+        <a:gradFill rotWithShape="1">
+          <a:gsLst>
+            <a:gs pos="0">
+              <a:schemeClr val="phClr">
+                <a:tint val="93000"/>
+                <a:satMod val="150000"/>
+                <a:shade val="98000"/>
+                <a:lumMod val="102000"/>
+              </a:schemeClr>
+            </a:gs>
+            <a:gs pos="50000">
+              <a:schemeClr val="phClr">
+                <a:tint val="98000"/>
+                <a:satMod val="130000"/>
+                <a:shade val="90000"/>
+                <a:lumMod val="103000"/>
+              </a:schemeClr>
+            </a:gs>
+            <a:gs pos="100000">
+              <a:schemeClr val="phClr">
+                <a:shade val="63000"/>
+                <a:satMod val="120000"/>
+              </a:schemeClr>
+            </a:gs>
+          </a:gsLst>
+          <a:lin ang="5400000" scaled="0"/>
+        </a:gradFill>
+      </a:bgFillStyleLst>
+    </a:fmtScheme>
+  </a:themeElements>
+  <a:objectDefaults/>
+  <a:extraClrSchemeLst/>
+  <a:extLst>
+    <a:ext uri="{05A4C25C-085E-4340-85A3-A5531E510DB2}">
+      <thm15:themeFamily xmlns:thm15="http://schemas.microsoft.com/office/thememl/2012/main" name="Office Theme" id="{62F939B6-93AF-4DB8-9C6B-D6C7DFDC589F}" vid="{4A3C46E8-61CC-4603-A589-7422A47A8E4A}"/>
+    </a:ext>
+  </a:extLst>
+</a:theme>
 </file>
--- a/Weekly_Report_Dashboard_Presentation.pptx
+++ b/Weekly_Report_Dashboard_Presentation.pptx
@@ -2840,7 +2840,7 @@
         </p:nvSpPr>
         <p:spPr>
           <a:xfrm>
-            <a:off x="731520" y="2103120"/>
+            <a:off x="731520" y="1508744"/>
             <a:ext cx="7315200" cy="914400"/>
           </a:xfrm>
           <a:prstGeom prst="rect">
@@ -2879,7 +2879,7 @@
         </p:nvSpPr>
         <p:spPr>
           <a:xfrm>
-            <a:off x="731520" y="2971800"/>
+            <a:off x="731520" y="2223312"/>
             <a:ext cx="9144000" cy="457200"/>
           </a:xfrm>
           <a:prstGeom prst="rect">
@@ -2918,7 +2918,7 @@
         </p:nvSpPr>
         <p:spPr>
           <a:xfrm>
-            <a:off x="1078531" y="4174236"/>
+            <a:off x="1070234" y="5139991"/>
             <a:ext cx="350305" cy="365760"/>
           </a:xfrm>
           <a:prstGeom prst="roundRect">
@@ -2927,7 +2927,7 @@
             </a:avLst>
           </a:prstGeom>
           <a:solidFill>
-            <a:srgbClr val="92D050"/>
+            <a:srgbClr val="FFC000"/>
           </a:solidFill>
           <a:ln/>
         </p:spPr>
@@ -2940,8 +2940,8 @@
         </p:nvSpPr>
         <p:spPr>
           <a:xfrm>
-            <a:off x="1474631" y="4197096"/>
-            <a:ext cx="7315200" cy="502920"/>
+            <a:off x="1474630" y="4197096"/>
+            <a:ext cx="8124923" cy="502920"/>
           </a:xfrm>
           <a:prstGeom prst="rect">
             <a:avLst/>
@@ -3111,6 +3111,48 @@
               </a:solidFill>
             </a:endParaRPr>
           </a:p>
+          <a:p>
+            <a:r>
+              <a:rPr lang="en-US" sz="1300" dirty="0" smtClean="0">
+                <a:solidFill>
+                  <a:schemeClr val="bg1"/>
+                </a:solidFill>
+              </a:rPr>
+              <a:t>Presentation Link </a:t>
+            </a:r>
+          </a:p>
+          <a:p>
+            <a:r>
+              <a:rPr lang="en-US" sz="1300" dirty="0">
+                <a:solidFill>
+                  <a:schemeClr val="bg1"/>
+                </a:solidFill>
+                <a:hlinkClick r:id="rId6"/>
+              </a:rPr>
+              <a:t>https://docs.google.com/presentation/d/18cRkAIfj8Ec4Jplj7lTexhhIY264SNo-/</a:t>
+            </a:r>
+            <a:r>
+              <a:rPr lang="en-US" sz="1300" dirty="0" smtClean="0">
+                <a:solidFill>
+                  <a:schemeClr val="bg1"/>
+                </a:solidFill>
+                <a:hlinkClick r:id="rId6"/>
+              </a:rPr>
+              <a:t>edit?usp=sharing&amp;ouid=118075605909374359343&amp;rtpof=true&amp;sd=true</a:t>
+            </a:r>
+            <a:endParaRPr lang="en-US" sz="1300" dirty="0" smtClean="0">
+              <a:solidFill>
+                <a:schemeClr val="bg1"/>
+              </a:solidFill>
+            </a:endParaRPr>
+          </a:p>
+          <a:p>
+            <a:endParaRPr lang="en-US" sz="1300" dirty="0">
+              <a:solidFill>
+                <a:schemeClr val="bg1"/>
+              </a:solidFill>
+            </a:endParaRPr>
+          </a:p>
         </p:txBody>
       </p:sp>
       <p:sp>
@@ -3200,14 +3242,14 @@
           <p:nvPr/>
         </p:nvPicPr>
         <p:blipFill>
-          <a:blip r:embed="rId6"/>
+          <a:blip r:embed="rId7"/>
           <a:stretch>
             <a:fillRect/>
           </a:stretch>
         </p:blipFill>
         <p:spPr>
           <a:xfrm>
-            <a:off x="1078531" y="3520408"/>
+            <a:off x="1075237" y="3091719"/>
             <a:ext cx="353599" cy="365792"/>
           </a:xfrm>
           <a:prstGeom prst="rect">
@@ -3224,14 +3266,38 @@
           <p:nvPr/>
         </p:nvPicPr>
         <p:blipFill>
-          <a:blip r:embed="rId7"/>
+          <a:blip r:embed="rId8"/>
           <a:stretch>
             <a:fillRect/>
           </a:stretch>
         </p:blipFill>
         <p:spPr>
           <a:xfrm>
-            <a:off x="1076883" y="4814284"/>
+            <a:off x="1075236" y="4425680"/>
+            <a:ext cx="353599" cy="365792"/>
+          </a:xfrm>
+          <a:prstGeom prst="rect">
+            <a:avLst/>
+          </a:prstGeom>
+        </p:spPr>
+      </p:pic>
+      <p:pic>
+        <p:nvPicPr>
+          <p:cNvPr id="15" name="Picture 14"/>
+          <p:cNvPicPr>
+            <a:picLocks noChangeAspect="1"/>
+          </p:cNvPicPr>
+          <p:nvPr/>
+        </p:nvPicPr>
+        <p:blipFill>
+          <a:blip r:embed="rId9"/>
+          <a:stretch>
+            <a:fillRect/>
+          </a:stretch>
+        </p:blipFill>
+        <p:spPr>
+          <a:xfrm>
+            <a:off x="1075237" y="3705791"/>
             <a:ext cx="353599" cy="365792"/>
           </a:xfrm>
           <a:prstGeom prst="rect">

--- a/Weekly_Report_Dashboard_Presentation.pptx
+++ b/Weekly_Report_Dashboard_Presentation.pptx
@@ -2918,7 +2918,7 @@
         </p:nvSpPr>
         <p:spPr>
           <a:xfrm>
-            <a:off x="1070234" y="5139991"/>
+            <a:off x="1066939" y="5262594"/>
             <a:ext cx="350305" cy="365760"/>
           </a:xfrm>
           <a:prstGeom prst="roundRect">
@@ -3113,10 +3113,45 @@
           </a:p>
           <a:p>
             <a:r>
+              <a:rPr lang="en-US" sz="1300" dirty="0">
+                <a:solidFill>
+                  <a:schemeClr val="bg1"/>
+                </a:solidFill>
+                <a:hlinkClick r:id="rId6"/>
+              </a:rPr>
+              <a:t>https://</a:t>
+            </a:r>
+            <a:r>
               <a:rPr lang="en-US" sz="1300" dirty="0" smtClean="0">
                 <a:solidFill>
                   <a:schemeClr val="bg1"/>
                 </a:solidFill>
+                <a:hlinkClick r:id="rId6"/>
+              </a:rPr>
+              <a:t>tinyurl.com/3tfucmxy</a:t>
+            </a:r>
+            <a:r>
+              <a:rPr lang="en-US" sz="1300" dirty="0" smtClean="0">
+                <a:solidFill>
+                  <a:schemeClr val="bg1"/>
+                </a:solidFill>
+              </a:rPr>
+              <a:t> </a:t>
+            </a:r>
+          </a:p>
+          <a:p>
+            <a:endParaRPr lang="en-US" sz="1300" dirty="0">
+              <a:solidFill>
+                <a:schemeClr val="bg1"/>
+              </a:solidFill>
+            </a:endParaRPr>
+          </a:p>
+          <a:p>
+            <a:r>
+              <a:rPr lang="en-US" sz="1300" dirty="0" smtClean="0">
+                <a:solidFill>
+                  <a:schemeClr val="bg1"/>
+                </a:solidFill>
               </a:rPr>
               <a:t>Presentation Link </a:t>
             </a:r>
@@ -3127,7 +3162,7 @@
                 <a:solidFill>
                   <a:schemeClr val="bg1"/>
                 </a:solidFill>
-                <a:hlinkClick r:id="rId6"/>
+                <a:hlinkClick r:id="rId7"/>
               </a:rPr>
               <a:t>https://docs.google.com/presentation/d/18cRkAIfj8Ec4Jplj7lTexhhIY264SNo-/</a:t>
             </a:r>
@@ -3136,7 +3171,7 @@
                 <a:solidFill>
                   <a:schemeClr val="bg1"/>
                 </a:solidFill>
-                <a:hlinkClick r:id="rId6"/>
+                <a:hlinkClick r:id="rId7"/>
               </a:rPr>
               <a:t>edit?usp=sharing&amp;ouid=118075605909374359343&amp;rtpof=true&amp;sd=true</a:t>
             </a:r>
@@ -3242,14 +3277,14 @@
           <p:nvPr/>
         </p:nvPicPr>
         <p:blipFill>
-          <a:blip r:embed="rId7"/>
+          <a:blip r:embed="rId8"/>
           <a:stretch>
             <a:fillRect/>
           </a:stretch>
         </p:blipFill>
         <p:spPr>
           <a:xfrm>
-            <a:off x="1075237" y="3091719"/>
+            <a:off x="1066940" y="2898592"/>
             <a:ext cx="353599" cy="365792"/>
           </a:xfrm>
           <a:prstGeom prst="rect">
@@ -3266,14 +3301,14 @@
           <p:nvPr/>
         </p:nvPicPr>
         <p:blipFill>
-          <a:blip r:embed="rId8"/>
+          <a:blip r:embed="rId9"/>
           <a:stretch>
             <a:fillRect/>
           </a:stretch>
         </p:blipFill>
         <p:spPr>
           <a:xfrm>
-            <a:off x="1075236" y="4425680"/>
+            <a:off x="1075236" y="4285099"/>
             <a:ext cx="353599" cy="365792"/>
           </a:xfrm>
           <a:prstGeom prst="rect">
@@ -3290,14 +3325,14 @@
           <p:nvPr/>
         </p:nvPicPr>
         <p:blipFill>
-          <a:blip r:embed="rId9"/>
+          <a:blip r:embed="rId10"/>
           <a:stretch>
             <a:fillRect/>
           </a:stretch>
         </p:blipFill>
         <p:spPr>
           <a:xfrm>
-            <a:off x="1075237" y="3705791"/>
+            <a:off x="1066939" y="3498107"/>
             <a:ext cx="353599" cy="365792"/>
           </a:xfrm>
           <a:prstGeom prst="rect">
